--- a/reports/CopilotStudio_ハッカソン_事前相談会②_状況報告_20260729.pptx
+++ b/reports/CopilotStudio_ハッカソン_事前相談会②_状況報告_20260729.pptx
@@ -34460,14 +34460,13 @@
                 <a:tableStyleId>{5C22544A-7EE6-4342-B048-85BDC9FD1C3A}</a:tableStyleId>
               </a:tblPr>
               <a:tblGrid>
-                <a:gridCol w="658368"/>
-                <a:gridCol w="1783080"/>
-                <a:gridCol w="1170432"/>
-                <a:gridCol w="603504"/>
-                <a:gridCol w="530352"/>
-                <a:gridCol w="841248"/>
-                <a:gridCol w="2798064"/>
-                <a:gridCol w="2331720"/>
+                <a:gridCol w="731520"/>
+                <a:gridCol w="2286000"/>
+                <a:gridCol w="1691640"/>
+                <a:gridCol w="731520"/>
+                <a:gridCol w="640080"/>
+                <a:gridCol w="914400"/>
+                <a:gridCol w="3721608"/>
               </a:tblGrid>
               <a:tr h="402336">
                 <a:tc>
@@ -34682,32 +34681,6 @@
                     </a:solidFill>
                   </a:tcPr>
                 </a:tc>
-                <a:tc>
-                  <a:txBody>
-                    <a:bodyPr wrap="square"/>
-                    <a:lstStyle/>
-                    <a:p>
-                      <a:pPr algn="ctr">
-                        <a:lnSpc>
-                          <a:spcPct val="96000"/>
-                        </a:lnSpc>
-                      </a:pPr>
-                      <a:r>
-                        <a:rPr sz="1089" b="1">
-                          <a:solidFill>
-                            <a:srgbClr val="FFFFFF"/>
-                          </a:solidFill>
-                        </a:rPr>
-                        <a:t>事務局アクション</a:t>
-                      </a:r>
-                    </a:p>
-                  </a:txBody>
-                  <a:tcPr marL="50800" marR="50800" marT="12700" marB="12700" anchor="ctr">
-                    <a:solidFill>
-                      <a:srgbClr val="1B5C80"/>
-                    </a:solidFill>
-                  </a:tcPr>
-                </a:tc>
               </a:tr>
               <a:tr h="384048">
                 <a:tc>
@@ -34767,18 +34740,18 @@
                     <a:bodyPr wrap="square"/>
                     <a:lstStyle/>
                     <a:p>
-                      <a:pPr algn="ctr">
+                      <a:pPr algn="l">
                         <a:lnSpc>
                           <a:spcPct val="96000"/>
                         </a:lnSpc>
                       </a:pPr>
                       <a:r>
-                        <a:rPr sz="919" b="1">
+                        <a:rPr sz="1089" b="0">
                           <a:solidFill>
-                            <a:srgbClr val="1B5C80"/>
+                            <a:srgbClr val="232323"/>
                           </a:solidFill>
                         </a:rPr>
-                        <a:t>③ MVP候補と入出力</a:t>
+                        <a:t/>
                       </a:r>
                     </a:p>
                   </a:txBody>
@@ -34892,32 +34865,6 @@
                     </a:solidFill>
                   </a:tcPr>
                 </a:tc>
-                <a:tc>
-                  <a:txBody>
-                    <a:bodyPr wrap="square"/>
-                    <a:lstStyle/>
-                    <a:p>
-                      <a:pPr algn="l">
-                        <a:lnSpc>
-                          <a:spcPct val="96000"/>
-                        </a:lnSpc>
-                      </a:pPr>
-                      <a:r>
-                        <a:rPr sz="919" b="0">
-                          <a:solidFill>
-                            <a:srgbClr val="232323"/>
-                          </a:solidFill>
-                        </a:rPr>
-                        <a:t>開発手順の型・8〜9月スケジュール・プロンプト例を共有</a:t>
-                      </a:r>
-                    </a:p>
-                  </a:txBody>
-                  <a:tcPr marL="50800" marR="50800" marT="12700" marB="12700" anchor="ctr">
-                    <a:solidFill>
-                      <a:srgbClr val="FFFFFF"/>
-                    </a:solidFill>
-                  </a:tcPr>
-                </a:tc>
               </a:tr>
               <a:tr h="384048">
                 <a:tc>
@@ -34977,18 +34924,18 @@
                     <a:bodyPr wrap="square"/>
                     <a:lstStyle/>
                     <a:p>
-                      <a:pPr algn="ctr">
+                      <a:pPr algn="l">
                         <a:lnSpc>
                           <a:spcPct val="96000"/>
                         </a:lnSpc>
                       </a:pPr>
                       <a:r>
-                        <a:rPr sz="919" b="1">
+                        <a:rPr sz="1089" b="0">
                           <a:solidFill>
-                            <a:srgbClr val="1B5C80"/>
+                            <a:srgbClr val="232323"/>
                           </a:solidFill>
                         </a:rPr>
-                        <a:t>③ MVP候補と入出力</a:t>
+                        <a:t/>
                       </a:r>
                     </a:p>
                   </a:txBody>
@@ -35102,32 +35049,6 @@
                     </a:solidFill>
                   </a:tcPr>
                 </a:tc>
-                <a:tc>
-                  <a:txBody>
-                    <a:bodyPr wrap="square"/>
-                    <a:lstStyle/>
-                    <a:p>
-                      <a:pPr algn="l">
-                        <a:lnSpc>
-                          <a:spcPct val="96000"/>
-                        </a:lnSpc>
-                      </a:pPr>
-                      <a:r>
-                        <a:rPr sz="919" b="0">
-                          <a:solidFill>
-                            <a:srgbClr val="232323"/>
-                          </a:solidFill>
-                        </a:rPr>
-                        <a:t>設計相談用プロンプトの見本を配布</a:t>
-                      </a:r>
-                    </a:p>
-                  </a:txBody>
-                  <a:tcPr marL="50800" marR="50800" marT="12700" marB="12700" anchor="ctr">
-                    <a:solidFill>
-                      <a:srgbClr val="F8FDFA"/>
-                    </a:solidFill>
-                  </a:tcPr>
-                </a:tc>
               </a:tr>
               <a:tr h="384048">
                 <a:tc>
@@ -35187,18 +35108,18 @@
                     <a:bodyPr wrap="square"/>
                     <a:lstStyle/>
                     <a:p>
-                      <a:pPr algn="ctr">
+                      <a:pPr algn="l">
                         <a:lnSpc>
                           <a:spcPct val="96000"/>
                         </a:lnSpc>
                       </a:pPr>
                       <a:r>
-                        <a:rPr sz="919" b="1">
+                        <a:rPr sz="1089" b="0">
                           <a:solidFill>
-                            <a:srgbClr val="1B5C80"/>
+                            <a:srgbClr val="232323"/>
                           </a:solidFill>
                         </a:rPr>
-                        <a:t>③ MVP候補と入出力</a:t>
+                        <a:t/>
                       </a:r>
                     </a:p>
                   </a:txBody>
@@ -35276,7 +35197,7 @@
                             <a:srgbClr val="232323"/>
                           </a:solidFill>
                         </a:rPr>
-                        <a:t>△確認要</a:t>
+                        <a:t>△回避可</a:t>
                       </a:r>
                     </a:p>
                   </a:txBody>
@@ -35302,33 +35223,7 @@
                             <a:srgbClr val="232323"/>
                           </a:solidFill>
                         </a:rPr>
-                        <a:t>外部Webは手動取得＋SharePoint格納で回避可／営業システム連携の可否</a:t>
-                      </a:r>
-                    </a:p>
-                  </a:txBody>
-                  <a:tcPr marL="50800" marR="50800" marT="12700" marB="12700" anchor="ctr">
-                    <a:solidFill>
-                      <a:srgbClr val="FFFFFF"/>
-                    </a:solidFill>
-                  </a:tcPr>
-                </a:tc>
-                <a:tc>
-                  <a:txBody>
-                    <a:bodyPr wrap="square"/>
-                    <a:lstStyle/>
-                    <a:p>
-                      <a:pPr algn="l">
-                        <a:lnSpc>
-                          <a:spcPct val="96000"/>
-                        </a:lnSpc>
-                      </a:pPr>
-                      <a:r>
-                        <a:rPr sz="919" b="0">
-                          <a:solidFill>
-                            <a:srgbClr val="232323"/>
-                          </a:solidFill>
-                        </a:rPr>
-                        <a:t>営業システムから取得可能なデータ範囲を判断（外部Webは回避方針で進行）</a:t>
+                        <a:t>外部Webは手動取得＋SharePoint格納で回避可／営業データのマスキング有無は要確認（手動マスキングで回避可）</a:t>
                       </a:r>
                     </a:p>
                   </a:txBody>
@@ -35397,18 +35292,18 @@
                     <a:bodyPr wrap="square"/>
                     <a:lstStyle/>
                     <a:p>
-                      <a:pPr algn="ctr">
+                      <a:pPr algn="l">
                         <a:lnSpc>
                           <a:spcPct val="96000"/>
                         </a:lnSpc>
                       </a:pPr>
                       <a:r>
-                        <a:rPr sz="919" b="1">
+                        <a:rPr sz="1089" b="0">
                           <a:solidFill>
-                            <a:srgbClr val="1B5C80"/>
+                            <a:srgbClr val="232323"/>
                           </a:solidFill>
                         </a:rPr>
-                        <a:t>－ 再設計中</a:t>
+                        <a:t/>
                       </a:r>
                     </a:p>
                   </a:txBody>
@@ -35522,32 +35417,6 @@
                     </a:solidFill>
                   </a:tcPr>
                 </a:tc>
-                <a:tc>
-                  <a:txBody>
-                    <a:bodyPr wrap="square"/>
-                    <a:lstStyle/>
-                    <a:p>
-                      <a:pPr algn="l">
-                        <a:lnSpc>
-                          <a:spcPct val="96000"/>
-                        </a:lnSpc>
-                      </a:pPr>
-                      <a:r>
-                        <a:rPr sz="919" b="0">
-                          <a:solidFill>
-                            <a:srgbClr val="232323"/>
-                          </a:solidFill>
-                        </a:rPr>
-                        <a:t>再設計対象として最優先フォロー。新案確定後に難易度・ボリュームを再評価</a:t>
-                      </a:r>
-                    </a:p>
-                  </a:txBody>
-                  <a:tcPr marL="50800" marR="50800" marT="12700" marB="12700" anchor="ctr">
-                    <a:solidFill>
-                      <a:srgbClr val="F8FDFA"/>
-                    </a:solidFill>
-                  </a:tcPr>
-                </a:tc>
               </a:tr>
               <a:tr h="384048">
                 <a:tc>
@@ -35607,18 +35476,18 @@
                     <a:bodyPr wrap="square"/>
                     <a:lstStyle/>
                     <a:p>
-                      <a:pPr algn="ctr">
+                      <a:pPr algn="l">
                         <a:lnSpc>
                           <a:spcPct val="96000"/>
                         </a:lnSpc>
                       </a:pPr>
                       <a:r>
-                        <a:rPr sz="919" b="1">
+                        <a:rPr sz="1089" b="0">
                           <a:solidFill>
-                            <a:srgbClr val="1B5C80"/>
+                            <a:srgbClr val="232323"/>
                           </a:solidFill>
                         </a:rPr>
-                        <a:t>⑤ 効果・デモ筋書き</a:t>
+                        <a:t/>
                       </a:r>
                     </a:p>
                   </a:txBody>
@@ -35732,32 +35601,6 @@
                     </a:solidFill>
                   </a:tcPr>
                 </a:tc>
-                <a:tc>
-                  <a:txBody>
-                    <a:bodyPr wrap="square"/>
-                    <a:lstStyle/>
-                    <a:p>
-                      <a:pPr algn="l">
-                        <a:lnSpc>
-                          <a:spcPct val="96000"/>
-                        </a:lnSpc>
-                      </a:pPr>
-                      <a:r>
-                        <a:rPr sz="919" b="0">
-                          <a:solidFill>
-                            <a:srgbClr val="232323"/>
-                          </a:solidFill>
-                        </a:rPr>
-                        <a:t>Formsは使わずCopilot Studioの会話入力で代替する方針を共有</a:t>
-                      </a:r>
-                    </a:p>
-                  </a:txBody>
-                  <a:tcPr marL="50800" marR="50800" marT="12700" marB="12700" anchor="ctr">
-                    <a:solidFill>
-                      <a:srgbClr val="FFFFFF"/>
-                    </a:solidFill>
-                  </a:tcPr>
-                </a:tc>
               </a:tr>
               <a:tr h="384048">
                 <a:tc>
@@ -35817,18 +35660,18 @@
                     <a:bodyPr wrap="square"/>
                     <a:lstStyle/>
                     <a:p>
-                      <a:pPr algn="ctr">
+                      <a:pPr algn="l">
                         <a:lnSpc>
                           <a:spcPct val="96000"/>
                         </a:lnSpc>
                       </a:pPr>
                       <a:r>
-                        <a:rPr sz="919" b="1">
+                        <a:rPr sz="1089" b="0">
                           <a:solidFill>
-                            <a:srgbClr val="1B5C80"/>
+                            <a:srgbClr val="232323"/>
                           </a:solidFill>
                         </a:rPr>
-                        <a:t>③ MVP候補と入出力 *</a:t>
+                        <a:t/>
                       </a:r>
                     </a:p>
                   </a:txBody>
@@ -35942,32 +35785,6 @@
                     </a:solidFill>
                   </a:tcPr>
                 </a:tc>
-                <a:tc>
-                  <a:txBody>
-                    <a:bodyPr wrap="square"/>
-                    <a:lstStyle/>
-                    <a:p>
-                      <a:pPr algn="l">
-                        <a:lnSpc>
-                          <a:spcPct val="96000"/>
-                        </a:lnSpc>
-                      </a:pPr>
-                      <a:r>
-                        <a:rPr sz="919" b="0">
-                          <a:solidFill>
-                            <a:srgbClr val="232323"/>
-                          </a:solidFill>
-                        </a:rPr>
-                        <a:t>SharePoint/OneDrive格納を原則化できるか（回避方針で進行可）</a:t>
-                      </a:r>
-                    </a:p>
-                  </a:txBody>
-                  <a:tcPr marL="50800" marR="50800" marT="12700" marB="12700" anchor="ctr">
-                    <a:solidFill>
-                      <a:srgbClr val="F8FDFA"/>
-                    </a:solidFill>
-                  </a:tcPr>
-                </a:tc>
               </a:tr>
               <a:tr h="384048">
                 <a:tc>
@@ -36027,18 +35844,18 @@
                     <a:bodyPr wrap="square"/>
                     <a:lstStyle/>
                     <a:p>
-                      <a:pPr algn="ctr">
+                      <a:pPr algn="l">
                         <a:lnSpc>
                           <a:spcPct val="96000"/>
                         </a:lnSpc>
                       </a:pPr>
                       <a:r>
-                        <a:rPr sz="919" b="1">
+                        <a:rPr sz="1089" b="0">
                           <a:solidFill>
-                            <a:srgbClr val="1B5C80"/>
+                            <a:srgbClr val="232323"/>
                           </a:solidFill>
                         </a:rPr>
-                        <a:t>⑤ 効果・デモ筋書き *</a:t>
+                        <a:t/>
                       </a:r>
                     </a:p>
                   </a:txBody>
@@ -36152,32 +35969,6 @@
                     </a:solidFill>
                   </a:tcPr>
                 </a:tc>
-                <a:tc>
-                  <a:txBody>
-                    <a:bodyPr wrap="square"/>
-                    <a:lstStyle/>
-                    <a:p>
-                      <a:pPr algn="l">
-                        <a:lnSpc>
-                          <a:spcPct val="96000"/>
-                        </a:lnSpc>
-                      </a:pPr>
-                      <a:r>
-                        <a:rPr sz="919" b="0">
-                          <a:solidFill>
-                            <a:srgbClr val="232323"/>
-                          </a:solidFill>
-                        </a:rPr>
-                        <a:t>初回メンター定例でMVPの入力・出力例を確認</a:t>
-                      </a:r>
-                    </a:p>
-                  </a:txBody>
-                  <a:tcPr marL="50800" marR="50800" marT="12700" marB="12700" anchor="ctr">
-                    <a:solidFill>
-                      <a:srgbClr val="FFFFFF"/>
-                    </a:solidFill>
-                  </a:tcPr>
-                </a:tc>
               </a:tr>
               <a:tr h="384048">
                 <a:tc>
@@ -36237,18 +36028,18 @@
                     <a:bodyPr wrap="square"/>
                     <a:lstStyle/>
                     <a:p>
-                      <a:pPr algn="ctr">
+                      <a:pPr algn="l">
                         <a:lnSpc>
                           <a:spcPct val="96000"/>
                         </a:lnSpc>
                       </a:pPr>
                       <a:r>
-                        <a:rPr sz="919" b="1">
+                        <a:rPr sz="1089" b="0">
                           <a:solidFill>
-                            <a:srgbClr val="1B5C80"/>
+                            <a:srgbClr val="232323"/>
                           </a:solidFill>
                         </a:rPr>
-                        <a:t>④ 概念設計レベル</a:t>
+                        <a:t/>
                       </a:r>
                     </a:p>
                   </a:txBody>
@@ -36362,32 +36153,6 @@
                     </a:solidFill>
                   </a:tcPr>
                 </a:tc>
-                <a:tc>
-                  <a:txBody>
-                    <a:bodyPr wrap="square"/>
-                    <a:lstStyle/>
-                    <a:p>
-                      <a:pPr algn="l">
-                        <a:lnSpc>
-                          <a:spcPct val="96000"/>
-                        </a:lnSpc>
-                      </a:pPr>
-                      <a:r>
-                        <a:rPr sz="919" b="0">
-                          <a:solidFill>
-                            <a:srgbClr val="232323"/>
-                          </a:solidFill>
-                        </a:rPr>
-                        <a:t>社員・協力会社・ゲスト情報と予定表参照の可否を判断</a:t>
-                      </a:r>
-                    </a:p>
-                  </a:txBody>
-                  <a:tcPr marL="50800" marR="50800" marT="12700" marB="12700" anchor="ctr">
-                    <a:solidFill>
-                      <a:srgbClr val="F8FDFA"/>
-                    </a:solidFill>
-                  </a:tcPr>
-                </a:tc>
               </a:tr>
               <a:tr h="384048">
                 <a:tc>
@@ -36447,18 +36212,18 @@
                     <a:bodyPr wrap="square"/>
                     <a:lstStyle/>
                     <a:p>
-                      <a:pPr algn="ctr">
+                      <a:pPr algn="l">
                         <a:lnSpc>
                           <a:spcPct val="96000"/>
                         </a:lnSpc>
                       </a:pPr>
                       <a:r>
-                        <a:rPr sz="919" b="1">
+                        <a:rPr sz="1089" b="0">
                           <a:solidFill>
-                            <a:srgbClr val="1B5C80"/>
+                            <a:srgbClr val="232323"/>
                           </a:solidFill>
                         </a:rPr>
-                        <a:t>④ 概念設計レベル</a:t>
+                        <a:t/>
                       </a:r>
                     </a:p>
                   </a:txBody>
@@ -36572,32 +36337,6 @@
                     </a:solidFill>
                   </a:tcPr>
                 </a:tc>
-                <a:tc>
-                  <a:txBody>
-                    <a:bodyPr wrap="square"/>
-                    <a:lstStyle/>
-                    <a:p>
-                      <a:pPr algn="l">
-                        <a:lnSpc>
-                          <a:spcPct val="96000"/>
-                        </a:lnSpc>
-                      </a:pPr>
-                      <a:r>
-                        <a:rPr sz="919" b="0">
-                          <a:solidFill>
-                            <a:srgbClr val="232323"/>
-                          </a:solidFill>
-                        </a:rPr>
-                        <a:t>固定文面を自動送信してよい条件を個別に判断</a:t>
-                      </a:r>
-                    </a:p>
-                  </a:txBody>
-                  <a:tcPr marL="50800" marR="50800" marT="12700" marB="12700" anchor="ctr">
-                    <a:solidFill>
-                      <a:srgbClr val="FFFFFF"/>
-                    </a:solidFill>
-                  </a:tcPr>
-                </a:tc>
               </a:tr>
               <a:tr h="384048">
                 <a:tc>
@@ -36657,18 +36396,18 @@
                     <a:bodyPr wrap="square"/>
                     <a:lstStyle/>
                     <a:p>
-                      <a:pPr algn="ctr">
+                      <a:pPr algn="l">
                         <a:lnSpc>
                           <a:spcPct val="96000"/>
                         </a:lnSpc>
                       </a:pPr>
                       <a:r>
-                        <a:rPr sz="919" b="1">
+                        <a:rPr sz="1089" b="0">
                           <a:solidFill>
-                            <a:srgbClr val="1B5C80"/>
+                            <a:srgbClr val="232323"/>
                           </a:solidFill>
                         </a:rPr>
-                        <a:t>④ 概念設計レベル</a:t>
+                        <a:t/>
                       </a:r>
                     </a:p>
                   </a:txBody>
@@ -36782,32 +36521,6 @@
                     </a:solidFill>
                   </a:tcPr>
                 </a:tc>
-                <a:tc>
-                  <a:txBody>
-                    <a:bodyPr wrap="square"/>
-                    <a:lstStyle/>
-                    <a:p>
-                      <a:pPr algn="l">
-                        <a:lnSpc>
-                          <a:spcPct val="96000"/>
-                        </a:lnSpc>
-                      </a:pPr>
-                      <a:r>
-                        <a:rPr sz="919" b="0">
-                          <a:solidFill>
-                            <a:srgbClr val="232323"/>
-                          </a:solidFill>
-                        </a:rPr>
-                        <a:t>サンプル素材と評価観点を準備し、実機確認で精度を担保</a:t>
-                      </a:r>
-                    </a:p>
-                  </a:txBody>
-                  <a:tcPr marL="50800" marR="50800" marT="12700" marB="12700" anchor="ctr">
-                    <a:solidFill>
-                      <a:srgbClr val="F8FDFA"/>
-                    </a:solidFill>
-                  </a:tcPr>
-                </a:tc>
               </a:tr>
               <a:tr h="384048">
                 <a:tc>
@@ -36867,18 +36580,18 @@
                     <a:bodyPr wrap="square"/>
                     <a:lstStyle/>
                     <a:p>
-                      <a:pPr algn="ctr">
+                      <a:pPr algn="l">
                         <a:lnSpc>
                           <a:spcPct val="96000"/>
                         </a:lnSpc>
                       </a:pPr>
                       <a:r>
-                        <a:rPr sz="919" b="1">
+                        <a:rPr sz="1089" b="0">
                           <a:solidFill>
-                            <a:srgbClr val="1B5C80"/>
+                            <a:srgbClr val="232323"/>
                           </a:solidFill>
                         </a:rPr>
-                        <a:t>④ 概念設計レベル</a:t>
+                        <a:t/>
                       </a:r>
                     </a:p>
                   </a:txBody>
@@ -36992,32 +36705,6 @@
                     </a:solidFill>
                   </a:tcPr>
                 </a:tc>
-                <a:tc>
-                  <a:txBody>
-                    <a:bodyPr wrap="square"/>
-                    <a:lstStyle/>
-                    <a:p>
-                      <a:pPr algn="l">
-                        <a:lnSpc>
-                          <a:spcPct val="96000"/>
-                        </a:lnSpc>
-                      </a:pPr>
-                      <a:r>
-                        <a:rPr sz="919" b="0">
-                          <a:solidFill>
-                            <a:srgbClr val="232323"/>
-                          </a:solidFill>
-                        </a:rPr>
-                        <a:t>本番移行の申請フローと運用項目テンプレートを提示</a:t>
-                      </a:r>
-                    </a:p>
-                  </a:txBody>
-                  <a:tcPr marL="50800" marR="50800" marT="12700" marB="12700" anchor="ctr">
-                    <a:solidFill>
-                      <a:srgbClr val="FFFFFF"/>
-                    </a:solidFill>
-                  </a:tcPr>
-                </a:tc>
               </a:tr>
             </a:tbl>
           </a:graphicData>
@@ -37025,7 +36712,2845 @@
       </p:graphicFrame>
       <p:sp>
         <p:nvSpPr>
-          <p:cNvPr id="7" name="Rectangle 6"/>
+          <p:cNvPr id="7" name="Chevron 6"/>
+          <p:cNvSpPr/>
+          <p:nvPr/>
+        </p:nvSpPr>
+        <p:spPr>
+          <a:xfrm>
+            <a:off x="3849624" y="2260854"/>
+            <a:ext cx="219456" cy="141732"/>
+          </a:xfrm>
+          <a:prstGeom prst="chevron">
+            <a:avLst/>
+          </a:prstGeom>
+          <a:solidFill>
+            <a:srgbClr val="0FA4CC"/>
+          </a:solidFill>
+          <a:ln>
+            <a:noFill/>
+          </a:ln>
+          <a:effectLst/>
+        </p:spPr>
+        <p:style>
+          <a:lnRef idx="1">
+            <a:schemeClr val="accent1"/>
+          </a:lnRef>
+          <a:fillRef idx="3">
+            <a:schemeClr val="accent1"/>
+          </a:fillRef>
+          <a:effectRef idx="2">
+            <a:schemeClr val="accent1"/>
+          </a:effectRef>
+          <a:fontRef idx="minor">
+            <a:schemeClr val="lt1"/>
+          </a:fontRef>
+        </p:style>
+        <p:txBody>
+          <a:bodyPr rtlCol="0" anchor="ctr"/>
+          <a:lstStyle/>
+          <a:p>
+            <a:pPr algn="ctr"/>
+          </a:p>
+        </p:txBody>
+      </p:sp>
+      <p:sp>
+        <p:nvSpPr>
+          <p:cNvPr id="8" name="Chevron 7"/>
+          <p:cNvSpPr/>
+          <p:nvPr/>
+        </p:nvSpPr>
+        <p:spPr>
+          <a:xfrm>
+            <a:off x="4050792" y="2260854"/>
+            <a:ext cx="219456" cy="141732"/>
+          </a:xfrm>
+          <a:prstGeom prst="chevron">
+            <a:avLst/>
+          </a:prstGeom>
+          <a:solidFill>
+            <a:srgbClr val="0FA4CC"/>
+          </a:solidFill>
+          <a:ln>
+            <a:noFill/>
+          </a:ln>
+          <a:effectLst/>
+        </p:spPr>
+        <p:style>
+          <a:lnRef idx="1">
+            <a:schemeClr val="accent1"/>
+          </a:lnRef>
+          <a:fillRef idx="3">
+            <a:schemeClr val="accent1"/>
+          </a:fillRef>
+          <a:effectRef idx="2">
+            <a:schemeClr val="accent1"/>
+          </a:effectRef>
+          <a:fontRef idx="minor">
+            <a:schemeClr val="lt1"/>
+          </a:fontRef>
+        </p:style>
+        <p:txBody>
+          <a:bodyPr rtlCol="0" anchor="ctr"/>
+          <a:lstStyle/>
+          <a:p>
+            <a:pPr algn="ctr"/>
+          </a:p>
+        </p:txBody>
+      </p:sp>
+      <p:sp>
+        <p:nvSpPr>
+          <p:cNvPr id="9" name="Chevron 8"/>
+          <p:cNvSpPr/>
+          <p:nvPr/>
+        </p:nvSpPr>
+        <p:spPr>
+          <a:xfrm>
+            <a:off x="4251960" y="2260854"/>
+            <a:ext cx="219456" cy="141732"/>
+          </a:xfrm>
+          <a:prstGeom prst="chevron">
+            <a:avLst/>
+          </a:prstGeom>
+          <a:solidFill>
+            <a:srgbClr val="0FA4CC"/>
+          </a:solidFill>
+          <a:ln>
+            <a:noFill/>
+          </a:ln>
+          <a:effectLst/>
+        </p:spPr>
+        <p:style>
+          <a:lnRef idx="1">
+            <a:schemeClr val="accent1"/>
+          </a:lnRef>
+          <a:fillRef idx="3">
+            <a:schemeClr val="accent1"/>
+          </a:fillRef>
+          <a:effectRef idx="2">
+            <a:schemeClr val="accent1"/>
+          </a:effectRef>
+          <a:fontRef idx="minor">
+            <a:schemeClr val="lt1"/>
+          </a:fontRef>
+        </p:style>
+        <p:txBody>
+          <a:bodyPr rtlCol="0" anchor="ctr"/>
+          <a:lstStyle/>
+          <a:p>
+            <a:pPr algn="ctr"/>
+          </a:p>
+        </p:txBody>
+      </p:sp>
+      <p:sp>
+        <p:nvSpPr>
+          <p:cNvPr id="10" name="Chevron 9"/>
+          <p:cNvSpPr/>
+          <p:nvPr/>
+        </p:nvSpPr>
+        <p:spPr>
+          <a:xfrm>
+            <a:off x="4453128" y="2260854"/>
+            <a:ext cx="219456" cy="141732"/>
+          </a:xfrm>
+          <a:prstGeom prst="chevron">
+            <a:avLst/>
+          </a:prstGeom>
+          <a:solidFill>
+            <a:srgbClr val="D0D4D7"/>
+          </a:solidFill>
+          <a:ln>
+            <a:noFill/>
+          </a:ln>
+          <a:effectLst/>
+        </p:spPr>
+        <p:style>
+          <a:lnRef idx="1">
+            <a:schemeClr val="accent1"/>
+          </a:lnRef>
+          <a:fillRef idx="3">
+            <a:schemeClr val="accent1"/>
+          </a:fillRef>
+          <a:effectRef idx="2">
+            <a:schemeClr val="accent1"/>
+          </a:effectRef>
+          <a:fontRef idx="minor">
+            <a:schemeClr val="lt1"/>
+          </a:fontRef>
+        </p:style>
+        <p:txBody>
+          <a:bodyPr rtlCol="0" anchor="ctr"/>
+          <a:lstStyle/>
+          <a:p>
+            <a:pPr algn="ctr"/>
+          </a:p>
+        </p:txBody>
+      </p:sp>
+      <p:sp>
+        <p:nvSpPr>
+          <p:cNvPr id="11" name="Chevron 10"/>
+          <p:cNvSpPr/>
+          <p:nvPr/>
+        </p:nvSpPr>
+        <p:spPr>
+          <a:xfrm>
+            <a:off x="4654296" y="2260854"/>
+            <a:ext cx="219456" cy="141732"/>
+          </a:xfrm>
+          <a:prstGeom prst="chevron">
+            <a:avLst/>
+          </a:prstGeom>
+          <a:solidFill>
+            <a:srgbClr val="D0D4D7"/>
+          </a:solidFill>
+          <a:ln>
+            <a:noFill/>
+          </a:ln>
+          <a:effectLst/>
+        </p:spPr>
+        <p:style>
+          <a:lnRef idx="1">
+            <a:schemeClr val="accent1"/>
+          </a:lnRef>
+          <a:fillRef idx="3">
+            <a:schemeClr val="accent1"/>
+          </a:fillRef>
+          <a:effectRef idx="2">
+            <a:schemeClr val="accent1"/>
+          </a:effectRef>
+          <a:fontRef idx="minor">
+            <a:schemeClr val="lt1"/>
+          </a:fontRef>
+        </p:style>
+        <p:txBody>
+          <a:bodyPr rtlCol="0" anchor="ctr"/>
+          <a:lstStyle/>
+          <a:p>
+            <a:pPr algn="ctr"/>
+          </a:p>
+        </p:txBody>
+      </p:sp>
+      <p:sp>
+        <p:nvSpPr>
+          <p:cNvPr id="12" name="TextBox 11"/>
+          <p:cNvSpPr txBox="1"/>
+          <p:nvPr/>
+        </p:nvSpPr>
+        <p:spPr>
+          <a:xfrm>
+            <a:off x="4892040" y="2221992"/>
+            <a:ext cx="475488" cy="219456"/>
+          </a:xfrm>
+          <a:prstGeom prst="rect">
+            <a:avLst/>
+          </a:prstGeom>
+          <a:noFill/>
+        </p:spPr>
+        <p:txBody>
+          <a:bodyPr wrap="square" anchor="ctr" lIns="25400" rIns="25400" tIns="12700" bIns="12700">
+            <a:spAutoFit/>
+          </a:bodyPr>
+          <a:lstStyle/>
+          <a:p>
+            <a:pPr algn="l">
+              <a:lnSpc>
+                <a:spcPct val="100000"/>
+              </a:lnSpc>
+            </a:pPr>
+            <a:r>
+              <a:rPr sz="1000" b="1">
+                <a:solidFill>
+                  <a:srgbClr val="1B5C80"/>
+                </a:solidFill>
+              </a:rPr>
+              <a:t>③</a:t>
+            </a:r>
+          </a:p>
+        </p:txBody>
+      </p:sp>
+      <p:sp>
+        <p:nvSpPr>
+          <p:cNvPr id="13" name="Chevron 12"/>
+          <p:cNvSpPr/>
+          <p:nvPr/>
+        </p:nvSpPr>
+        <p:spPr>
+          <a:xfrm>
+            <a:off x="3849624" y="2644902"/>
+            <a:ext cx="219456" cy="141732"/>
+          </a:xfrm>
+          <a:prstGeom prst="chevron">
+            <a:avLst/>
+          </a:prstGeom>
+          <a:solidFill>
+            <a:srgbClr val="0FA4CC"/>
+          </a:solidFill>
+          <a:ln>
+            <a:noFill/>
+          </a:ln>
+          <a:effectLst/>
+        </p:spPr>
+        <p:style>
+          <a:lnRef idx="1">
+            <a:schemeClr val="accent1"/>
+          </a:lnRef>
+          <a:fillRef idx="3">
+            <a:schemeClr val="accent1"/>
+          </a:fillRef>
+          <a:effectRef idx="2">
+            <a:schemeClr val="accent1"/>
+          </a:effectRef>
+          <a:fontRef idx="minor">
+            <a:schemeClr val="lt1"/>
+          </a:fontRef>
+        </p:style>
+        <p:txBody>
+          <a:bodyPr rtlCol="0" anchor="ctr"/>
+          <a:lstStyle/>
+          <a:p>
+            <a:pPr algn="ctr"/>
+          </a:p>
+        </p:txBody>
+      </p:sp>
+      <p:sp>
+        <p:nvSpPr>
+          <p:cNvPr id="14" name="Chevron 13"/>
+          <p:cNvSpPr/>
+          <p:nvPr/>
+        </p:nvSpPr>
+        <p:spPr>
+          <a:xfrm>
+            <a:off x="4050792" y="2644902"/>
+            <a:ext cx="219456" cy="141732"/>
+          </a:xfrm>
+          <a:prstGeom prst="chevron">
+            <a:avLst/>
+          </a:prstGeom>
+          <a:solidFill>
+            <a:srgbClr val="0FA4CC"/>
+          </a:solidFill>
+          <a:ln>
+            <a:noFill/>
+          </a:ln>
+          <a:effectLst/>
+        </p:spPr>
+        <p:style>
+          <a:lnRef idx="1">
+            <a:schemeClr val="accent1"/>
+          </a:lnRef>
+          <a:fillRef idx="3">
+            <a:schemeClr val="accent1"/>
+          </a:fillRef>
+          <a:effectRef idx="2">
+            <a:schemeClr val="accent1"/>
+          </a:effectRef>
+          <a:fontRef idx="minor">
+            <a:schemeClr val="lt1"/>
+          </a:fontRef>
+        </p:style>
+        <p:txBody>
+          <a:bodyPr rtlCol="0" anchor="ctr"/>
+          <a:lstStyle/>
+          <a:p>
+            <a:pPr algn="ctr"/>
+          </a:p>
+        </p:txBody>
+      </p:sp>
+      <p:sp>
+        <p:nvSpPr>
+          <p:cNvPr id="15" name="Chevron 14"/>
+          <p:cNvSpPr/>
+          <p:nvPr/>
+        </p:nvSpPr>
+        <p:spPr>
+          <a:xfrm>
+            <a:off x="4251960" y="2644902"/>
+            <a:ext cx="219456" cy="141732"/>
+          </a:xfrm>
+          <a:prstGeom prst="chevron">
+            <a:avLst/>
+          </a:prstGeom>
+          <a:solidFill>
+            <a:srgbClr val="0FA4CC"/>
+          </a:solidFill>
+          <a:ln>
+            <a:noFill/>
+          </a:ln>
+          <a:effectLst/>
+        </p:spPr>
+        <p:style>
+          <a:lnRef idx="1">
+            <a:schemeClr val="accent1"/>
+          </a:lnRef>
+          <a:fillRef idx="3">
+            <a:schemeClr val="accent1"/>
+          </a:fillRef>
+          <a:effectRef idx="2">
+            <a:schemeClr val="accent1"/>
+          </a:effectRef>
+          <a:fontRef idx="minor">
+            <a:schemeClr val="lt1"/>
+          </a:fontRef>
+        </p:style>
+        <p:txBody>
+          <a:bodyPr rtlCol="0" anchor="ctr"/>
+          <a:lstStyle/>
+          <a:p>
+            <a:pPr algn="ctr"/>
+          </a:p>
+        </p:txBody>
+      </p:sp>
+      <p:sp>
+        <p:nvSpPr>
+          <p:cNvPr id="16" name="Chevron 15"/>
+          <p:cNvSpPr/>
+          <p:nvPr/>
+        </p:nvSpPr>
+        <p:spPr>
+          <a:xfrm>
+            <a:off x="4453128" y="2644902"/>
+            <a:ext cx="219456" cy="141732"/>
+          </a:xfrm>
+          <a:prstGeom prst="chevron">
+            <a:avLst/>
+          </a:prstGeom>
+          <a:solidFill>
+            <a:srgbClr val="D0D4D7"/>
+          </a:solidFill>
+          <a:ln>
+            <a:noFill/>
+          </a:ln>
+          <a:effectLst/>
+        </p:spPr>
+        <p:style>
+          <a:lnRef idx="1">
+            <a:schemeClr val="accent1"/>
+          </a:lnRef>
+          <a:fillRef idx="3">
+            <a:schemeClr val="accent1"/>
+          </a:fillRef>
+          <a:effectRef idx="2">
+            <a:schemeClr val="accent1"/>
+          </a:effectRef>
+          <a:fontRef idx="minor">
+            <a:schemeClr val="lt1"/>
+          </a:fontRef>
+        </p:style>
+        <p:txBody>
+          <a:bodyPr rtlCol="0" anchor="ctr"/>
+          <a:lstStyle/>
+          <a:p>
+            <a:pPr algn="ctr"/>
+          </a:p>
+        </p:txBody>
+      </p:sp>
+      <p:sp>
+        <p:nvSpPr>
+          <p:cNvPr id="17" name="Chevron 16"/>
+          <p:cNvSpPr/>
+          <p:nvPr/>
+        </p:nvSpPr>
+        <p:spPr>
+          <a:xfrm>
+            <a:off x="4654296" y="2644902"/>
+            <a:ext cx="219456" cy="141732"/>
+          </a:xfrm>
+          <a:prstGeom prst="chevron">
+            <a:avLst/>
+          </a:prstGeom>
+          <a:solidFill>
+            <a:srgbClr val="D0D4D7"/>
+          </a:solidFill>
+          <a:ln>
+            <a:noFill/>
+          </a:ln>
+          <a:effectLst/>
+        </p:spPr>
+        <p:style>
+          <a:lnRef idx="1">
+            <a:schemeClr val="accent1"/>
+          </a:lnRef>
+          <a:fillRef idx="3">
+            <a:schemeClr val="accent1"/>
+          </a:fillRef>
+          <a:effectRef idx="2">
+            <a:schemeClr val="accent1"/>
+          </a:effectRef>
+          <a:fontRef idx="minor">
+            <a:schemeClr val="lt1"/>
+          </a:fontRef>
+        </p:style>
+        <p:txBody>
+          <a:bodyPr rtlCol="0" anchor="ctr"/>
+          <a:lstStyle/>
+          <a:p>
+            <a:pPr algn="ctr"/>
+          </a:p>
+        </p:txBody>
+      </p:sp>
+      <p:sp>
+        <p:nvSpPr>
+          <p:cNvPr id="18" name="TextBox 17"/>
+          <p:cNvSpPr txBox="1"/>
+          <p:nvPr/>
+        </p:nvSpPr>
+        <p:spPr>
+          <a:xfrm>
+            <a:off x="4892040" y="2606040"/>
+            <a:ext cx="475488" cy="219456"/>
+          </a:xfrm>
+          <a:prstGeom prst="rect">
+            <a:avLst/>
+          </a:prstGeom>
+          <a:noFill/>
+        </p:spPr>
+        <p:txBody>
+          <a:bodyPr wrap="square" anchor="ctr" lIns="25400" rIns="25400" tIns="12700" bIns="12700">
+            <a:spAutoFit/>
+          </a:bodyPr>
+          <a:lstStyle/>
+          <a:p>
+            <a:pPr algn="l">
+              <a:lnSpc>
+                <a:spcPct val="100000"/>
+              </a:lnSpc>
+            </a:pPr>
+            <a:r>
+              <a:rPr sz="1000" b="1">
+                <a:solidFill>
+                  <a:srgbClr val="1B5C80"/>
+                </a:solidFill>
+              </a:rPr>
+              <a:t>③</a:t>
+            </a:r>
+          </a:p>
+        </p:txBody>
+      </p:sp>
+      <p:sp>
+        <p:nvSpPr>
+          <p:cNvPr id="19" name="Chevron 18"/>
+          <p:cNvSpPr/>
+          <p:nvPr/>
+        </p:nvSpPr>
+        <p:spPr>
+          <a:xfrm>
+            <a:off x="3849624" y="3028950"/>
+            <a:ext cx="219456" cy="141732"/>
+          </a:xfrm>
+          <a:prstGeom prst="chevron">
+            <a:avLst/>
+          </a:prstGeom>
+          <a:solidFill>
+            <a:srgbClr val="0FA4CC"/>
+          </a:solidFill>
+          <a:ln>
+            <a:noFill/>
+          </a:ln>
+          <a:effectLst/>
+        </p:spPr>
+        <p:style>
+          <a:lnRef idx="1">
+            <a:schemeClr val="accent1"/>
+          </a:lnRef>
+          <a:fillRef idx="3">
+            <a:schemeClr val="accent1"/>
+          </a:fillRef>
+          <a:effectRef idx="2">
+            <a:schemeClr val="accent1"/>
+          </a:effectRef>
+          <a:fontRef idx="minor">
+            <a:schemeClr val="lt1"/>
+          </a:fontRef>
+        </p:style>
+        <p:txBody>
+          <a:bodyPr rtlCol="0" anchor="ctr"/>
+          <a:lstStyle/>
+          <a:p>
+            <a:pPr algn="ctr"/>
+          </a:p>
+        </p:txBody>
+      </p:sp>
+      <p:sp>
+        <p:nvSpPr>
+          <p:cNvPr id="20" name="Chevron 19"/>
+          <p:cNvSpPr/>
+          <p:nvPr/>
+        </p:nvSpPr>
+        <p:spPr>
+          <a:xfrm>
+            <a:off x="4050792" y="3028950"/>
+            <a:ext cx="219456" cy="141732"/>
+          </a:xfrm>
+          <a:prstGeom prst="chevron">
+            <a:avLst/>
+          </a:prstGeom>
+          <a:solidFill>
+            <a:srgbClr val="0FA4CC"/>
+          </a:solidFill>
+          <a:ln>
+            <a:noFill/>
+          </a:ln>
+          <a:effectLst/>
+        </p:spPr>
+        <p:style>
+          <a:lnRef idx="1">
+            <a:schemeClr val="accent1"/>
+          </a:lnRef>
+          <a:fillRef idx="3">
+            <a:schemeClr val="accent1"/>
+          </a:fillRef>
+          <a:effectRef idx="2">
+            <a:schemeClr val="accent1"/>
+          </a:effectRef>
+          <a:fontRef idx="minor">
+            <a:schemeClr val="lt1"/>
+          </a:fontRef>
+        </p:style>
+        <p:txBody>
+          <a:bodyPr rtlCol="0" anchor="ctr"/>
+          <a:lstStyle/>
+          <a:p>
+            <a:pPr algn="ctr"/>
+          </a:p>
+        </p:txBody>
+      </p:sp>
+      <p:sp>
+        <p:nvSpPr>
+          <p:cNvPr id="21" name="Chevron 20"/>
+          <p:cNvSpPr/>
+          <p:nvPr/>
+        </p:nvSpPr>
+        <p:spPr>
+          <a:xfrm>
+            <a:off x="4251960" y="3028950"/>
+            <a:ext cx="219456" cy="141732"/>
+          </a:xfrm>
+          <a:prstGeom prst="chevron">
+            <a:avLst/>
+          </a:prstGeom>
+          <a:solidFill>
+            <a:srgbClr val="0FA4CC"/>
+          </a:solidFill>
+          <a:ln>
+            <a:noFill/>
+          </a:ln>
+          <a:effectLst/>
+        </p:spPr>
+        <p:style>
+          <a:lnRef idx="1">
+            <a:schemeClr val="accent1"/>
+          </a:lnRef>
+          <a:fillRef idx="3">
+            <a:schemeClr val="accent1"/>
+          </a:fillRef>
+          <a:effectRef idx="2">
+            <a:schemeClr val="accent1"/>
+          </a:effectRef>
+          <a:fontRef idx="minor">
+            <a:schemeClr val="lt1"/>
+          </a:fontRef>
+        </p:style>
+        <p:txBody>
+          <a:bodyPr rtlCol="0" anchor="ctr"/>
+          <a:lstStyle/>
+          <a:p>
+            <a:pPr algn="ctr"/>
+          </a:p>
+        </p:txBody>
+      </p:sp>
+      <p:sp>
+        <p:nvSpPr>
+          <p:cNvPr id="22" name="Chevron 21"/>
+          <p:cNvSpPr/>
+          <p:nvPr/>
+        </p:nvSpPr>
+        <p:spPr>
+          <a:xfrm>
+            <a:off x="4453128" y="3028950"/>
+            <a:ext cx="219456" cy="141732"/>
+          </a:xfrm>
+          <a:prstGeom prst="chevron">
+            <a:avLst/>
+          </a:prstGeom>
+          <a:solidFill>
+            <a:srgbClr val="D0D4D7"/>
+          </a:solidFill>
+          <a:ln>
+            <a:noFill/>
+          </a:ln>
+          <a:effectLst/>
+        </p:spPr>
+        <p:style>
+          <a:lnRef idx="1">
+            <a:schemeClr val="accent1"/>
+          </a:lnRef>
+          <a:fillRef idx="3">
+            <a:schemeClr val="accent1"/>
+          </a:fillRef>
+          <a:effectRef idx="2">
+            <a:schemeClr val="accent1"/>
+          </a:effectRef>
+          <a:fontRef idx="minor">
+            <a:schemeClr val="lt1"/>
+          </a:fontRef>
+        </p:style>
+        <p:txBody>
+          <a:bodyPr rtlCol="0" anchor="ctr"/>
+          <a:lstStyle/>
+          <a:p>
+            <a:pPr algn="ctr"/>
+          </a:p>
+        </p:txBody>
+      </p:sp>
+      <p:sp>
+        <p:nvSpPr>
+          <p:cNvPr id="23" name="Chevron 22"/>
+          <p:cNvSpPr/>
+          <p:nvPr/>
+        </p:nvSpPr>
+        <p:spPr>
+          <a:xfrm>
+            <a:off x="4654296" y="3028950"/>
+            <a:ext cx="219456" cy="141732"/>
+          </a:xfrm>
+          <a:prstGeom prst="chevron">
+            <a:avLst/>
+          </a:prstGeom>
+          <a:solidFill>
+            <a:srgbClr val="D0D4D7"/>
+          </a:solidFill>
+          <a:ln>
+            <a:noFill/>
+          </a:ln>
+          <a:effectLst/>
+        </p:spPr>
+        <p:style>
+          <a:lnRef idx="1">
+            <a:schemeClr val="accent1"/>
+          </a:lnRef>
+          <a:fillRef idx="3">
+            <a:schemeClr val="accent1"/>
+          </a:fillRef>
+          <a:effectRef idx="2">
+            <a:schemeClr val="accent1"/>
+          </a:effectRef>
+          <a:fontRef idx="minor">
+            <a:schemeClr val="lt1"/>
+          </a:fontRef>
+        </p:style>
+        <p:txBody>
+          <a:bodyPr rtlCol="0" anchor="ctr"/>
+          <a:lstStyle/>
+          <a:p>
+            <a:pPr algn="ctr"/>
+          </a:p>
+        </p:txBody>
+      </p:sp>
+      <p:sp>
+        <p:nvSpPr>
+          <p:cNvPr id="24" name="TextBox 23"/>
+          <p:cNvSpPr txBox="1"/>
+          <p:nvPr/>
+        </p:nvSpPr>
+        <p:spPr>
+          <a:xfrm>
+            <a:off x="4892040" y="2990088"/>
+            <a:ext cx="475488" cy="219456"/>
+          </a:xfrm>
+          <a:prstGeom prst="rect">
+            <a:avLst/>
+          </a:prstGeom>
+          <a:noFill/>
+        </p:spPr>
+        <p:txBody>
+          <a:bodyPr wrap="square" anchor="ctr" lIns="25400" rIns="25400" tIns="12700" bIns="12700">
+            <a:spAutoFit/>
+          </a:bodyPr>
+          <a:lstStyle/>
+          <a:p>
+            <a:pPr algn="l">
+              <a:lnSpc>
+                <a:spcPct val="100000"/>
+              </a:lnSpc>
+            </a:pPr>
+            <a:r>
+              <a:rPr sz="1000" b="1">
+                <a:solidFill>
+                  <a:srgbClr val="1B5C80"/>
+                </a:solidFill>
+              </a:rPr>
+              <a:t>③</a:t>
+            </a:r>
+          </a:p>
+        </p:txBody>
+      </p:sp>
+      <p:sp>
+        <p:nvSpPr>
+          <p:cNvPr id="25" name="Chevron 24"/>
+          <p:cNvSpPr/>
+          <p:nvPr/>
+        </p:nvSpPr>
+        <p:spPr>
+          <a:xfrm>
+            <a:off x="3849624" y="3412998"/>
+            <a:ext cx="219456" cy="141732"/>
+          </a:xfrm>
+          <a:prstGeom prst="chevron">
+            <a:avLst/>
+          </a:prstGeom>
+          <a:solidFill>
+            <a:srgbClr val="D0D4D7"/>
+          </a:solidFill>
+          <a:ln>
+            <a:noFill/>
+          </a:ln>
+          <a:effectLst/>
+        </p:spPr>
+        <p:style>
+          <a:lnRef idx="1">
+            <a:schemeClr val="accent1"/>
+          </a:lnRef>
+          <a:fillRef idx="3">
+            <a:schemeClr val="accent1"/>
+          </a:fillRef>
+          <a:effectRef idx="2">
+            <a:schemeClr val="accent1"/>
+          </a:effectRef>
+          <a:fontRef idx="minor">
+            <a:schemeClr val="lt1"/>
+          </a:fontRef>
+        </p:style>
+        <p:txBody>
+          <a:bodyPr rtlCol="0" anchor="ctr"/>
+          <a:lstStyle/>
+          <a:p>
+            <a:pPr algn="ctr"/>
+          </a:p>
+        </p:txBody>
+      </p:sp>
+      <p:sp>
+        <p:nvSpPr>
+          <p:cNvPr id="26" name="Chevron 25"/>
+          <p:cNvSpPr/>
+          <p:nvPr/>
+        </p:nvSpPr>
+        <p:spPr>
+          <a:xfrm>
+            <a:off x="4050792" y="3412998"/>
+            <a:ext cx="219456" cy="141732"/>
+          </a:xfrm>
+          <a:prstGeom prst="chevron">
+            <a:avLst/>
+          </a:prstGeom>
+          <a:solidFill>
+            <a:srgbClr val="D0D4D7"/>
+          </a:solidFill>
+          <a:ln>
+            <a:noFill/>
+          </a:ln>
+          <a:effectLst/>
+        </p:spPr>
+        <p:style>
+          <a:lnRef idx="1">
+            <a:schemeClr val="accent1"/>
+          </a:lnRef>
+          <a:fillRef idx="3">
+            <a:schemeClr val="accent1"/>
+          </a:fillRef>
+          <a:effectRef idx="2">
+            <a:schemeClr val="accent1"/>
+          </a:effectRef>
+          <a:fontRef idx="minor">
+            <a:schemeClr val="lt1"/>
+          </a:fontRef>
+        </p:style>
+        <p:txBody>
+          <a:bodyPr rtlCol="0" anchor="ctr"/>
+          <a:lstStyle/>
+          <a:p>
+            <a:pPr algn="ctr"/>
+          </a:p>
+        </p:txBody>
+      </p:sp>
+      <p:sp>
+        <p:nvSpPr>
+          <p:cNvPr id="27" name="Chevron 26"/>
+          <p:cNvSpPr/>
+          <p:nvPr/>
+        </p:nvSpPr>
+        <p:spPr>
+          <a:xfrm>
+            <a:off x="4251960" y="3412998"/>
+            <a:ext cx="219456" cy="141732"/>
+          </a:xfrm>
+          <a:prstGeom prst="chevron">
+            <a:avLst/>
+          </a:prstGeom>
+          <a:solidFill>
+            <a:srgbClr val="D0D4D7"/>
+          </a:solidFill>
+          <a:ln>
+            <a:noFill/>
+          </a:ln>
+          <a:effectLst/>
+        </p:spPr>
+        <p:style>
+          <a:lnRef idx="1">
+            <a:schemeClr val="accent1"/>
+          </a:lnRef>
+          <a:fillRef idx="3">
+            <a:schemeClr val="accent1"/>
+          </a:fillRef>
+          <a:effectRef idx="2">
+            <a:schemeClr val="accent1"/>
+          </a:effectRef>
+          <a:fontRef idx="minor">
+            <a:schemeClr val="lt1"/>
+          </a:fontRef>
+        </p:style>
+        <p:txBody>
+          <a:bodyPr rtlCol="0" anchor="ctr"/>
+          <a:lstStyle/>
+          <a:p>
+            <a:pPr algn="ctr"/>
+          </a:p>
+        </p:txBody>
+      </p:sp>
+      <p:sp>
+        <p:nvSpPr>
+          <p:cNvPr id="28" name="Chevron 27"/>
+          <p:cNvSpPr/>
+          <p:nvPr/>
+        </p:nvSpPr>
+        <p:spPr>
+          <a:xfrm>
+            <a:off x="4453128" y="3412998"/>
+            <a:ext cx="219456" cy="141732"/>
+          </a:xfrm>
+          <a:prstGeom prst="chevron">
+            <a:avLst/>
+          </a:prstGeom>
+          <a:solidFill>
+            <a:srgbClr val="D0D4D7"/>
+          </a:solidFill>
+          <a:ln>
+            <a:noFill/>
+          </a:ln>
+          <a:effectLst/>
+        </p:spPr>
+        <p:style>
+          <a:lnRef idx="1">
+            <a:schemeClr val="accent1"/>
+          </a:lnRef>
+          <a:fillRef idx="3">
+            <a:schemeClr val="accent1"/>
+          </a:fillRef>
+          <a:effectRef idx="2">
+            <a:schemeClr val="accent1"/>
+          </a:effectRef>
+          <a:fontRef idx="minor">
+            <a:schemeClr val="lt1"/>
+          </a:fontRef>
+        </p:style>
+        <p:txBody>
+          <a:bodyPr rtlCol="0" anchor="ctr"/>
+          <a:lstStyle/>
+          <a:p>
+            <a:pPr algn="ctr"/>
+          </a:p>
+        </p:txBody>
+      </p:sp>
+      <p:sp>
+        <p:nvSpPr>
+          <p:cNvPr id="29" name="Chevron 28"/>
+          <p:cNvSpPr/>
+          <p:nvPr/>
+        </p:nvSpPr>
+        <p:spPr>
+          <a:xfrm>
+            <a:off x="4654296" y="3412998"/>
+            <a:ext cx="219456" cy="141732"/>
+          </a:xfrm>
+          <a:prstGeom prst="chevron">
+            <a:avLst/>
+          </a:prstGeom>
+          <a:solidFill>
+            <a:srgbClr val="D0D4D7"/>
+          </a:solidFill>
+          <a:ln>
+            <a:noFill/>
+          </a:ln>
+          <a:effectLst/>
+        </p:spPr>
+        <p:style>
+          <a:lnRef idx="1">
+            <a:schemeClr val="accent1"/>
+          </a:lnRef>
+          <a:fillRef idx="3">
+            <a:schemeClr val="accent1"/>
+          </a:fillRef>
+          <a:effectRef idx="2">
+            <a:schemeClr val="accent1"/>
+          </a:effectRef>
+          <a:fontRef idx="minor">
+            <a:schemeClr val="lt1"/>
+          </a:fontRef>
+        </p:style>
+        <p:txBody>
+          <a:bodyPr rtlCol="0" anchor="ctr"/>
+          <a:lstStyle/>
+          <a:p>
+            <a:pPr algn="ctr"/>
+          </a:p>
+        </p:txBody>
+      </p:sp>
+      <p:sp>
+        <p:nvSpPr>
+          <p:cNvPr id="30" name="TextBox 29"/>
+          <p:cNvSpPr txBox="1"/>
+          <p:nvPr/>
+        </p:nvSpPr>
+        <p:spPr>
+          <a:xfrm>
+            <a:off x="4892040" y="3374136"/>
+            <a:ext cx="475488" cy="219456"/>
+          </a:xfrm>
+          <a:prstGeom prst="rect">
+            <a:avLst/>
+          </a:prstGeom>
+          <a:noFill/>
+        </p:spPr>
+        <p:txBody>
+          <a:bodyPr wrap="square" anchor="ctr" lIns="25400" rIns="25400" tIns="12700" bIns="12700">
+            <a:spAutoFit/>
+          </a:bodyPr>
+          <a:lstStyle/>
+          <a:p>
+            <a:pPr algn="l">
+              <a:lnSpc>
+                <a:spcPct val="100000"/>
+              </a:lnSpc>
+            </a:pPr>
+            <a:r>
+              <a:rPr sz="1000" b="1">
+                <a:solidFill>
+                  <a:srgbClr val="1B5C80"/>
+                </a:solidFill>
+              </a:rPr>
+              <a:t>－</a:t>
+            </a:r>
+          </a:p>
+        </p:txBody>
+      </p:sp>
+      <p:sp>
+        <p:nvSpPr>
+          <p:cNvPr id="31" name="Chevron 30"/>
+          <p:cNvSpPr/>
+          <p:nvPr/>
+        </p:nvSpPr>
+        <p:spPr>
+          <a:xfrm>
+            <a:off x="3849624" y="3797046"/>
+            <a:ext cx="219456" cy="141732"/>
+          </a:xfrm>
+          <a:prstGeom prst="chevron">
+            <a:avLst/>
+          </a:prstGeom>
+          <a:solidFill>
+            <a:srgbClr val="1B5C80"/>
+          </a:solidFill>
+          <a:ln>
+            <a:noFill/>
+          </a:ln>
+          <a:effectLst/>
+        </p:spPr>
+        <p:style>
+          <a:lnRef idx="1">
+            <a:schemeClr val="accent1"/>
+          </a:lnRef>
+          <a:fillRef idx="3">
+            <a:schemeClr val="accent1"/>
+          </a:fillRef>
+          <a:effectRef idx="2">
+            <a:schemeClr val="accent1"/>
+          </a:effectRef>
+          <a:fontRef idx="minor">
+            <a:schemeClr val="lt1"/>
+          </a:fontRef>
+        </p:style>
+        <p:txBody>
+          <a:bodyPr rtlCol="0" anchor="ctr"/>
+          <a:lstStyle/>
+          <a:p>
+            <a:pPr algn="ctr"/>
+          </a:p>
+        </p:txBody>
+      </p:sp>
+      <p:sp>
+        <p:nvSpPr>
+          <p:cNvPr id="32" name="Chevron 31"/>
+          <p:cNvSpPr/>
+          <p:nvPr/>
+        </p:nvSpPr>
+        <p:spPr>
+          <a:xfrm>
+            <a:off x="4050792" y="3797046"/>
+            <a:ext cx="219456" cy="141732"/>
+          </a:xfrm>
+          <a:prstGeom prst="chevron">
+            <a:avLst/>
+          </a:prstGeom>
+          <a:solidFill>
+            <a:srgbClr val="1B5C80"/>
+          </a:solidFill>
+          <a:ln>
+            <a:noFill/>
+          </a:ln>
+          <a:effectLst/>
+        </p:spPr>
+        <p:style>
+          <a:lnRef idx="1">
+            <a:schemeClr val="accent1"/>
+          </a:lnRef>
+          <a:fillRef idx="3">
+            <a:schemeClr val="accent1"/>
+          </a:fillRef>
+          <a:effectRef idx="2">
+            <a:schemeClr val="accent1"/>
+          </a:effectRef>
+          <a:fontRef idx="minor">
+            <a:schemeClr val="lt1"/>
+          </a:fontRef>
+        </p:style>
+        <p:txBody>
+          <a:bodyPr rtlCol="0" anchor="ctr"/>
+          <a:lstStyle/>
+          <a:p>
+            <a:pPr algn="ctr"/>
+          </a:p>
+        </p:txBody>
+      </p:sp>
+      <p:sp>
+        <p:nvSpPr>
+          <p:cNvPr id="33" name="Chevron 32"/>
+          <p:cNvSpPr/>
+          <p:nvPr/>
+        </p:nvSpPr>
+        <p:spPr>
+          <a:xfrm>
+            <a:off x="4251960" y="3797046"/>
+            <a:ext cx="219456" cy="141732"/>
+          </a:xfrm>
+          <a:prstGeom prst="chevron">
+            <a:avLst/>
+          </a:prstGeom>
+          <a:solidFill>
+            <a:srgbClr val="1B5C80"/>
+          </a:solidFill>
+          <a:ln>
+            <a:noFill/>
+          </a:ln>
+          <a:effectLst/>
+        </p:spPr>
+        <p:style>
+          <a:lnRef idx="1">
+            <a:schemeClr val="accent1"/>
+          </a:lnRef>
+          <a:fillRef idx="3">
+            <a:schemeClr val="accent1"/>
+          </a:fillRef>
+          <a:effectRef idx="2">
+            <a:schemeClr val="accent1"/>
+          </a:effectRef>
+          <a:fontRef idx="minor">
+            <a:schemeClr val="lt1"/>
+          </a:fontRef>
+        </p:style>
+        <p:txBody>
+          <a:bodyPr rtlCol="0" anchor="ctr"/>
+          <a:lstStyle/>
+          <a:p>
+            <a:pPr algn="ctr"/>
+          </a:p>
+        </p:txBody>
+      </p:sp>
+      <p:sp>
+        <p:nvSpPr>
+          <p:cNvPr id="34" name="Chevron 33"/>
+          <p:cNvSpPr/>
+          <p:nvPr/>
+        </p:nvSpPr>
+        <p:spPr>
+          <a:xfrm>
+            <a:off x="4453128" y="3797046"/>
+            <a:ext cx="219456" cy="141732"/>
+          </a:xfrm>
+          <a:prstGeom prst="chevron">
+            <a:avLst/>
+          </a:prstGeom>
+          <a:solidFill>
+            <a:srgbClr val="1B5C80"/>
+          </a:solidFill>
+          <a:ln>
+            <a:noFill/>
+          </a:ln>
+          <a:effectLst/>
+        </p:spPr>
+        <p:style>
+          <a:lnRef idx="1">
+            <a:schemeClr val="accent1"/>
+          </a:lnRef>
+          <a:fillRef idx="3">
+            <a:schemeClr val="accent1"/>
+          </a:fillRef>
+          <a:effectRef idx="2">
+            <a:schemeClr val="accent1"/>
+          </a:effectRef>
+          <a:fontRef idx="minor">
+            <a:schemeClr val="lt1"/>
+          </a:fontRef>
+        </p:style>
+        <p:txBody>
+          <a:bodyPr rtlCol="0" anchor="ctr"/>
+          <a:lstStyle/>
+          <a:p>
+            <a:pPr algn="ctr"/>
+          </a:p>
+        </p:txBody>
+      </p:sp>
+      <p:sp>
+        <p:nvSpPr>
+          <p:cNvPr id="35" name="Chevron 34"/>
+          <p:cNvSpPr/>
+          <p:nvPr/>
+        </p:nvSpPr>
+        <p:spPr>
+          <a:xfrm>
+            <a:off x="4654296" y="3797046"/>
+            <a:ext cx="219456" cy="141732"/>
+          </a:xfrm>
+          <a:prstGeom prst="chevron">
+            <a:avLst/>
+          </a:prstGeom>
+          <a:solidFill>
+            <a:srgbClr val="1B5C80"/>
+          </a:solidFill>
+          <a:ln>
+            <a:noFill/>
+          </a:ln>
+          <a:effectLst/>
+        </p:spPr>
+        <p:style>
+          <a:lnRef idx="1">
+            <a:schemeClr val="accent1"/>
+          </a:lnRef>
+          <a:fillRef idx="3">
+            <a:schemeClr val="accent1"/>
+          </a:fillRef>
+          <a:effectRef idx="2">
+            <a:schemeClr val="accent1"/>
+          </a:effectRef>
+          <a:fontRef idx="minor">
+            <a:schemeClr val="lt1"/>
+          </a:fontRef>
+        </p:style>
+        <p:txBody>
+          <a:bodyPr rtlCol="0" anchor="ctr"/>
+          <a:lstStyle/>
+          <a:p>
+            <a:pPr algn="ctr"/>
+          </a:p>
+        </p:txBody>
+      </p:sp>
+      <p:sp>
+        <p:nvSpPr>
+          <p:cNvPr id="36" name="TextBox 35"/>
+          <p:cNvSpPr txBox="1"/>
+          <p:nvPr/>
+        </p:nvSpPr>
+        <p:spPr>
+          <a:xfrm>
+            <a:off x="4892040" y="3758184"/>
+            <a:ext cx="475488" cy="219456"/>
+          </a:xfrm>
+          <a:prstGeom prst="rect">
+            <a:avLst/>
+          </a:prstGeom>
+          <a:noFill/>
+        </p:spPr>
+        <p:txBody>
+          <a:bodyPr wrap="square" anchor="ctr" lIns="25400" rIns="25400" tIns="12700" bIns="12700">
+            <a:spAutoFit/>
+          </a:bodyPr>
+          <a:lstStyle/>
+          <a:p>
+            <a:pPr algn="l">
+              <a:lnSpc>
+                <a:spcPct val="100000"/>
+              </a:lnSpc>
+            </a:pPr>
+            <a:r>
+              <a:rPr sz="1000" b="1">
+                <a:solidFill>
+                  <a:srgbClr val="1B5C80"/>
+                </a:solidFill>
+              </a:rPr>
+              <a:t>⑤</a:t>
+            </a:r>
+          </a:p>
+        </p:txBody>
+      </p:sp>
+      <p:sp>
+        <p:nvSpPr>
+          <p:cNvPr id="37" name="Chevron 36"/>
+          <p:cNvSpPr/>
+          <p:nvPr/>
+        </p:nvSpPr>
+        <p:spPr>
+          <a:xfrm>
+            <a:off x="3849624" y="4181094"/>
+            <a:ext cx="219456" cy="141732"/>
+          </a:xfrm>
+          <a:prstGeom prst="chevron">
+            <a:avLst/>
+          </a:prstGeom>
+          <a:solidFill>
+            <a:srgbClr val="0FA4CC"/>
+          </a:solidFill>
+          <a:ln>
+            <a:noFill/>
+          </a:ln>
+          <a:effectLst/>
+        </p:spPr>
+        <p:style>
+          <a:lnRef idx="1">
+            <a:schemeClr val="accent1"/>
+          </a:lnRef>
+          <a:fillRef idx="3">
+            <a:schemeClr val="accent1"/>
+          </a:fillRef>
+          <a:effectRef idx="2">
+            <a:schemeClr val="accent1"/>
+          </a:effectRef>
+          <a:fontRef idx="minor">
+            <a:schemeClr val="lt1"/>
+          </a:fontRef>
+        </p:style>
+        <p:txBody>
+          <a:bodyPr rtlCol="0" anchor="ctr"/>
+          <a:lstStyle/>
+          <a:p>
+            <a:pPr algn="ctr"/>
+          </a:p>
+        </p:txBody>
+      </p:sp>
+      <p:sp>
+        <p:nvSpPr>
+          <p:cNvPr id="38" name="Chevron 37"/>
+          <p:cNvSpPr/>
+          <p:nvPr/>
+        </p:nvSpPr>
+        <p:spPr>
+          <a:xfrm>
+            <a:off x="4050792" y="4181094"/>
+            <a:ext cx="219456" cy="141732"/>
+          </a:xfrm>
+          <a:prstGeom prst="chevron">
+            <a:avLst/>
+          </a:prstGeom>
+          <a:solidFill>
+            <a:srgbClr val="0FA4CC"/>
+          </a:solidFill>
+          <a:ln>
+            <a:noFill/>
+          </a:ln>
+          <a:effectLst/>
+        </p:spPr>
+        <p:style>
+          <a:lnRef idx="1">
+            <a:schemeClr val="accent1"/>
+          </a:lnRef>
+          <a:fillRef idx="3">
+            <a:schemeClr val="accent1"/>
+          </a:fillRef>
+          <a:effectRef idx="2">
+            <a:schemeClr val="accent1"/>
+          </a:effectRef>
+          <a:fontRef idx="minor">
+            <a:schemeClr val="lt1"/>
+          </a:fontRef>
+        </p:style>
+        <p:txBody>
+          <a:bodyPr rtlCol="0" anchor="ctr"/>
+          <a:lstStyle/>
+          <a:p>
+            <a:pPr algn="ctr"/>
+          </a:p>
+        </p:txBody>
+      </p:sp>
+      <p:sp>
+        <p:nvSpPr>
+          <p:cNvPr id="39" name="Chevron 38"/>
+          <p:cNvSpPr/>
+          <p:nvPr/>
+        </p:nvSpPr>
+        <p:spPr>
+          <a:xfrm>
+            <a:off x="4251960" y="4181094"/>
+            <a:ext cx="219456" cy="141732"/>
+          </a:xfrm>
+          <a:prstGeom prst="chevron">
+            <a:avLst/>
+          </a:prstGeom>
+          <a:solidFill>
+            <a:srgbClr val="0FA4CC"/>
+          </a:solidFill>
+          <a:ln>
+            <a:noFill/>
+          </a:ln>
+          <a:effectLst/>
+        </p:spPr>
+        <p:style>
+          <a:lnRef idx="1">
+            <a:schemeClr val="accent1"/>
+          </a:lnRef>
+          <a:fillRef idx="3">
+            <a:schemeClr val="accent1"/>
+          </a:fillRef>
+          <a:effectRef idx="2">
+            <a:schemeClr val="accent1"/>
+          </a:effectRef>
+          <a:fontRef idx="minor">
+            <a:schemeClr val="lt1"/>
+          </a:fontRef>
+        </p:style>
+        <p:txBody>
+          <a:bodyPr rtlCol="0" anchor="ctr"/>
+          <a:lstStyle/>
+          <a:p>
+            <a:pPr algn="ctr"/>
+          </a:p>
+        </p:txBody>
+      </p:sp>
+      <p:sp>
+        <p:nvSpPr>
+          <p:cNvPr id="40" name="Chevron 39"/>
+          <p:cNvSpPr/>
+          <p:nvPr/>
+        </p:nvSpPr>
+        <p:spPr>
+          <a:xfrm>
+            <a:off x="4453128" y="4181094"/>
+            <a:ext cx="219456" cy="141732"/>
+          </a:xfrm>
+          <a:prstGeom prst="chevron">
+            <a:avLst/>
+          </a:prstGeom>
+          <a:solidFill>
+            <a:srgbClr val="D0D4D7"/>
+          </a:solidFill>
+          <a:ln>
+            <a:noFill/>
+          </a:ln>
+          <a:effectLst/>
+        </p:spPr>
+        <p:style>
+          <a:lnRef idx="1">
+            <a:schemeClr val="accent1"/>
+          </a:lnRef>
+          <a:fillRef idx="3">
+            <a:schemeClr val="accent1"/>
+          </a:fillRef>
+          <a:effectRef idx="2">
+            <a:schemeClr val="accent1"/>
+          </a:effectRef>
+          <a:fontRef idx="minor">
+            <a:schemeClr val="lt1"/>
+          </a:fontRef>
+        </p:style>
+        <p:txBody>
+          <a:bodyPr rtlCol="0" anchor="ctr"/>
+          <a:lstStyle/>
+          <a:p>
+            <a:pPr algn="ctr"/>
+          </a:p>
+        </p:txBody>
+      </p:sp>
+      <p:sp>
+        <p:nvSpPr>
+          <p:cNvPr id="41" name="Chevron 40"/>
+          <p:cNvSpPr/>
+          <p:nvPr/>
+        </p:nvSpPr>
+        <p:spPr>
+          <a:xfrm>
+            <a:off x="4654296" y="4181094"/>
+            <a:ext cx="219456" cy="141732"/>
+          </a:xfrm>
+          <a:prstGeom prst="chevron">
+            <a:avLst/>
+          </a:prstGeom>
+          <a:solidFill>
+            <a:srgbClr val="D0D4D7"/>
+          </a:solidFill>
+          <a:ln>
+            <a:noFill/>
+          </a:ln>
+          <a:effectLst/>
+        </p:spPr>
+        <p:style>
+          <a:lnRef idx="1">
+            <a:schemeClr val="accent1"/>
+          </a:lnRef>
+          <a:fillRef idx="3">
+            <a:schemeClr val="accent1"/>
+          </a:fillRef>
+          <a:effectRef idx="2">
+            <a:schemeClr val="accent1"/>
+          </a:effectRef>
+          <a:fontRef idx="minor">
+            <a:schemeClr val="lt1"/>
+          </a:fontRef>
+        </p:style>
+        <p:txBody>
+          <a:bodyPr rtlCol="0" anchor="ctr"/>
+          <a:lstStyle/>
+          <a:p>
+            <a:pPr algn="ctr"/>
+          </a:p>
+        </p:txBody>
+      </p:sp>
+      <p:sp>
+        <p:nvSpPr>
+          <p:cNvPr id="42" name="TextBox 41"/>
+          <p:cNvSpPr txBox="1"/>
+          <p:nvPr/>
+        </p:nvSpPr>
+        <p:spPr>
+          <a:xfrm>
+            <a:off x="4892040" y="4142232"/>
+            <a:ext cx="475488" cy="219456"/>
+          </a:xfrm>
+          <a:prstGeom prst="rect">
+            <a:avLst/>
+          </a:prstGeom>
+          <a:noFill/>
+        </p:spPr>
+        <p:txBody>
+          <a:bodyPr wrap="square" anchor="ctr" lIns="25400" rIns="25400" tIns="12700" bIns="12700">
+            <a:spAutoFit/>
+          </a:bodyPr>
+          <a:lstStyle/>
+          <a:p>
+            <a:pPr algn="l">
+              <a:lnSpc>
+                <a:spcPct val="100000"/>
+              </a:lnSpc>
+            </a:pPr>
+            <a:r>
+              <a:rPr sz="1000" b="1">
+                <a:solidFill>
+                  <a:srgbClr val="1B5C80"/>
+                </a:solidFill>
+              </a:rPr>
+              <a:t>③ *</a:t>
+            </a:r>
+          </a:p>
+        </p:txBody>
+      </p:sp>
+      <p:sp>
+        <p:nvSpPr>
+          <p:cNvPr id="43" name="Chevron 42"/>
+          <p:cNvSpPr/>
+          <p:nvPr/>
+        </p:nvSpPr>
+        <p:spPr>
+          <a:xfrm>
+            <a:off x="3849624" y="4565142"/>
+            <a:ext cx="219456" cy="141732"/>
+          </a:xfrm>
+          <a:prstGeom prst="chevron">
+            <a:avLst/>
+          </a:prstGeom>
+          <a:solidFill>
+            <a:srgbClr val="1B5C80"/>
+          </a:solidFill>
+          <a:ln>
+            <a:noFill/>
+          </a:ln>
+          <a:effectLst/>
+        </p:spPr>
+        <p:style>
+          <a:lnRef idx="1">
+            <a:schemeClr val="accent1"/>
+          </a:lnRef>
+          <a:fillRef idx="3">
+            <a:schemeClr val="accent1"/>
+          </a:fillRef>
+          <a:effectRef idx="2">
+            <a:schemeClr val="accent1"/>
+          </a:effectRef>
+          <a:fontRef idx="minor">
+            <a:schemeClr val="lt1"/>
+          </a:fontRef>
+        </p:style>
+        <p:txBody>
+          <a:bodyPr rtlCol="0" anchor="ctr"/>
+          <a:lstStyle/>
+          <a:p>
+            <a:pPr algn="ctr"/>
+          </a:p>
+        </p:txBody>
+      </p:sp>
+      <p:sp>
+        <p:nvSpPr>
+          <p:cNvPr id="44" name="Chevron 43"/>
+          <p:cNvSpPr/>
+          <p:nvPr/>
+        </p:nvSpPr>
+        <p:spPr>
+          <a:xfrm>
+            <a:off x="4050792" y="4565142"/>
+            <a:ext cx="219456" cy="141732"/>
+          </a:xfrm>
+          <a:prstGeom prst="chevron">
+            <a:avLst/>
+          </a:prstGeom>
+          <a:solidFill>
+            <a:srgbClr val="1B5C80"/>
+          </a:solidFill>
+          <a:ln>
+            <a:noFill/>
+          </a:ln>
+          <a:effectLst/>
+        </p:spPr>
+        <p:style>
+          <a:lnRef idx="1">
+            <a:schemeClr val="accent1"/>
+          </a:lnRef>
+          <a:fillRef idx="3">
+            <a:schemeClr val="accent1"/>
+          </a:fillRef>
+          <a:effectRef idx="2">
+            <a:schemeClr val="accent1"/>
+          </a:effectRef>
+          <a:fontRef idx="minor">
+            <a:schemeClr val="lt1"/>
+          </a:fontRef>
+        </p:style>
+        <p:txBody>
+          <a:bodyPr rtlCol="0" anchor="ctr"/>
+          <a:lstStyle/>
+          <a:p>
+            <a:pPr algn="ctr"/>
+          </a:p>
+        </p:txBody>
+      </p:sp>
+      <p:sp>
+        <p:nvSpPr>
+          <p:cNvPr id="45" name="Chevron 44"/>
+          <p:cNvSpPr/>
+          <p:nvPr/>
+        </p:nvSpPr>
+        <p:spPr>
+          <a:xfrm>
+            <a:off x="4251960" y="4565142"/>
+            <a:ext cx="219456" cy="141732"/>
+          </a:xfrm>
+          <a:prstGeom prst="chevron">
+            <a:avLst/>
+          </a:prstGeom>
+          <a:solidFill>
+            <a:srgbClr val="1B5C80"/>
+          </a:solidFill>
+          <a:ln>
+            <a:noFill/>
+          </a:ln>
+          <a:effectLst/>
+        </p:spPr>
+        <p:style>
+          <a:lnRef idx="1">
+            <a:schemeClr val="accent1"/>
+          </a:lnRef>
+          <a:fillRef idx="3">
+            <a:schemeClr val="accent1"/>
+          </a:fillRef>
+          <a:effectRef idx="2">
+            <a:schemeClr val="accent1"/>
+          </a:effectRef>
+          <a:fontRef idx="minor">
+            <a:schemeClr val="lt1"/>
+          </a:fontRef>
+        </p:style>
+        <p:txBody>
+          <a:bodyPr rtlCol="0" anchor="ctr"/>
+          <a:lstStyle/>
+          <a:p>
+            <a:pPr algn="ctr"/>
+          </a:p>
+        </p:txBody>
+      </p:sp>
+      <p:sp>
+        <p:nvSpPr>
+          <p:cNvPr id="46" name="Chevron 45"/>
+          <p:cNvSpPr/>
+          <p:nvPr/>
+        </p:nvSpPr>
+        <p:spPr>
+          <a:xfrm>
+            <a:off x="4453128" y="4565142"/>
+            <a:ext cx="219456" cy="141732"/>
+          </a:xfrm>
+          <a:prstGeom prst="chevron">
+            <a:avLst/>
+          </a:prstGeom>
+          <a:solidFill>
+            <a:srgbClr val="1B5C80"/>
+          </a:solidFill>
+          <a:ln>
+            <a:noFill/>
+          </a:ln>
+          <a:effectLst/>
+        </p:spPr>
+        <p:style>
+          <a:lnRef idx="1">
+            <a:schemeClr val="accent1"/>
+          </a:lnRef>
+          <a:fillRef idx="3">
+            <a:schemeClr val="accent1"/>
+          </a:fillRef>
+          <a:effectRef idx="2">
+            <a:schemeClr val="accent1"/>
+          </a:effectRef>
+          <a:fontRef idx="minor">
+            <a:schemeClr val="lt1"/>
+          </a:fontRef>
+        </p:style>
+        <p:txBody>
+          <a:bodyPr rtlCol="0" anchor="ctr"/>
+          <a:lstStyle/>
+          <a:p>
+            <a:pPr algn="ctr"/>
+          </a:p>
+        </p:txBody>
+      </p:sp>
+      <p:sp>
+        <p:nvSpPr>
+          <p:cNvPr id="47" name="Chevron 46"/>
+          <p:cNvSpPr/>
+          <p:nvPr/>
+        </p:nvSpPr>
+        <p:spPr>
+          <a:xfrm>
+            <a:off x="4654296" y="4565142"/>
+            <a:ext cx="219456" cy="141732"/>
+          </a:xfrm>
+          <a:prstGeom prst="chevron">
+            <a:avLst/>
+          </a:prstGeom>
+          <a:solidFill>
+            <a:srgbClr val="1B5C80"/>
+          </a:solidFill>
+          <a:ln>
+            <a:noFill/>
+          </a:ln>
+          <a:effectLst/>
+        </p:spPr>
+        <p:style>
+          <a:lnRef idx="1">
+            <a:schemeClr val="accent1"/>
+          </a:lnRef>
+          <a:fillRef idx="3">
+            <a:schemeClr val="accent1"/>
+          </a:fillRef>
+          <a:effectRef idx="2">
+            <a:schemeClr val="accent1"/>
+          </a:effectRef>
+          <a:fontRef idx="minor">
+            <a:schemeClr val="lt1"/>
+          </a:fontRef>
+        </p:style>
+        <p:txBody>
+          <a:bodyPr rtlCol="0" anchor="ctr"/>
+          <a:lstStyle/>
+          <a:p>
+            <a:pPr algn="ctr"/>
+          </a:p>
+        </p:txBody>
+      </p:sp>
+      <p:sp>
+        <p:nvSpPr>
+          <p:cNvPr id="48" name="TextBox 47"/>
+          <p:cNvSpPr txBox="1"/>
+          <p:nvPr/>
+        </p:nvSpPr>
+        <p:spPr>
+          <a:xfrm>
+            <a:off x="4892040" y="4526280"/>
+            <a:ext cx="475488" cy="219456"/>
+          </a:xfrm>
+          <a:prstGeom prst="rect">
+            <a:avLst/>
+          </a:prstGeom>
+          <a:noFill/>
+        </p:spPr>
+        <p:txBody>
+          <a:bodyPr wrap="square" anchor="ctr" lIns="25400" rIns="25400" tIns="12700" bIns="12700">
+            <a:spAutoFit/>
+          </a:bodyPr>
+          <a:lstStyle/>
+          <a:p>
+            <a:pPr algn="l">
+              <a:lnSpc>
+                <a:spcPct val="100000"/>
+              </a:lnSpc>
+            </a:pPr>
+            <a:r>
+              <a:rPr sz="1000" b="1">
+                <a:solidFill>
+                  <a:srgbClr val="1B5C80"/>
+                </a:solidFill>
+              </a:rPr>
+              <a:t>⑤ *</a:t>
+            </a:r>
+          </a:p>
+        </p:txBody>
+      </p:sp>
+      <p:sp>
+        <p:nvSpPr>
+          <p:cNvPr id="49" name="Chevron 48"/>
+          <p:cNvSpPr/>
+          <p:nvPr/>
+        </p:nvSpPr>
+        <p:spPr>
+          <a:xfrm>
+            <a:off x="3849624" y="4949190"/>
+            <a:ext cx="219456" cy="141732"/>
+          </a:xfrm>
+          <a:prstGeom prst="chevron">
+            <a:avLst/>
+          </a:prstGeom>
+          <a:solidFill>
+            <a:srgbClr val="0FA4CC"/>
+          </a:solidFill>
+          <a:ln>
+            <a:noFill/>
+          </a:ln>
+          <a:effectLst/>
+        </p:spPr>
+        <p:style>
+          <a:lnRef idx="1">
+            <a:schemeClr val="accent1"/>
+          </a:lnRef>
+          <a:fillRef idx="3">
+            <a:schemeClr val="accent1"/>
+          </a:fillRef>
+          <a:effectRef idx="2">
+            <a:schemeClr val="accent1"/>
+          </a:effectRef>
+          <a:fontRef idx="minor">
+            <a:schemeClr val="lt1"/>
+          </a:fontRef>
+        </p:style>
+        <p:txBody>
+          <a:bodyPr rtlCol="0" anchor="ctr"/>
+          <a:lstStyle/>
+          <a:p>
+            <a:pPr algn="ctr"/>
+          </a:p>
+        </p:txBody>
+      </p:sp>
+      <p:sp>
+        <p:nvSpPr>
+          <p:cNvPr id="50" name="Chevron 49"/>
+          <p:cNvSpPr/>
+          <p:nvPr/>
+        </p:nvSpPr>
+        <p:spPr>
+          <a:xfrm>
+            <a:off x="4050792" y="4949190"/>
+            <a:ext cx="219456" cy="141732"/>
+          </a:xfrm>
+          <a:prstGeom prst="chevron">
+            <a:avLst/>
+          </a:prstGeom>
+          <a:solidFill>
+            <a:srgbClr val="0FA4CC"/>
+          </a:solidFill>
+          <a:ln>
+            <a:noFill/>
+          </a:ln>
+          <a:effectLst/>
+        </p:spPr>
+        <p:style>
+          <a:lnRef idx="1">
+            <a:schemeClr val="accent1"/>
+          </a:lnRef>
+          <a:fillRef idx="3">
+            <a:schemeClr val="accent1"/>
+          </a:fillRef>
+          <a:effectRef idx="2">
+            <a:schemeClr val="accent1"/>
+          </a:effectRef>
+          <a:fontRef idx="minor">
+            <a:schemeClr val="lt1"/>
+          </a:fontRef>
+        </p:style>
+        <p:txBody>
+          <a:bodyPr rtlCol="0" anchor="ctr"/>
+          <a:lstStyle/>
+          <a:p>
+            <a:pPr algn="ctr"/>
+          </a:p>
+        </p:txBody>
+      </p:sp>
+      <p:sp>
+        <p:nvSpPr>
+          <p:cNvPr id="51" name="Chevron 50"/>
+          <p:cNvSpPr/>
+          <p:nvPr/>
+        </p:nvSpPr>
+        <p:spPr>
+          <a:xfrm>
+            <a:off x="4251960" y="4949190"/>
+            <a:ext cx="219456" cy="141732"/>
+          </a:xfrm>
+          <a:prstGeom prst="chevron">
+            <a:avLst/>
+          </a:prstGeom>
+          <a:solidFill>
+            <a:srgbClr val="0FA4CC"/>
+          </a:solidFill>
+          <a:ln>
+            <a:noFill/>
+          </a:ln>
+          <a:effectLst/>
+        </p:spPr>
+        <p:style>
+          <a:lnRef idx="1">
+            <a:schemeClr val="accent1"/>
+          </a:lnRef>
+          <a:fillRef idx="3">
+            <a:schemeClr val="accent1"/>
+          </a:fillRef>
+          <a:effectRef idx="2">
+            <a:schemeClr val="accent1"/>
+          </a:effectRef>
+          <a:fontRef idx="minor">
+            <a:schemeClr val="lt1"/>
+          </a:fontRef>
+        </p:style>
+        <p:txBody>
+          <a:bodyPr rtlCol="0" anchor="ctr"/>
+          <a:lstStyle/>
+          <a:p>
+            <a:pPr algn="ctr"/>
+          </a:p>
+        </p:txBody>
+      </p:sp>
+      <p:sp>
+        <p:nvSpPr>
+          <p:cNvPr id="52" name="Chevron 51"/>
+          <p:cNvSpPr/>
+          <p:nvPr/>
+        </p:nvSpPr>
+        <p:spPr>
+          <a:xfrm>
+            <a:off x="4453128" y="4949190"/>
+            <a:ext cx="219456" cy="141732"/>
+          </a:xfrm>
+          <a:prstGeom prst="chevron">
+            <a:avLst/>
+          </a:prstGeom>
+          <a:solidFill>
+            <a:srgbClr val="0FA4CC"/>
+          </a:solidFill>
+          <a:ln>
+            <a:noFill/>
+          </a:ln>
+          <a:effectLst/>
+        </p:spPr>
+        <p:style>
+          <a:lnRef idx="1">
+            <a:schemeClr val="accent1"/>
+          </a:lnRef>
+          <a:fillRef idx="3">
+            <a:schemeClr val="accent1"/>
+          </a:fillRef>
+          <a:effectRef idx="2">
+            <a:schemeClr val="accent1"/>
+          </a:effectRef>
+          <a:fontRef idx="minor">
+            <a:schemeClr val="lt1"/>
+          </a:fontRef>
+        </p:style>
+        <p:txBody>
+          <a:bodyPr rtlCol="0" anchor="ctr"/>
+          <a:lstStyle/>
+          <a:p>
+            <a:pPr algn="ctr"/>
+          </a:p>
+        </p:txBody>
+      </p:sp>
+      <p:sp>
+        <p:nvSpPr>
+          <p:cNvPr id="53" name="Chevron 52"/>
+          <p:cNvSpPr/>
+          <p:nvPr/>
+        </p:nvSpPr>
+        <p:spPr>
+          <a:xfrm>
+            <a:off x="4654296" y="4949190"/>
+            <a:ext cx="219456" cy="141732"/>
+          </a:xfrm>
+          <a:prstGeom prst="chevron">
+            <a:avLst/>
+          </a:prstGeom>
+          <a:solidFill>
+            <a:srgbClr val="D0D4D7"/>
+          </a:solidFill>
+          <a:ln>
+            <a:noFill/>
+          </a:ln>
+          <a:effectLst/>
+        </p:spPr>
+        <p:style>
+          <a:lnRef idx="1">
+            <a:schemeClr val="accent1"/>
+          </a:lnRef>
+          <a:fillRef idx="3">
+            <a:schemeClr val="accent1"/>
+          </a:fillRef>
+          <a:effectRef idx="2">
+            <a:schemeClr val="accent1"/>
+          </a:effectRef>
+          <a:fontRef idx="minor">
+            <a:schemeClr val="lt1"/>
+          </a:fontRef>
+        </p:style>
+        <p:txBody>
+          <a:bodyPr rtlCol="0" anchor="ctr"/>
+          <a:lstStyle/>
+          <a:p>
+            <a:pPr algn="ctr"/>
+          </a:p>
+        </p:txBody>
+      </p:sp>
+      <p:sp>
+        <p:nvSpPr>
+          <p:cNvPr id="54" name="TextBox 53"/>
+          <p:cNvSpPr txBox="1"/>
+          <p:nvPr/>
+        </p:nvSpPr>
+        <p:spPr>
+          <a:xfrm>
+            <a:off x="4892040" y="4910328"/>
+            <a:ext cx="475488" cy="219456"/>
+          </a:xfrm>
+          <a:prstGeom prst="rect">
+            <a:avLst/>
+          </a:prstGeom>
+          <a:noFill/>
+        </p:spPr>
+        <p:txBody>
+          <a:bodyPr wrap="square" anchor="ctr" lIns="25400" rIns="25400" tIns="12700" bIns="12700">
+            <a:spAutoFit/>
+          </a:bodyPr>
+          <a:lstStyle/>
+          <a:p>
+            <a:pPr algn="l">
+              <a:lnSpc>
+                <a:spcPct val="100000"/>
+              </a:lnSpc>
+            </a:pPr>
+            <a:r>
+              <a:rPr sz="1000" b="1">
+                <a:solidFill>
+                  <a:srgbClr val="1B5C80"/>
+                </a:solidFill>
+              </a:rPr>
+              <a:t>④</a:t>
+            </a:r>
+          </a:p>
+        </p:txBody>
+      </p:sp>
+      <p:sp>
+        <p:nvSpPr>
+          <p:cNvPr id="55" name="Chevron 54"/>
+          <p:cNvSpPr/>
+          <p:nvPr/>
+        </p:nvSpPr>
+        <p:spPr>
+          <a:xfrm>
+            <a:off x="3849624" y="5333238"/>
+            <a:ext cx="219456" cy="141732"/>
+          </a:xfrm>
+          <a:prstGeom prst="chevron">
+            <a:avLst/>
+          </a:prstGeom>
+          <a:solidFill>
+            <a:srgbClr val="0FA4CC"/>
+          </a:solidFill>
+          <a:ln>
+            <a:noFill/>
+          </a:ln>
+          <a:effectLst/>
+        </p:spPr>
+        <p:style>
+          <a:lnRef idx="1">
+            <a:schemeClr val="accent1"/>
+          </a:lnRef>
+          <a:fillRef idx="3">
+            <a:schemeClr val="accent1"/>
+          </a:fillRef>
+          <a:effectRef idx="2">
+            <a:schemeClr val="accent1"/>
+          </a:effectRef>
+          <a:fontRef idx="minor">
+            <a:schemeClr val="lt1"/>
+          </a:fontRef>
+        </p:style>
+        <p:txBody>
+          <a:bodyPr rtlCol="0" anchor="ctr"/>
+          <a:lstStyle/>
+          <a:p>
+            <a:pPr algn="ctr"/>
+          </a:p>
+        </p:txBody>
+      </p:sp>
+      <p:sp>
+        <p:nvSpPr>
+          <p:cNvPr id="56" name="Chevron 55"/>
+          <p:cNvSpPr/>
+          <p:nvPr/>
+        </p:nvSpPr>
+        <p:spPr>
+          <a:xfrm>
+            <a:off x="4050792" y="5333238"/>
+            <a:ext cx="219456" cy="141732"/>
+          </a:xfrm>
+          <a:prstGeom prst="chevron">
+            <a:avLst/>
+          </a:prstGeom>
+          <a:solidFill>
+            <a:srgbClr val="0FA4CC"/>
+          </a:solidFill>
+          <a:ln>
+            <a:noFill/>
+          </a:ln>
+          <a:effectLst/>
+        </p:spPr>
+        <p:style>
+          <a:lnRef idx="1">
+            <a:schemeClr val="accent1"/>
+          </a:lnRef>
+          <a:fillRef idx="3">
+            <a:schemeClr val="accent1"/>
+          </a:fillRef>
+          <a:effectRef idx="2">
+            <a:schemeClr val="accent1"/>
+          </a:effectRef>
+          <a:fontRef idx="minor">
+            <a:schemeClr val="lt1"/>
+          </a:fontRef>
+        </p:style>
+        <p:txBody>
+          <a:bodyPr rtlCol="0" anchor="ctr"/>
+          <a:lstStyle/>
+          <a:p>
+            <a:pPr algn="ctr"/>
+          </a:p>
+        </p:txBody>
+      </p:sp>
+      <p:sp>
+        <p:nvSpPr>
+          <p:cNvPr id="57" name="Chevron 56"/>
+          <p:cNvSpPr/>
+          <p:nvPr/>
+        </p:nvSpPr>
+        <p:spPr>
+          <a:xfrm>
+            <a:off x="4251960" y="5333238"/>
+            <a:ext cx="219456" cy="141732"/>
+          </a:xfrm>
+          <a:prstGeom prst="chevron">
+            <a:avLst/>
+          </a:prstGeom>
+          <a:solidFill>
+            <a:srgbClr val="0FA4CC"/>
+          </a:solidFill>
+          <a:ln>
+            <a:noFill/>
+          </a:ln>
+          <a:effectLst/>
+        </p:spPr>
+        <p:style>
+          <a:lnRef idx="1">
+            <a:schemeClr val="accent1"/>
+          </a:lnRef>
+          <a:fillRef idx="3">
+            <a:schemeClr val="accent1"/>
+          </a:fillRef>
+          <a:effectRef idx="2">
+            <a:schemeClr val="accent1"/>
+          </a:effectRef>
+          <a:fontRef idx="minor">
+            <a:schemeClr val="lt1"/>
+          </a:fontRef>
+        </p:style>
+        <p:txBody>
+          <a:bodyPr rtlCol="0" anchor="ctr"/>
+          <a:lstStyle/>
+          <a:p>
+            <a:pPr algn="ctr"/>
+          </a:p>
+        </p:txBody>
+      </p:sp>
+      <p:sp>
+        <p:nvSpPr>
+          <p:cNvPr id="58" name="Chevron 57"/>
+          <p:cNvSpPr/>
+          <p:nvPr/>
+        </p:nvSpPr>
+        <p:spPr>
+          <a:xfrm>
+            <a:off x="4453128" y="5333238"/>
+            <a:ext cx="219456" cy="141732"/>
+          </a:xfrm>
+          <a:prstGeom prst="chevron">
+            <a:avLst/>
+          </a:prstGeom>
+          <a:solidFill>
+            <a:srgbClr val="0FA4CC"/>
+          </a:solidFill>
+          <a:ln>
+            <a:noFill/>
+          </a:ln>
+          <a:effectLst/>
+        </p:spPr>
+        <p:style>
+          <a:lnRef idx="1">
+            <a:schemeClr val="accent1"/>
+          </a:lnRef>
+          <a:fillRef idx="3">
+            <a:schemeClr val="accent1"/>
+          </a:fillRef>
+          <a:effectRef idx="2">
+            <a:schemeClr val="accent1"/>
+          </a:effectRef>
+          <a:fontRef idx="minor">
+            <a:schemeClr val="lt1"/>
+          </a:fontRef>
+        </p:style>
+        <p:txBody>
+          <a:bodyPr rtlCol="0" anchor="ctr"/>
+          <a:lstStyle/>
+          <a:p>
+            <a:pPr algn="ctr"/>
+          </a:p>
+        </p:txBody>
+      </p:sp>
+      <p:sp>
+        <p:nvSpPr>
+          <p:cNvPr id="59" name="Chevron 58"/>
+          <p:cNvSpPr/>
+          <p:nvPr/>
+        </p:nvSpPr>
+        <p:spPr>
+          <a:xfrm>
+            <a:off x="4654296" y="5333238"/>
+            <a:ext cx="219456" cy="141732"/>
+          </a:xfrm>
+          <a:prstGeom prst="chevron">
+            <a:avLst/>
+          </a:prstGeom>
+          <a:solidFill>
+            <a:srgbClr val="D0D4D7"/>
+          </a:solidFill>
+          <a:ln>
+            <a:noFill/>
+          </a:ln>
+          <a:effectLst/>
+        </p:spPr>
+        <p:style>
+          <a:lnRef idx="1">
+            <a:schemeClr val="accent1"/>
+          </a:lnRef>
+          <a:fillRef idx="3">
+            <a:schemeClr val="accent1"/>
+          </a:fillRef>
+          <a:effectRef idx="2">
+            <a:schemeClr val="accent1"/>
+          </a:effectRef>
+          <a:fontRef idx="minor">
+            <a:schemeClr val="lt1"/>
+          </a:fontRef>
+        </p:style>
+        <p:txBody>
+          <a:bodyPr rtlCol="0" anchor="ctr"/>
+          <a:lstStyle/>
+          <a:p>
+            <a:pPr algn="ctr"/>
+          </a:p>
+        </p:txBody>
+      </p:sp>
+      <p:sp>
+        <p:nvSpPr>
+          <p:cNvPr id="60" name="TextBox 59"/>
+          <p:cNvSpPr txBox="1"/>
+          <p:nvPr/>
+        </p:nvSpPr>
+        <p:spPr>
+          <a:xfrm>
+            <a:off x="4892040" y="5294376"/>
+            <a:ext cx="475488" cy="219456"/>
+          </a:xfrm>
+          <a:prstGeom prst="rect">
+            <a:avLst/>
+          </a:prstGeom>
+          <a:noFill/>
+        </p:spPr>
+        <p:txBody>
+          <a:bodyPr wrap="square" anchor="ctr" lIns="25400" rIns="25400" tIns="12700" bIns="12700">
+            <a:spAutoFit/>
+          </a:bodyPr>
+          <a:lstStyle/>
+          <a:p>
+            <a:pPr algn="l">
+              <a:lnSpc>
+                <a:spcPct val="100000"/>
+              </a:lnSpc>
+            </a:pPr>
+            <a:r>
+              <a:rPr sz="1000" b="1">
+                <a:solidFill>
+                  <a:srgbClr val="1B5C80"/>
+                </a:solidFill>
+              </a:rPr>
+              <a:t>④</a:t>
+            </a:r>
+          </a:p>
+        </p:txBody>
+      </p:sp>
+      <p:sp>
+        <p:nvSpPr>
+          <p:cNvPr id="61" name="Chevron 60"/>
+          <p:cNvSpPr/>
+          <p:nvPr/>
+        </p:nvSpPr>
+        <p:spPr>
+          <a:xfrm>
+            <a:off x="3849624" y="5717286"/>
+            <a:ext cx="219456" cy="141732"/>
+          </a:xfrm>
+          <a:prstGeom prst="chevron">
+            <a:avLst/>
+          </a:prstGeom>
+          <a:solidFill>
+            <a:srgbClr val="0FA4CC"/>
+          </a:solidFill>
+          <a:ln>
+            <a:noFill/>
+          </a:ln>
+          <a:effectLst/>
+        </p:spPr>
+        <p:style>
+          <a:lnRef idx="1">
+            <a:schemeClr val="accent1"/>
+          </a:lnRef>
+          <a:fillRef idx="3">
+            <a:schemeClr val="accent1"/>
+          </a:fillRef>
+          <a:effectRef idx="2">
+            <a:schemeClr val="accent1"/>
+          </a:effectRef>
+          <a:fontRef idx="minor">
+            <a:schemeClr val="lt1"/>
+          </a:fontRef>
+        </p:style>
+        <p:txBody>
+          <a:bodyPr rtlCol="0" anchor="ctr"/>
+          <a:lstStyle/>
+          <a:p>
+            <a:pPr algn="ctr"/>
+          </a:p>
+        </p:txBody>
+      </p:sp>
+      <p:sp>
+        <p:nvSpPr>
+          <p:cNvPr id="62" name="Chevron 61"/>
+          <p:cNvSpPr/>
+          <p:nvPr/>
+        </p:nvSpPr>
+        <p:spPr>
+          <a:xfrm>
+            <a:off x="4050792" y="5717286"/>
+            <a:ext cx="219456" cy="141732"/>
+          </a:xfrm>
+          <a:prstGeom prst="chevron">
+            <a:avLst/>
+          </a:prstGeom>
+          <a:solidFill>
+            <a:srgbClr val="0FA4CC"/>
+          </a:solidFill>
+          <a:ln>
+            <a:noFill/>
+          </a:ln>
+          <a:effectLst/>
+        </p:spPr>
+        <p:style>
+          <a:lnRef idx="1">
+            <a:schemeClr val="accent1"/>
+          </a:lnRef>
+          <a:fillRef idx="3">
+            <a:schemeClr val="accent1"/>
+          </a:fillRef>
+          <a:effectRef idx="2">
+            <a:schemeClr val="accent1"/>
+          </a:effectRef>
+          <a:fontRef idx="minor">
+            <a:schemeClr val="lt1"/>
+          </a:fontRef>
+        </p:style>
+        <p:txBody>
+          <a:bodyPr rtlCol="0" anchor="ctr"/>
+          <a:lstStyle/>
+          <a:p>
+            <a:pPr algn="ctr"/>
+          </a:p>
+        </p:txBody>
+      </p:sp>
+      <p:sp>
+        <p:nvSpPr>
+          <p:cNvPr id="63" name="Chevron 62"/>
+          <p:cNvSpPr/>
+          <p:nvPr/>
+        </p:nvSpPr>
+        <p:spPr>
+          <a:xfrm>
+            <a:off x="4251960" y="5717286"/>
+            <a:ext cx="219456" cy="141732"/>
+          </a:xfrm>
+          <a:prstGeom prst="chevron">
+            <a:avLst/>
+          </a:prstGeom>
+          <a:solidFill>
+            <a:srgbClr val="0FA4CC"/>
+          </a:solidFill>
+          <a:ln>
+            <a:noFill/>
+          </a:ln>
+          <a:effectLst/>
+        </p:spPr>
+        <p:style>
+          <a:lnRef idx="1">
+            <a:schemeClr val="accent1"/>
+          </a:lnRef>
+          <a:fillRef idx="3">
+            <a:schemeClr val="accent1"/>
+          </a:fillRef>
+          <a:effectRef idx="2">
+            <a:schemeClr val="accent1"/>
+          </a:effectRef>
+          <a:fontRef idx="minor">
+            <a:schemeClr val="lt1"/>
+          </a:fontRef>
+        </p:style>
+        <p:txBody>
+          <a:bodyPr rtlCol="0" anchor="ctr"/>
+          <a:lstStyle/>
+          <a:p>
+            <a:pPr algn="ctr"/>
+          </a:p>
+        </p:txBody>
+      </p:sp>
+      <p:sp>
+        <p:nvSpPr>
+          <p:cNvPr id="64" name="Chevron 63"/>
+          <p:cNvSpPr/>
+          <p:nvPr/>
+        </p:nvSpPr>
+        <p:spPr>
+          <a:xfrm>
+            <a:off x="4453128" y="5717286"/>
+            <a:ext cx="219456" cy="141732"/>
+          </a:xfrm>
+          <a:prstGeom prst="chevron">
+            <a:avLst/>
+          </a:prstGeom>
+          <a:solidFill>
+            <a:srgbClr val="0FA4CC"/>
+          </a:solidFill>
+          <a:ln>
+            <a:noFill/>
+          </a:ln>
+          <a:effectLst/>
+        </p:spPr>
+        <p:style>
+          <a:lnRef idx="1">
+            <a:schemeClr val="accent1"/>
+          </a:lnRef>
+          <a:fillRef idx="3">
+            <a:schemeClr val="accent1"/>
+          </a:fillRef>
+          <a:effectRef idx="2">
+            <a:schemeClr val="accent1"/>
+          </a:effectRef>
+          <a:fontRef idx="minor">
+            <a:schemeClr val="lt1"/>
+          </a:fontRef>
+        </p:style>
+        <p:txBody>
+          <a:bodyPr rtlCol="0" anchor="ctr"/>
+          <a:lstStyle/>
+          <a:p>
+            <a:pPr algn="ctr"/>
+          </a:p>
+        </p:txBody>
+      </p:sp>
+      <p:sp>
+        <p:nvSpPr>
+          <p:cNvPr id="65" name="Chevron 64"/>
+          <p:cNvSpPr/>
+          <p:nvPr/>
+        </p:nvSpPr>
+        <p:spPr>
+          <a:xfrm>
+            <a:off x="4654296" y="5717286"/>
+            <a:ext cx="219456" cy="141732"/>
+          </a:xfrm>
+          <a:prstGeom prst="chevron">
+            <a:avLst/>
+          </a:prstGeom>
+          <a:solidFill>
+            <a:srgbClr val="D0D4D7"/>
+          </a:solidFill>
+          <a:ln>
+            <a:noFill/>
+          </a:ln>
+          <a:effectLst/>
+        </p:spPr>
+        <p:style>
+          <a:lnRef idx="1">
+            <a:schemeClr val="accent1"/>
+          </a:lnRef>
+          <a:fillRef idx="3">
+            <a:schemeClr val="accent1"/>
+          </a:fillRef>
+          <a:effectRef idx="2">
+            <a:schemeClr val="accent1"/>
+          </a:effectRef>
+          <a:fontRef idx="minor">
+            <a:schemeClr val="lt1"/>
+          </a:fontRef>
+        </p:style>
+        <p:txBody>
+          <a:bodyPr rtlCol="0" anchor="ctr"/>
+          <a:lstStyle/>
+          <a:p>
+            <a:pPr algn="ctr"/>
+          </a:p>
+        </p:txBody>
+      </p:sp>
+      <p:sp>
+        <p:nvSpPr>
+          <p:cNvPr id="66" name="TextBox 65"/>
+          <p:cNvSpPr txBox="1"/>
+          <p:nvPr/>
+        </p:nvSpPr>
+        <p:spPr>
+          <a:xfrm>
+            <a:off x="4892040" y="5678424"/>
+            <a:ext cx="475488" cy="219456"/>
+          </a:xfrm>
+          <a:prstGeom prst="rect">
+            <a:avLst/>
+          </a:prstGeom>
+          <a:noFill/>
+        </p:spPr>
+        <p:txBody>
+          <a:bodyPr wrap="square" anchor="ctr" lIns="25400" rIns="25400" tIns="12700" bIns="12700">
+            <a:spAutoFit/>
+          </a:bodyPr>
+          <a:lstStyle/>
+          <a:p>
+            <a:pPr algn="l">
+              <a:lnSpc>
+                <a:spcPct val="100000"/>
+              </a:lnSpc>
+            </a:pPr>
+            <a:r>
+              <a:rPr sz="1000" b="1">
+                <a:solidFill>
+                  <a:srgbClr val="1B5C80"/>
+                </a:solidFill>
+              </a:rPr>
+              <a:t>④</a:t>
+            </a:r>
+          </a:p>
+        </p:txBody>
+      </p:sp>
+      <p:sp>
+        <p:nvSpPr>
+          <p:cNvPr id="67" name="Chevron 66"/>
+          <p:cNvSpPr/>
+          <p:nvPr/>
+        </p:nvSpPr>
+        <p:spPr>
+          <a:xfrm>
+            <a:off x="3849624" y="6101334"/>
+            <a:ext cx="219456" cy="141732"/>
+          </a:xfrm>
+          <a:prstGeom prst="chevron">
+            <a:avLst/>
+          </a:prstGeom>
+          <a:solidFill>
+            <a:srgbClr val="0FA4CC"/>
+          </a:solidFill>
+          <a:ln>
+            <a:noFill/>
+          </a:ln>
+          <a:effectLst/>
+        </p:spPr>
+        <p:style>
+          <a:lnRef idx="1">
+            <a:schemeClr val="accent1"/>
+          </a:lnRef>
+          <a:fillRef idx="3">
+            <a:schemeClr val="accent1"/>
+          </a:fillRef>
+          <a:effectRef idx="2">
+            <a:schemeClr val="accent1"/>
+          </a:effectRef>
+          <a:fontRef idx="minor">
+            <a:schemeClr val="lt1"/>
+          </a:fontRef>
+        </p:style>
+        <p:txBody>
+          <a:bodyPr rtlCol="0" anchor="ctr"/>
+          <a:lstStyle/>
+          <a:p>
+            <a:pPr algn="ctr"/>
+          </a:p>
+        </p:txBody>
+      </p:sp>
+      <p:sp>
+        <p:nvSpPr>
+          <p:cNvPr id="68" name="Chevron 67"/>
+          <p:cNvSpPr/>
+          <p:nvPr/>
+        </p:nvSpPr>
+        <p:spPr>
+          <a:xfrm>
+            <a:off x="4050792" y="6101334"/>
+            <a:ext cx="219456" cy="141732"/>
+          </a:xfrm>
+          <a:prstGeom prst="chevron">
+            <a:avLst/>
+          </a:prstGeom>
+          <a:solidFill>
+            <a:srgbClr val="0FA4CC"/>
+          </a:solidFill>
+          <a:ln>
+            <a:noFill/>
+          </a:ln>
+          <a:effectLst/>
+        </p:spPr>
+        <p:style>
+          <a:lnRef idx="1">
+            <a:schemeClr val="accent1"/>
+          </a:lnRef>
+          <a:fillRef idx="3">
+            <a:schemeClr val="accent1"/>
+          </a:fillRef>
+          <a:effectRef idx="2">
+            <a:schemeClr val="accent1"/>
+          </a:effectRef>
+          <a:fontRef idx="minor">
+            <a:schemeClr val="lt1"/>
+          </a:fontRef>
+        </p:style>
+        <p:txBody>
+          <a:bodyPr rtlCol="0" anchor="ctr"/>
+          <a:lstStyle/>
+          <a:p>
+            <a:pPr algn="ctr"/>
+          </a:p>
+        </p:txBody>
+      </p:sp>
+      <p:sp>
+        <p:nvSpPr>
+          <p:cNvPr id="69" name="Chevron 68"/>
+          <p:cNvSpPr/>
+          <p:nvPr/>
+        </p:nvSpPr>
+        <p:spPr>
+          <a:xfrm>
+            <a:off x="4251960" y="6101334"/>
+            <a:ext cx="219456" cy="141732"/>
+          </a:xfrm>
+          <a:prstGeom prst="chevron">
+            <a:avLst/>
+          </a:prstGeom>
+          <a:solidFill>
+            <a:srgbClr val="0FA4CC"/>
+          </a:solidFill>
+          <a:ln>
+            <a:noFill/>
+          </a:ln>
+          <a:effectLst/>
+        </p:spPr>
+        <p:style>
+          <a:lnRef idx="1">
+            <a:schemeClr val="accent1"/>
+          </a:lnRef>
+          <a:fillRef idx="3">
+            <a:schemeClr val="accent1"/>
+          </a:fillRef>
+          <a:effectRef idx="2">
+            <a:schemeClr val="accent1"/>
+          </a:effectRef>
+          <a:fontRef idx="minor">
+            <a:schemeClr val="lt1"/>
+          </a:fontRef>
+        </p:style>
+        <p:txBody>
+          <a:bodyPr rtlCol="0" anchor="ctr"/>
+          <a:lstStyle/>
+          <a:p>
+            <a:pPr algn="ctr"/>
+          </a:p>
+        </p:txBody>
+      </p:sp>
+      <p:sp>
+        <p:nvSpPr>
+          <p:cNvPr id="70" name="Chevron 69"/>
+          <p:cNvSpPr/>
+          <p:nvPr/>
+        </p:nvSpPr>
+        <p:spPr>
+          <a:xfrm>
+            <a:off x="4453128" y="6101334"/>
+            <a:ext cx="219456" cy="141732"/>
+          </a:xfrm>
+          <a:prstGeom prst="chevron">
+            <a:avLst/>
+          </a:prstGeom>
+          <a:solidFill>
+            <a:srgbClr val="0FA4CC"/>
+          </a:solidFill>
+          <a:ln>
+            <a:noFill/>
+          </a:ln>
+          <a:effectLst/>
+        </p:spPr>
+        <p:style>
+          <a:lnRef idx="1">
+            <a:schemeClr val="accent1"/>
+          </a:lnRef>
+          <a:fillRef idx="3">
+            <a:schemeClr val="accent1"/>
+          </a:fillRef>
+          <a:effectRef idx="2">
+            <a:schemeClr val="accent1"/>
+          </a:effectRef>
+          <a:fontRef idx="minor">
+            <a:schemeClr val="lt1"/>
+          </a:fontRef>
+        </p:style>
+        <p:txBody>
+          <a:bodyPr rtlCol="0" anchor="ctr"/>
+          <a:lstStyle/>
+          <a:p>
+            <a:pPr algn="ctr"/>
+          </a:p>
+        </p:txBody>
+      </p:sp>
+      <p:sp>
+        <p:nvSpPr>
+          <p:cNvPr id="71" name="Chevron 70"/>
+          <p:cNvSpPr/>
+          <p:nvPr/>
+        </p:nvSpPr>
+        <p:spPr>
+          <a:xfrm>
+            <a:off x="4654296" y="6101334"/>
+            <a:ext cx="219456" cy="141732"/>
+          </a:xfrm>
+          <a:prstGeom prst="chevron">
+            <a:avLst/>
+          </a:prstGeom>
+          <a:solidFill>
+            <a:srgbClr val="D0D4D7"/>
+          </a:solidFill>
+          <a:ln>
+            <a:noFill/>
+          </a:ln>
+          <a:effectLst/>
+        </p:spPr>
+        <p:style>
+          <a:lnRef idx="1">
+            <a:schemeClr val="accent1"/>
+          </a:lnRef>
+          <a:fillRef idx="3">
+            <a:schemeClr val="accent1"/>
+          </a:fillRef>
+          <a:effectRef idx="2">
+            <a:schemeClr val="accent1"/>
+          </a:effectRef>
+          <a:fontRef idx="minor">
+            <a:schemeClr val="lt1"/>
+          </a:fontRef>
+        </p:style>
+        <p:txBody>
+          <a:bodyPr rtlCol="0" anchor="ctr"/>
+          <a:lstStyle/>
+          <a:p>
+            <a:pPr algn="ctr"/>
+          </a:p>
+        </p:txBody>
+      </p:sp>
+      <p:sp>
+        <p:nvSpPr>
+          <p:cNvPr id="72" name="TextBox 71"/>
+          <p:cNvSpPr txBox="1"/>
+          <p:nvPr/>
+        </p:nvSpPr>
+        <p:spPr>
+          <a:xfrm>
+            <a:off x="4892040" y="6062472"/>
+            <a:ext cx="475488" cy="219456"/>
+          </a:xfrm>
+          <a:prstGeom prst="rect">
+            <a:avLst/>
+          </a:prstGeom>
+          <a:noFill/>
+        </p:spPr>
+        <p:txBody>
+          <a:bodyPr wrap="square" anchor="ctr" lIns="25400" rIns="25400" tIns="12700" bIns="12700">
+            <a:spAutoFit/>
+          </a:bodyPr>
+          <a:lstStyle/>
+          <a:p>
+            <a:pPr algn="l">
+              <a:lnSpc>
+                <a:spcPct val="100000"/>
+              </a:lnSpc>
+            </a:pPr>
+            <a:r>
+              <a:rPr sz="1000" b="1">
+                <a:solidFill>
+                  <a:srgbClr val="1B5C80"/>
+                </a:solidFill>
+              </a:rPr>
+              <a:t>④</a:t>
+            </a:r>
+          </a:p>
+        </p:txBody>
+      </p:sp>
+      <p:sp>
+        <p:nvSpPr>
+          <p:cNvPr id="73" name="Rectangle 72"/>
           <p:cNvSpPr/>
           <p:nvPr/>
         </p:nvSpPr>
@@ -37069,7 +39594,7 @@
       </p:sp>
       <p:sp>
         <p:nvSpPr>
-          <p:cNvPr id="8" name="TextBox 7"/>
+          <p:cNvPr id="74" name="TextBox 73"/>
           <p:cNvSpPr txBox="1"/>
           <p:nvPr/>
         </p:nvSpPr>
@@ -38251,7 +40776,7 @@
                   <a:srgbClr val="232323"/>
                 </a:solidFill>
               </a:rPr>
-              <a:t>外部Web・APIは使用しない。必要な資料は人が取得しSharePointへ格納する方針で回避できるチームがある。</a:t>
+              <a:t>外部Web・APIは使用しない。必要な資料は人が取得しSharePointへ格納する方針で回避予定（チーム3・4）。</a:t>
             </a:r>
           </a:p>
         </p:txBody>
@@ -38371,7 +40896,7 @@
                   <a:srgbClr val="232323"/>
                 </a:solidFill>
               </a:rPr>
-              <a:t>予定表・会議室・メール・Teams情報の扱いは事務局確認が必要。設計に影響する。</a:t>
+              <a:t>予定表・会議室・メール・Teams情報の扱いは事務局確認が必要。設計に影響する（チーム8・9）。</a:t>
             </a:r>
           </a:p>
         </p:txBody>
@@ -38491,7 +41016,7 @@
                   <a:srgbClr val="232323"/>
                 </a:solidFill>
               </a:rPr>
-              <a:t>共有ファイルサーバの直接参照は避け、SharePoint／OneDrive格納を原則とする。個人情報や極秘情報を含む場合はマスキング等の追加対応が必要。</a:t>
+              <a:t>共有ファイルサーバの直接参照は不可。SharePoint／OneDrive格納を原則とする。個人情報や極秘情報を含む場合はマスキング等の追加対応が必要（チーム5・6・9）。</a:t>
             </a:r>
           </a:p>
         </p:txBody>
@@ -38624,14 +41149,14 @@
         </p:nvSpPr>
         <p:spPr>
           <a:xfrm>
-            <a:off x="740664" y="6053328"/>
-            <a:ext cx="10716768" cy="292608"/>
+            <a:off x="740664" y="6035040"/>
+            <a:ext cx="10716768" cy="329184"/>
           </a:xfrm>
           <a:prstGeom prst="rect">
             <a:avLst/>
           </a:prstGeom>
           <a:solidFill>
-            <a:srgbClr val="F8FDFA"/>
+            <a:srgbClr val="DBF1F7"/>
           </a:solidFill>
           <a:ln>
             <a:noFill/>
@@ -38669,7 +41194,7 @@
         <p:spPr>
           <a:xfrm>
             <a:off x="886968" y="6035040"/>
-            <a:ext cx="10424160" cy="310896"/>
+            <a:ext cx="10424160" cy="329184"/>
           </a:xfrm>
           <a:prstGeom prst="rect">
             <a:avLst/>
@@ -38688,7 +41213,7 @@
               </a:lnSpc>
             </a:pPr>
             <a:r>
-              <a:rPr sz="950" b="0">
+              <a:rPr sz="950" b="1">
                 <a:solidFill>
                   <a:srgbClr val="232323"/>
                 </a:solidFill>
@@ -44770,7 +47295,7 @@
                             <a:srgbClr val="232323"/>
                           </a:solidFill>
                         </a:rPr>
-                        <a:t>△確認要</a:t>
+                        <a:t>△回避可</a:t>
                       </a:r>
                     </a:p>
                   </a:txBody>
@@ -44796,7 +47321,7 @@
                             <a:srgbClr val="232323"/>
                           </a:solidFill>
                         </a:rPr>
-                        <a:t>外部Web・営業データの取得</a:t>
+                        <a:t>外部Webの取得／営業データのマスキング</a:t>
                       </a:r>
                     </a:p>
                   </a:txBody>
@@ -44822,7 +47347,7 @@
                             <a:srgbClr val="232323"/>
                           </a:solidFill>
                         </a:rPr>
-                        <a:t>外部Webは人が取得してSharePointに置く方針で回避可能。営業システム連携はMVP対象外とするか、取得可能な範囲を事務局が判断。</a:t>
+                        <a:t>外部Webは人が取得してSharePointに置く方針で回避可能。営業システムから取得したデータのマスキング有無は要確認だが、手動マスキングで回避可能。</a:t>
                       </a:r>
                     </a:p>
                   </a:txBody>
@@ -45034,7 +47559,7 @@
                             <a:srgbClr val="232323"/>
                           </a:solidFill>
                         </a:rPr>
-                        <a:t>8月のMVPは人が起点となって資料作成を開始する構成に寄せれば回避可能。保管先はSharePoint/OneDriveへ。</a:t>
+                        <a:t>8月のMVPは人が起点となって資料作成を開始する構成に寄せれば回避可能。共有ファイルサーバの直接参照は不可のため、保管先はSharePoint／OneDriveへ。</a:t>
                       </a:r>
                     </a:p>
                   </a:txBody>
@@ -45246,7 +47771,7 @@
                             <a:srgbClr val="232323"/>
                           </a:solidFill>
                         </a:rPr>
-                        <a:t>SharePoint格納と人の確認を前提にすれば大部分は回避可能。固定文面の自動送信条件のみ事務局確認。</a:t>
+                        <a:t>共有ファイルサーバの直接参照は不可。SharePoint格納と人の確認を前提にすれば大部分は回避可能。固定文面の自動送信条件のみ事務局確認。</a:t>
                       </a:r>
                     </a:p>
                   </a:txBody>
@@ -45963,7 +48488,7 @@
                             <a:srgbClr val="232323"/>
                           </a:solidFill>
                         </a:rPr>
-                        <a:t>共有ファイルサーバの直接参照は避け、SharePoint／OneDrive格納を原則とする。個人情報・極秘情報を含む場合はマスキング等が必要。</a:t>
+                        <a:t>共有ファイルサーバの直接参照は不可。SharePoint／OneDrive格納を原則とする。個人情報・極秘情報を含む場合はマスキング等が必要。</a:t>
                       </a:r>
                     </a:p>
                   </a:txBody>
@@ -46043,13 +48568,13 @@
                             <a:srgbClr val="232323"/>
                           </a:solidFill>
                         </a:rPr>
-                        <a:t>事務局判断待ち（急ぎ度：中）</a:t>
+                        <a:t>事務局判断待ち</a:t>
                       </a:r>
                     </a:p>
                   </a:txBody>
                   <a:tcPr marL="50800" marR="50800" marT="12700" marB="12700" anchor="ctr">
                     <a:solidFill>
-                      <a:srgbClr val="E7E8F8"/>
+                      <a:srgbClr val="FAE5E3"/>
                     </a:solidFill>
                   </a:tcPr>
                 </a:tc>

--- a/reports/CopilotStudio_ハッカソン_事前相談会②_状況報告_20260729.pptx
+++ b/reports/CopilotStudio_ハッカソン_事前相談会②_状況報告_20260729.pptx
@@ -49948,1825 +49948,21 @@
                   <a:srgbClr val="1B5C80"/>
                 </a:solidFill>
               </a:rPr>
-              <a:t>全チームの評価一覧（難易度と適合性は別の軸として評価）</a:t>
-            </a:r>
-          </a:p>
-        </p:txBody>
-      </p:sp>
-      <p:graphicFrame>
-        <p:nvGraphicFramePr>
-          <p:cNvPr id="12" name="Table 11"/>
-          <p:cNvGraphicFramePr>
-            <a:graphicFrameLocks noGrp="1"/>
-          </p:cNvGraphicFramePr>
-          <p:nvPr/>
-        </p:nvGraphicFramePr>
-        <p:xfrm>
-          <a:off x="740664" y="2048256"/>
-          <a:ext cx="5303520" cy="1920240"/>
-        </p:xfrm>
-        <a:graphic>
-          <a:graphicData uri="http://schemas.openxmlformats.org/drawingml/2006/table">
-            <a:tbl>
-              <a:tblPr>
-                <a:tableStyleId>{5C22544A-7EE6-4342-B048-85BDC9FD1C3A}</a:tableStyleId>
-              </a:tblPr>
-              <a:tblGrid>
-                <a:gridCol w="713232"/>
-                <a:gridCol w="475488"/>
-                <a:gridCol w="804672"/>
-                <a:gridCol w="969264"/>
-                <a:gridCol w="2340864"/>
-              </a:tblGrid>
-              <a:tr h="274320">
-                <a:tc>
-                  <a:txBody>
-                    <a:bodyPr wrap="square"/>
-                    <a:lstStyle/>
-                    <a:p>
-                      <a:pPr algn="ctr">
-                        <a:lnSpc>
-                          <a:spcPct val="96000"/>
-                        </a:lnSpc>
-                      </a:pPr>
-                      <a:r>
-                        <a:rPr sz="860" b="1">
-                          <a:solidFill>
-                            <a:srgbClr val="FFFFFF"/>
-                          </a:solidFill>
-                        </a:rPr>
-                        <a:t>チーム</a:t>
-                      </a:r>
-                    </a:p>
-                  </a:txBody>
-                  <a:tcPr marL="50800" marR="50800" marT="12700" marB="12700" anchor="ctr">
-                    <a:solidFill>
-                      <a:srgbClr val="1B5C80"/>
-                    </a:solidFill>
-                  </a:tcPr>
-                </a:tc>
-                <a:tc>
-                  <a:txBody>
-                    <a:bodyPr wrap="square"/>
-                    <a:lstStyle/>
-                    <a:p>
-                      <a:pPr algn="ctr">
-                        <a:lnSpc>
-                          <a:spcPct val="96000"/>
-                        </a:lnSpc>
-                      </a:pPr>
-                      <a:r>
-                        <a:rPr sz="860" b="1">
-                          <a:solidFill>
-                            <a:srgbClr val="FFFFFF"/>
-                          </a:solidFill>
-                        </a:rPr>
-                        <a:t>難易</a:t>
-                      </a:r>
-                    </a:p>
-                    <a:p>
-                      <a:pPr algn="ctr">
-                        <a:lnSpc>
-                          <a:spcPct val="96000"/>
-                        </a:lnSpc>
-                      </a:pPr>
-                      <a:r>
-                        <a:rPr sz="860" b="1">
-                          <a:solidFill>
-                            <a:srgbClr val="FFFFFF"/>
-                          </a:solidFill>
-                        </a:rPr>
-                        <a:t>度</a:t>
-                      </a:r>
-                    </a:p>
-                  </a:txBody>
-                  <a:tcPr marL="50800" marR="50800" marT="12700" marB="12700" anchor="ctr">
-                    <a:solidFill>
-                      <a:srgbClr val="1B5C80"/>
-                    </a:solidFill>
-                  </a:tcPr>
-                </a:tc>
-                <a:tc>
-                  <a:txBody>
-                    <a:bodyPr wrap="square"/>
-                    <a:lstStyle/>
-                    <a:p>
-                      <a:pPr algn="ctr">
-                        <a:lnSpc>
-                          <a:spcPct val="96000"/>
-                        </a:lnSpc>
-                      </a:pPr>
-                      <a:r>
-                        <a:rPr sz="860" b="1">
-                          <a:solidFill>
-                            <a:srgbClr val="FFFFFF"/>
-                          </a:solidFill>
-                        </a:rPr>
-                        <a:t>適合性</a:t>
-                      </a:r>
-                    </a:p>
-                  </a:txBody>
-                  <a:tcPr marL="50800" marR="50800" marT="12700" marB="12700" anchor="ctr">
-                    <a:solidFill>
-                      <a:srgbClr val="1B5C80"/>
-                    </a:solidFill>
-                  </a:tcPr>
-                </a:tc>
-                <a:tc>
-                  <a:txBody>
-                    <a:bodyPr wrap="square"/>
-                    <a:lstStyle/>
-                    <a:p>
-                      <a:pPr algn="ctr">
-                        <a:lnSpc>
-                          <a:spcPct val="96000"/>
-                        </a:lnSpc>
-                      </a:pPr>
-                      <a:r>
-                        <a:rPr sz="860" b="1">
-                          <a:solidFill>
-                            <a:srgbClr val="FFFFFF"/>
-                          </a:solidFill>
-                        </a:rPr>
-                        <a:t>状態</a:t>
-                      </a:r>
-                    </a:p>
-                  </a:txBody>
-                  <a:tcPr marL="50800" marR="50800" marT="12700" marB="12700" anchor="ctr">
-                    <a:solidFill>
-                      <a:srgbClr val="1B5C80"/>
-                    </a:solidFill>
-                  </a:tcPr>
-                </a:tc>
-                <a:tc>
-                  <a:txBody>
-                    <a:bodyPr wrap="square"/>
-                    <a:lstStyle/>
-                    <a:p>
-                      <a:pPr algn="ctr">
-                        <a:lnSpc>
-                          <a:spcPct val="96000"/>
-                        </a:lnSpc>
-                      </a:pPr>
-                      <a:r>
-                        <a:rPr sz="860" b="1">
-                          <a:solidFill>
-                            <a:srgbClr val="FFFFFF"/>
-                          </a:solidFill>
-                        </a:rPr>
-                        <a:t>事務局視点</a:t>
-                      </a:r>
-                    </a:p>
-                  </a:txBody>
-                  <a:tcPr marL="50800" marR="50800" marT="12700" marB="12700" anchor="ctr">
-                    <a:solidFill>
-                      <a:srgbClr val="1B5C80"/>
-                    </a:solidFill>
-                  </a:tcPr>
-                </a:tc>
-              </a:tr>
-              <a:tr h="274320">
-                <a:tc>
-                  <a:txBody>
-                    <a:bodyPr wrap="square"/>
-                    <a:lstStyle/>
-                    <a:p>
-                      <a:pPr algn="ctr">
-                        <a:lnSpc>
-                          <a:spcPct val="96000"/>
-                        </a:lnSpc>
-                      </a:pPr>
-                      <a:r>
-                        <a:rPr sz="919" b="1">
-                          <a:solidFill>
-                            <a:srgbClr val="1B5C80"/>
-                          </a:solidFill>
-                        </a:rPr>
-                        <a:t>チーム1</a:t>
-                      </a:r>
-                    </a:p>
-                  </a:txBody>
-                  <a:tcPr marL="50800" marR="50800" marT="12700" marB="12700" anchor="ctr">
-                    <a:solidFill>
-                      <a:srgbClr val="FFFFFF"/>
-                    </a:solidFill>
-                  </a:tcPr>
-                </a:tc>
-                <a:tc>
-                  <a:txBody>
-                    <a:bodyPr wrap="square"/>
-                    <a:lstStyle/>
-                    <a:p>
-                      <a:pPr algn="ctr">
-                        <a:lnSpc>
-                          <a:spcPct val="96000"/>
-                        </a:lnSpc>
-                      </a:pPr>
-                      <a:r>
-                        <a:rPr sz="919" b="1">
-                          <a:solidFill>
-                            <a:srgbClr val="232323"/>
-                          </a:solidFill>
-                        </a:rPr>
-                        <a:t>3</a:t>
-                      </a:r>
-                    </a:p>
-                  </a:txBody>
-                  <a:tcPr marL="50800" marR="50800" marT="12700" marB="12700" anchor="ctr">
-                    <a:solidFill>
-                      <a:srgbClr val="E7E8F8"/>
-                    </a:solidFill>
-                  </a:tcPr>
-                </a:tc>
-                <a:tc>
-                  <a:txBody>
-                    <a:bodyPr wrap="square"/>
-                    <a:lstStyle/>
-                    <a:p>
-                      <a:pPr algn="ctr">
-                        <a:lnSpc>
-                          <a:spcPct val="96000"/>
-                        </a:lnSpc>
-                      </a:pPr>
-                      <a:r>
-                        <a:rPr sz="880" b="1">
-                          <a:solidFill>
-                            <a:srgbClr val="232323"/>
-                          </a:solidFill>
-                        </a:rPr>
-                        <a:t>○</a:t>
-                      </a:r>
-                    </a:p>
-                  </a:txBody>
-                  <a:tcPr marL="50800" marR="50800" marT="12700" marB="12700" anchor="ctr">
-                    <a:solidFill>
-                      <a:srgbClr val="DBF1F7"/>
-                    </a:solidFill>
-                  </a:tcPr>
-                </a:tc>
-                <a:tc>
-                  <a:txBody>
-                    <a:bodyPr wrap="square"/>
-                    <a:lstStyle/>
-                    <a:p>
-                      <a:pPr algn="ctr">
-                        <a:lnSpc>
-                          <a:spcPct val="96000"/>
-                        </a:lnSpc>
-                      </a:pPr>
-                      <a:r>
-                        <a:rPr sz="880" b="0">
-                          <a:solidFill>
-                            <a:srgbClr val="232323"/>
-                          </a:solidFill>
-                        </a:rPr>
-                        <a:t>進行可</a:t>
-                      </a:r>
-                    </a:p>
-                  </a:txBody>
-                  <a:tcPr marL="50800" marR="50800" marT="12700" marB="12700" anchor="ctr">
-                    <a:solidFill>
-                      <a:srgbClr val="FFFFFF"/>
-                    </a:solidFill>
-                  </a:tcPr>
-                </a:tc>
-                <a:tc>
-                  <a:txBody>
-                    <a:bodyPr wrap="square"/>
-                    <a:lstStyle/>
-                    <a:p>
-                      <a:pPr algn="l">
-                        <a:lnSpc>
-                          <a:spcPct val="96000"/>
-                        </a:lnSpc>
-                      </a:pPr>
-                      <a:r>
-                        <a:rPr sz="880" b="0">
-                          <a:solidFill>
-                            <a:srgbClr val="232323"/>
-                          </a:solidFill>
-                        </a:rPr>
-                        <a:t>伴走のみ</a:t>
-                      </a:r>
-                    </a:p>
-                  </a:txBody>
-                  <a:tcPr marL="50800" marR="50800" marT="12700" marB="12700" anchor="ctr">
-                    <a:solidFill>
-                      <a:srgbClr val="FFFFFF"/>
-                    </a:solidFill>
-                  </a:tcPr>
-                </a:tc>
-              </a:tr>
-              <a:tr h="274320">
-                <a:tc>
-                  <a:txBody>
-                    <a:bodyPr wrap="square"/>
-                    <a:lstStyle/>
-                    <a:p>
-                      <a:pPr algn="ctr">
-                        <a:lnSpc>
-                          <a:spcPct val="96000"/>
-                        </a:lnSpc>
-                      </a:pPr>
-                      <a:r>
-                        <a:rPr sz="919" b="1">
-                          <a:solidFill>
-                            <a:srgbClr val="1B5C80"/>
-                          </a:solidFill>
-                        </a:rPr>
-                        <a:t>チーム2</a:t>
-                      </a:r>
-                    </a:p>
-                  </a:txBody>
-                  <a:tcPr marL="50800" marR="50800" marT="12700" marB="12700" anchor="ctr">
-                    <a:solidFill>
-                      <a:srgbClr val="F8FDFA"/>
-                    </a:solidFill>
-                  </a:tcPr>
-                </a:tc>
-                <a:tc>
-                  <a:txBody>
-                    <a:bodyPr wrap="square"/>
-                    <a:lstStyle/>
-                    <a:p>
-                      <a:pPr algn="ctr">
-                        <a:lnSpc>
-                          <a:spcPct val="96000"/>
-                        </a:lnSpc>
-                      </a:pPr>
-                      <a:r>
-                        <a:rPr sz="919" b="1">
-                          <a:solidFill>
-                            <a:srgbClr val="232323"/>
-                          </a:solidFill>
-                        </a:rPr>
-                        <a:t>3</a:t>
-                      </a:r>
-                    </a:p>
-                  </a:txBody>
-                  <a:tcPr marL="50800" marR="50800" marT="12700" marB="12700" anchor="ctr">
-                    <a:solidFill>
-                      <a:srgbClr val="E7E8F8"/>
-                    </a:solidFill>
-                  </a:tcPr>
-                </a:tc>
-                <a:tc>
-                  <a:txBody>
-                    <a:bodyPr wrap="square"/>
-                    <a:lstStyle/>
-                    <a:p>
-                      <a:pPr algn="ctr">
-                        <a:lnSpc>
-                          <a:spcPct val="96000"/>
-                        </a:lnSpc>
-                      </a:pPr>
-                      <a:r>
-                        <a:rPr sz="880" b="1">
-                          <a:solidFill>
-                            <a:srgbClr val="232323"/>
-                          </a:solidFill>
-                        </a:rPr>
-                        <a:t>○</a:t>
-                      </a:r>
-                    </a:p>
-                  </a:txBody>
-                  <a:tcPr marL="50800" marR="50800" marT="12700" marB="12700" anchor="ctr">
-                    <a:solidFill>
-                      <a:srgbClr val="DBF1F7"/>
-                    </a:solidFill>
-                  </a:tcPr>
-                </a:tc>
-                <a:tc>
-                  <a:txBody>
-                    <a:bodyPr wrap="square"/>
-                    <a:lstStyle/>
-                    <a:p>
-                      <a:pPr algn="ctr">
-                        <a:lnSpc>
-                          <a:spcPct val="96000"/>
-                        </a:lnSpc>
-                      </a:pPr>
-                      <a:r>
-                        <a:rPr sz="880" b="0">
-                          <a:solidFill>
-                            <a:srgbClr val="232323"/>
-                          </a:solidFill>
-                        </a:rPr>
-                        <a:t>進行可</a:t>
-                      </a:r>
-                    </a:p>
-                  </a:txBody>
-                  <a:tcPr marL="50800" marR="50800" marT="12700" marB="12700" anchor="ctr">
-                    <a:solidFill>
-                      <a:srgbClr val="F8FDFA"/>
-                    </a:solidFill>
-                  </a:tcPr>
-                </a:tc>
-                <a:tc>
-                  <a:txBody>
-                    <a:bodyPr wrap="square"/>
-                    <a:lstStyle/>
-                    <a:p>
-                      <a:pPr algn="l">
-                        <a:lnSpc>
-                          <a:spcPct val="96000"/>
-                        </a:lnSpc>
-                      </a:pPr>
-                      <a:r>
-                        <a:rPr sz="880" b="0">
-                          <a:solidFill>
-                            <a:srgbClr val="232323"/>
-                          </a:solidFill>
-                        </a:rPr>
-                        <a:t>伴走のみ</a:t>
-                      </a:r>
-                    </a:p>
-                  </a:txBody>
-                  <a:tcPr marL="50800" marR="50800" marT="12700" marB="12700" anchor="ctr">
-                    <a:solidFill>
-                      <a:srgbClr val="F8FDFA"/>
-                    </a:solidFill>
-                  </a:tcPr>
-                </a:tc>
-              </a:tr>
-              <a:tr h="274320">
-                <a:tc>
-                  <a:txBody>
-                    <a:bodyPr wrap="square"/>
-                    <a:lstStyle/>
-                    <a:p>
-                      <a:pPr algn="ctr">
-                        <a:lnSpc>
-                          <a:spcPct val="96000"/>
-                        </a:lnSpc>
-                      </a:pPr>
-                      <a:r>
-                        <a:rPr sz="919" b="1">
-                          <a:solidFill>
-                            <a:srgbClr val="1B5C80"/>
-                          </a:solidFill>
-                        </a:rPr>
-                        <a:t>チーム3</a:t>
-                      </a:r>
-                    </a:p>
-                  </a:txBody>
-                  <a:tcPr marL="50800" marR="50800" marT="12700" marB="12700" anchor="ctr">
-                    <a:solidFill>
-                      <a:srgbClr val="FFFFFF"/>
-                    </a:solidFill>
-                  </a:tcPr>
-                </a:tc>
-                <a:tc>
-                  <a:txBody>
-                    <a:bodyPr wrap="square"/>
-                    <a:lstStyle/>
-                    <a:p>
-                      <a:pPr algn="ctr">
-                        <a:lnSpc>
-                          <a:spcPct val="96000"/>
-                        </a:lnSpc>
-                      </a:pPr>
-                      <a:r>
-                        <a:rPr sz="919" b="1">
-                          <a:solidFill>
-                            <a:srgbClr val="232323"/>
-                          </a:solidFill>
-                        </a:rPr>
-                        <a:t>4</a:t>
-                      </a:r>
-                    </a:p>
-                  </a:txBody>
-                  <a:tcPr marL="50800" marR="50800" marT="12700" marB="12700" anchor="ctr">
-                    <a:solidFill>
-                      <a:srgbClr val="FAE5E3"/>
-                    </a:solidFill>
-                  </a:tcPr>
-                </a:tc>
-                <a:tc>
-                  <a:txBody>
-                    <a:bodyPr wrap="square"/>
-                    <a:lstStyle/>
-                    <a:p>
-                      <a:pPr algn="ctr">
-                        <a:lnSpc>
-                          <a:spcPct val="96000"/>
-                        </a:lnSpc>
-                      </a:pPr>
-                      <a:r>
-                        <a:rPr sz="880" b="1">
-                          <a:solidFill>
-                            <a:srgbClr val="232323"/>
-                          </a:solidFill>
-                        </a:rPr>
-                        <a:t>△回避可</a:t>
-                      </a:r>
-                    </a:p>
-                  </a:txBody>
-                  <a:tcPr marL="50800" marR="50800" marT="12700" marB="12700" anchor="ctr">
-                    <a:solidFill>
-                      <a:srgbClr val="E7E8F8"/>
-                    </a:solidFill>
-                  </a:tcPr>
-                </a:tc>
-                <a:tc>
-                  <a:txBody>
-                    <a:bodyPr wrap="square"/>
-                    <a:lstStyle/>
-                    <a:p>
-                      <a:pPr algn="ctr">
-                        <a:lnSpc>
-                          <a:spcPct val="96000"/>
-                        </a:lnSpc>
-                      </a:pPr>
-                      <a:r>
-                        <a:rPr sz="880" b="0">
-                          <a:solidFill>
-                            <a:srgbClr val="232323"/>
-                          </a:solidFill>
-                        </a:rPr>
-                        <a:t>回避策あり</a:t>
-                      </a:r>
-                    </a:p>
-                  </a:txBody>
-                  <a:tcPr marL="50800" marR="50800" marT="12700" marB="12700" anchor="ctr">
-                    <a:solidFill>
-                      <a:srgbClr val="FFFFFF"/>
-                    </a:solidFill>
-                  </a:tcPr>
-                </a:tc>
-                <a:tc>
-                  <a:txBody>
-                    <a:bodyPr wrap="square"/>
-                    <a:lstStyle/>
-                    <a:p>
-                      <a:pPr algn="l">
-                        <a:lnSpc>
-                          <a:spcPct val="96000"/>
-                        </a:lnSpc>
-                      </a:pPr>
-                      <a:r>
-                        <a:rPr sz="880" b="0">
-                          <a:solidFill>
-                            <a:srgbClr val="232323"/>
-                          </a:solidFill>
-                        </a:rPr>
-                        <a:t>データ利用範囲・マスキングを確認</a:t>
-                      </a:r>
-                    </a:p>
-                  </a:txBody>
-                  <a:tcPr marL="50800" marR="50800" marT="12700" marB="12700" anchor="ctr">
-                    <a:solidFill>
-                      <a:srgbClr val="FFFFFF"/>
-                    </a:solidFill>
-                  </a:tcPr>
-                </a:tc>
-              </a:tr>
-              <a:tr h="274320">
-                <a:tc>
-                  <a:txBody>
-                    <a:bodyPr wrap="square"/>
-                    <a:lstStyle/>
-                    <a:p>
-                      <a:pPr algn="ctr">
-                        <a:lnSpc>
-                          <a:spcPct val="96000"/>
-                        </a:lnSpc>
-                      </a:pPr>
-                      <a:r>
-                        <a:rPr sz="919" b="1">
-                          <a:solidFill>
-                            <a:srgbClr val="1B5C80"/>
-                          </a:solidFill>
-                        </a:rPr>
-                        <a:t>チーム4</a:t>
-                      </a:r>
-                    </a:p>
-                  </a:txBody>
-                  <a:tcPr marL="50800" marR="50800" marT="12700" marB="12700" anchor="ctr">
-                    <a:solidFill>
-                      <a:srgbClr val="F8FDFA"/>
-                    </a:solidFill>
-                  </a:tcPr>
-                </a:tc>
-                <a:tc>
-                  <a:txBody>
-                    <a:bodyPr wrap="square"/>
-                    <a:lstStyle/>
-                    <a:p>
-                      <a:pPr algn="ctr">
-                        <a:lnSpc>
-                          <a:spcPct val="96000"/>
-                        </a:lnSpc>
-                      </a:pPr>
-                      <a:r>
-                        <a:rPr sz="919" b="1">
-                          <a:solidFill>
-                            <a:srgbClr val="232323"/>
-                          </a:solidFill>
-                        </a:rPr>
-                        <a:t>－</a:t>
-                      </a:r>
-                    </a:p>
-                  </a:txBody>
-                  <a:tcPr marL="50800" marR="50800" marT="12700" marB="12700" anchor="ctr">
-                    <a:solidFill>
-                      <a:srgbClr val="D0D4D7"/>
-                    </a:solidFill>
-                  </a:tcPr>
-                </a:tc>
-                <a:tc>
-                  <a:txBody>
-                    <a:bodyPr wrap="square"/>
-                    <a:lstStyle/>
-                    <a:p>
-                      <a:pPr algn="ctr">
-                        <a:lnSpc>
-                          <a:spcPct val="96000"/>
-                        </a:lnSpc>
-                      </a:pPr>
-                      <a:r>
-                        <a:rPr sz="880" b="1">
-                          <a:solidFill>
-                            <a:srgbClr val="232323"/>
-                          </a:solidFill>
-                        </a:rPr>
-                        <a:t>×</a:t>
-                      </a:r>
-                    </a:p>
-                  </a:txBody>
-                  <a:tcPr marL="50800" marR="50800" marT="12700" marB="12700" anchor="ctr">
-                    <a:solidFill>
-                      <a:srgbClr val="FAE5E3"/>
-                    </a:solidFill>
-                  </a:tcPr>
-                </a:tc>
-                <a:tc>
-                  <a:txBody>
-                    <a:bodyPr wrap="square"/>
-                    <a:lstStyle/>
-                    <a:p>
-                      <a:pPr algn="ctr">
-                        <a:lnSpc>
-                          <a:spcPct val="96000"/>
-                        </a:lnSpc>
-                      </a:pPr>
-                      <a:r>
-                        <a:rPr sz="880" b="0">
-                          <a:solidFill>
-                            <a:srgbClr val="232323"/>
-                          </a:solidFill>
-                        </a:rPr>
-                        <a:t>再設計</a:t>
-                      </a:r>
-                    </a:p>
-                  </a:txBody>
-                  <a:tcPr marL="50800" marR="50800" marT="12700" marB="12700" anchor="ctr">
-                    <a:solidFill>
-                      <a:srgbClr val="F8FDFA"/>
-                    </a:solidFill>
-                  </a:tcPr>
-                </a:tc>
-                <a:tc>
-                  <a:txBody>
-                    <a:bodyPr wrap="square"/>
-                    <a:lstStyle/>
-                    <a:p>
-                      <a:pPr algn="l">
-                        <a:lnSpc>
-                          <a:spcPct val="96000"/>
-                        </a:lnSpc>
-                      </a:pPr>
-                      <a:r>
-                        <a:rPr sz="880" b="0">
-                          <a:solidFill>
-                            <a:srgbClr val="232323"/>
-                          </a:solidFill>
-                        </a:rPr>
-                        <a:t>最優先フォロー（新案レビュー）</a:t>
-                      </a:r>
-                    </a:p>
-                  </a:txBody>
-                  <a:tcPr marL="50800" marR="50800" marT="12700" marB="12700" anchor="ctr">
-                    <a:solidFill>
-                      <a:srgbClr val="F8FDFA"/>
-                    </a:solidFill>
-                  </a:tcPr>
-                </a:tc>
-              </a:tr>
-              <a:tr h="274320">
-                <a:tc>
-                  <a:txBody>
-                    <a:bodyPr wrap="square"/>
-                    <a:lstStyle/>
-                    <a:p>
-                      <a:pPr algn="ctr">
-                        <a:lnSpc>
-                          <a:spcPct val="96000"/>
-                        </a:lnSpc>
-                      </a:pPr>
-                      <a:r>
-                        <a:rPr sz="919" b="1">
-                          <a:solidFill>
-                            <a:srgbClr val="1B5C80"/>
-                          </a:solidFill>
-                        </a:rPr>
-                        <a:t>チーム5</a:t>
-                      </a:r>
-                    </a:p>
-                  </a:txBody>
-                  <a:tcPr marL="50800" marR="50800" marT="12700" marB="12700" anchor="ctr">
-                    <a:solidFill>
-                      <a:srgbClr val="FFFFFF"/>
-                    </a:solidFill>
-                  </a:tcPr>
-                </a:tc>
-                <a:tc>
-                  <a:txBody>
-                    <a:bodyPr wrap="square"/>
-                    <a:lstStyle/>
-                    <a:p>
-                      <a:pPr algn="ctr">
-                        <a:lnSpc>
-                          <a:spcPct val="96000"/>
-                        </a:lnSpc>
-                      </a:pPr>
-                      <a:r>
-                        <a:rPr sz="919" b="1">
-                          <a:solidFill>
-                            <a:srgbClr val="232323"/>
-                          </a:solidFill>
-                        </a:rPr>
-                        <a:t>3</a:t>
-                      </a:r>
-                    </a:p>
-                  </a:txBody>
-                  <a:tcPr marL="50800" marR="50800" marT="12700" marB="12700" anchor="ctr">
-                    <a:solidFill>
-                      <a:srgbClr val="E7E8F8"/>
-                    </a:solidFill>
-                  </a:tcPr>
-                </a:tc>
-                <a:tc>
-                  <a:txBody>
-                    <a:bodyPr wrap="square"/>
-                    <a:lstStyle/>
-                    <a:p>
-                      <a:pPr algn="ctr">
-                        <a:lnSpc>
-                          <a:spcPct val="96000"/>
-                        </a:lnSpc>
-                      </a:pPr>
-                      <a:r>
-                        <a:rPr sz="880" b="1">
-                          <a:solidFill>
-                            <a:srgbClr val="232323"/>
-                          </a:solidFill>
-                        </a:rPr>
-                        <a:t>△回避可</a:t>
-                      </a:r>
-                    </a:p>
-                  </a:txBody>
-                  <a:tcPr marL="50800" marR="50800" marT="12700" marB="12700" anchor="ctr">
-                    <a:solidFill>
-                      <a:srgbClr val="E7E8F8"/>
-                    </a:solidFill>
-                  </a:tcPr>
-                </a:tc>
-                <a:tc>
-                  <a:txBody>
-                    <a:bodyPr wrap="square"/>
-                    <a:lstStyle/>
-                    <a:p>
-                      <a:pPr algn="ctr">
-                        <a:lnSpc>
-                          <a:spcPct val="96000"/>
-                        </a:lnSpc>
-                      </a:pPr>
-                      <a:r>
-                        <a:rPr sz="880" b="0">
-                          <a:solidFill>
-                            <a:srgbClr val="232323"/>
-                          </a:solidFill>
-                        </a:rPr>
-                        <a:t>回避策あり</a:t>
-                      </a:r>
-                    </a:p>
-                  </a:txBody>
-                  <a:tcPr marL="50800" marR="50800" marT="12700" marB="12700" anchor="ctr">
-                    <a:solidFill>
-                      <a:srgbClr val="FFFFFF"/>
-                    </a:solidFill>
-                  </a:tcPr>
-                </a:tc>
-                <a:tc>
-                  <a:txBody>
-                    <a:bodyPr wrap="square"/>
-                    <a:lstStyle/>
-                    <a:p>
-                      <a:pPr algn="l">
-                        <a:lnSpc>
-                          <a:spcPct val="96000"/>
-                        </a:lnSpc>
-                      </a:pPr>
-                      <a:r>
-                        <a:rPr sz="880" b="0">
-                          <a:solidFill>
-                            <a:srgbClr val="232323"/>
-                          </a:solidFill>
-                        </a:rPr>
-                        <a:t>起動方式を確認</a:t>
-                      </a:r>
-                    </a:p>
-                  </a:txBody>
-                  <a:tcPr marL="50800" marR="50800" marT="12700" marB="12700" anchor="ctr">
-                    <a:solidFill>
-                      <a:srgbClr val="FFFFFF"/>
-                    </a:solidFill>
-                  </a:tcPr>
-                </a:tc>
-              </a:tr>
-              <a:tr h="274320">
-                <a:tc>
-                  <a:txBody>
-                    <a:bodyPr wrap="square"/>
-                    <a:lstStyle/>
-                    <a:p>
-                      <a:pPr algn="ctr">
-                        <a:lnSpc>
-                          <a:spcPct val="96000"/>
-                        </a:lnSpc>
-                      </a:pPr>
-                      <a:r>
-                        <a:rPr sz="919" b="1">
-                          <a:solidFill>
-                            <a:srgbClr val="1B5C80"/>
-                          </a:solidFill>
-                        </a:rPr>
-                        <a:t>チーム6</a:t>
-                      </a:r>
-                    </a:p>
-                  </a:txBody>
-                  <a:tcPr marL="50800" marR="50800" marT="12700" marB="12700" anchor="ctr">
-                    <a:solidFill>
-                      <a:srgbClr val="F8FDFA"/>
-                    </a:solidFill>
-                  </a:tcPr>
-                </a:tc>
-                <a:tc>
-                  <a:txBody>
-                    <a:bodyPr wrap="square"/>
-                    <a:lstStyle/>
-                    <a:p>
-                      <a:pPr algn="ctr">
-                        <a:lnSpc>
-                          <a:spcPct val="96000"/>
-                        </a:lnSpc>
-                      </a:pPr>
-                      <a:r>
-                        <a:rPr sz="919" b="1">
-                          <a:solidFill>
-                            <a:srgbClr val="232323"/>
-                          </a:solidFill>
-                        </a:rPr>
-                        <a:t>4</a:t>
-                      </a:r>
-                    </a:p>
-                  </a:txBody>
-                  <a:tcPr marL="50800" marR="50800" marT="12700" marB="12700" anchor="ctr">
-                    <a:solidFill>
-                      <a:srgbClr val="FAE5E3"/>
-                    </a:solidFill>
-                  </a:tcPr>
-                </a:tc>
-                <a:tc>
-                  <a:txBody>
-                    <a:bodyPr wrap="square"/>
-                    <a:lstStyle/>
-                    <a:p>
-                      <a:pPr algn="ctr">
-                        <a:lnSpc>
-                          <a:spcPct val="96000"/>
-                        </a:lnSpc>
-                      </a:pPr>
-                      <a:r>
-                        <a:rPr sz="880" b="1">
-                          <a:solidFill>
-                            <a:srgbClr val="232323"/>
-                          </a:solidFill>
-                        </a:rPr>
-                        <a:t>△回避可</a:t>
-                      </a:r>
-                    </a:p>
-                  </a:txBody>
-                  <a:tcPr marL="50800" marR="50800" marT="12700" marB="12700" anchor="ctr">
-                    <a:solidFill>
-                      <a:srgbClr val="E7E8F8"/>
-                    </a:solidFill>
-                  </a:tcPr>
-                </a:tc>
-                <a:tc>
-                  <a:txBody>
-                    <a:bodyPr wrap="square"/>
-                    <a:lstStyle/>
-                    <a:p>
-                      <a:pPr algn="ctr">
-                        <a:lnSpc>
-                          <a:spcPct val="96000"/>
-                        </a:lnSpc>
-                      </a:pPr>
-                      <a:r>
-                        <a:rPr sz="880" b="0">
-                          <a:solidFill>
-                            <a:srgbClr val="232323"/>
-                          </a:solidFill>
-                        </a:rPr>
-                        <a:t>回避策あり</a:t>
-                      </a:r>
-                    </a:p>
-                  </a:txBody>
-                  <a:tcPr marL="50800" marR="50800" marT="12700" marB="12700" anchor="ctr">
-                    <a:solidFill>
-                      <a:srgbClr val="F8FDFA"/>
-                    </a:solidFill>
-                  </a:tcPr>
-                </a:tc>
-                <a:tc>
-                  <a:txBody>
-                    <a:bodyPr wrap="square"/>
-                    <a:lstStyle/>
-                    <a:p>
-                      <a:pPr algn="l">
-                        <a:lnSpc>
-                          <a:spcPct val="96000"/>
-                        </a:lnSpc>
-                      </a:pPr>
-                      <a:r>
-                        <a:rPr sz="880" b="0">
-                          <a:solidFill>
-                            <a:srgbClr val="232323"/>
-                          </a:solidFill>
-                        </a:rPr>
-                        <a:t>MVP範囲を絞る／保管方針</a:t>
-                      </a:r>
-                    </a:p>
-                  </a:txBody>
-                  <a:tcPr marL="50800" marR="50800" marT="12700" marB="12700" anchor="ctr">
-                    <a:solidFill>
-                      <a:srgbClr val="F8FDFA"/>
-                    </a:solidFill>
-                  </a:tcPr>
-                </a:tc>
-              </a:tr>
-            </a:tbl>
-          </a:graphicData>
-        </a:graphic>
-      </p:graphicFrame>
-      <p:graphicFrame>
-        <p:nvGraphicFramePr>
-          <p:cNvPr id="13" name="Table 12"/>
-          <p:cNvGraphicFramePr>
-            <a:graphicFrameLocks noGrp="1"/>
-          </p:cNvGraphicFramePr>
-          <p:nvPr/>
-        </p:nvGraphicFramePr>
-        <p:xfrm>
-          <a:off x="6153912" y="2048256"/>
-          <a:ext cx="5303520" cy="1645920"/>
-        </p:xfrm>
-        <a:graphic>
-          <a:graphicData uri="http://schemas.openxmlformats.org/drawingml/2006/table">
-            <a:tbl>
-              <a:tblPr>
-                <a:tableStyleId>{5C22544A-7EE6-4342-B048-85BDC9FD1C3A}</a:tableStyleId>
-              </a:tblPr>
-              <a:tblGrid>
-                <a:gridCol w="713232"/>
-                <a:gridCol w="475488"/>
-                <a:gridCol w="804672"/>
-                <a:gridCol w="969264"/>
-                <a:gridCol w="2340864"/>
-              </a:tblGrid>
-              <a:tr h="274320">
-                <a:tc>
-                  <a:txBody>
-                    <a:bodyPr wrap="square"/>
-                    <a:lstStyle/>
-                    <a:p>
-                      <a:pPr algn="ctr">
-                        <a:lnSpc>
-                          <a:spcPct val="96000"/>
-                        </a:lnSpc>
-                      </a:pPr>
-                      <a:r>
-                        <a:rPr sz="860" b="1">
-                          <a:solidFill>
-                            <a:srgbClr val="FFFFFF"/>
-                          </a:solidFill>
-                        </a:rPr>
-                        <a:t>チーム</a:t>
-                      </a:r>
-                    </a:p>
-                  </a:txBody>
-                  <a:tcPr marL="50800" marR="50800" marT="12700" marB="12700" anchor="ctr">
-                    <a:solidFill>
-                      <a:srgbClr val="1B5C80"/>
-                    </a:solidFill>
-                  </a:tcPr>
-                </a:tc>
-                <a:tc>
-                  <a:txBody>
-                    <a:bodyPr wrap="square"/>
-                    <a:lstStyle/>
-                    <a:p>
-                      <a:pPr algn="ctr">
-                        <a:lnSpc>
-                          <a:spcPct val="96000"/>
-                        </a:lnSpc>
-                      </a:pPr>
-                      <a:r>
-                        <a:rPr sz="860" b="1">
-                          <a:solidFill>
-                            <a:srgbClr val="FFFFFF"/>
-                          </a:solidFill>
-                        </a:rPr>
-                        <a:t>難易</a:t>
-                      </a:r>
-                    </a:p>
-                    <a:p>
-                      <a:pPr algn="ctr">
-                        <a:lnSpc>
-                          <a:spcPct val="96000"/>
-                        </a:lnSpc>
-                      </a:pPr>
-                      <a:r>
-                        <a:rPr sz="860" b="1">
-                          <a:solidFill>
-                            <a:srgbClr val="FFFFFF"/>
-                          </a:solidFill>
-                        </a:rPr>
-                        <a:t>度</a:t>
-                      </a:r>
-                    </a:p>
-                  </a:txBody>
-                  <a:tcPr marL="50800" marR="50800" marT="12700" marB="12700" anchor="ctr">
-                    <a:solidFill>
-                      <a:srgbClr val="1B5C80"/>
-                    </a:solidFill>
-                  </a:tcPr>
-                </a:tc>
-                <a:tc>
-                  <a:txBody>
-                    <a:bodyPr wrap="square"/>
-                    <a:lstStyle/>
-                    <a:p>
-                      <a:pPr algn="ctr">
-                        <a:lnSpc>
-                          <a:spcPct val="96000"/>
-                        </a:lnSpc>
-                      </a:pPr>
-                      <a:r>
-                        <a:rPr sz="860" b="1">
-                          <a:solidFill>
-                            <a:srgbClr val="FFFFFF"/>
-                          </a:solidFill>
-                        </a:rPr>
-                        <a:t>適合性</a:t>
-                      </a:r>
-                    </a:p>
-                  </a:txBody>
-                  <a:tcPr marL="50800" marR="50800" marT="12700" marB="12700" anchor="ctr">
-                    <a:solidFill>
-                      <a:srgbClr val="1B5C80"/>
-                    </a:solidFill>
-                  </a:tcPr>
-                </a:tc>
-                <a:tc>
-                  <a:txBody>
-                    <a:bodyPr wrap="square"/>
-                    <a:lstStyle/>
-                    <a:p>
-                      <a:pPr algn="ctr">
-                        <a:lnSpc>
-                          <a:spcPct val="96000"/>
-                        </a:lnSpc>
-                      </a:pPr>
-                      <a:r>
-                        <a:rPr sz="860" b="1">
-                          <a:solidFill>
-                            <a:srgbClr val="FFFFFF"/>
-                          </a:solidFill>
-                        </a:rPr>
-                        <a:t>状態</a:t>
-                      </a:r>
-                    </a:p>
-                  </a:txBody>
-                  <a:tcPr marL="50800" marR="50800" marT="12700" marB="12700" anchor="ctr">
-                    <a:solidFill>
-                      <a:srgbClr val="1B5C80"/>
-                    </a:solidFill>
-                  </a:tcPr>
-                </a:tc>
-                <a:tc>
-                  <a:txBody>
-                    <a:bodyPr wrap="square"/>
-                    <a:lstStyle/>
-                    <a:p>
-                      <a:pPr algn="ctr">
-                        <a:lnSpc>
-                          <a:spcPct val="96000"/>
-                        </a:lnSpc>
-                      </a:pPr>
-                      <a:r>
-                        <a:rPr sz="860" b="1">
-                          <a:solidFill>
-                            <a:srgbClr val="FFFFFF"/>
-                          </a:solidFill>
-                        </a:rPr>
-                        <a:t>事務局視点</a:t>
-                      </a:r>
-                    </a:p>
-                  </a:txBody>
-                  <a:tcPr marL="50800" marR="50800" marT="12700" marB="12700" anchor="ctr">
-                    <a:solidFill>
-                      <a:srgbClr val="1B5C80"/>
-                    </a:solidFill>
-                  </a:tcPr>
-                </a:tc>
-              </a:tr>
-              <a:tr h="274320">
-                <a:tc>
-                  <a:txBody>
-                    <a:bodyPr wrap="square"/>
-                    <a:lstStyle/>
-                    <a:p>
-                      <a:pPr algn="ctr">
-                        <a:lnSpc>
-                          <a:spcPct val="96000"/>
-                        </a:lnSpc>
-                      </a:pPr>
-                      <a:r>
-                        <a:rPr sz="919" b="1">
-                          <a:solidFill>
-                            <a:srgbClr val="1B5C80"/>
-                          </a:solidFill>
-                        </a:rPr>
-                        <a:t>チーム7</a:t>
-                      </a:r>
-                    </a:p>
-                  </a:txBody>
-                  <a:tcPr marL="50800" marR="50800" marT="12700" marB="12700" anchor="ctr">
-                    <a:solidFill>
-                      <a:srgbClr val="FFFFFF"/>
-                    </a:solidFill>
-                  </a:tcPr>
-                </a:tc>
-                <a:tc>
-                  <a:txBody>
-                    <a:bodyPr wrap="square"/>
-                    <a:lstStyle/>
-                    <a:p>
-                      <a:pPr algn="ctr">
-                        <a:lnSpc>
-                          <a:spcPct val="96000"/>
-                        </a:lnSpc>
-                      </a:pPr>
-                      <a:r>
-                        <a:rPr sz="919" b="1">
-                          <a:solidFill>
-                            <a:srgbClr val="232323"/>
-                          </a:solidFill>
-                        </a:rPr>
-                        <a:t>3</a:t>
-                      </a:r>
-                    </a:p>
-                  </a:txBody>
-                  <a:tcPr marL="50800" marR="50800" marT="12700" marB="12700" anchor="ctr">
-                    <a:solidFill>
-                      <a:srgbClr val="E7E8F8"/>
-                    </a:solidFill>
-                  </a:tcPr>
-                </a:tc>
-                <a:tc>
-                  <a:txBody>
-                    <a:bodyPr wrap="square"/>
-                    <a:lstStyle/>
-                    <a:p>
-                      <a:pPr algn="ctr">
-                        <a:lnSpc>
-                          <a:spcPct val="96000"/>
-                        </a:lnSpc>
-                      </a:pPr>
-                      <a:r>
-                        <a:rPr sz="880" b="1">
-                          <a:solidFill>
-                            <a:srgbClr val="232323"/>
-                          </a:solidFill>
-                        </a:rPr>
-                        <a:t>○</a:t>
-                      </a:r>
-                    </a:p>
-                  </a:txBody>
-                  <a:tcPr marL="50800" marR="50800" marT="12700" marB="12700" anchor="ctr">
-                    <a:solidFill>
-                      <a:srgbClr val="DBF1F7"/>
-                    </a:solidFill>
-                  </a:tcPr>
-                </a:tc>
-                <a:tc>
-                  <a:txBody>
-                    <a:bodyPr wrap="square"/>
-                    <a:lstStyle/>
-                    <a:p>
-                      <a:pPr algn="ctr">
-                        <a:lnSpc>
-                          <a:spcPct val="96000"/>
-                        </a:lnSpc>
-                      </a:pPr>
-                      <a:r>
-                        <a:rPr sz="880" b="0">
-                          <a:solidFill>
-                            <a:srgbClr val="232323"/>
-                          </a:solidFill>
-                        </a:rPr>
-                        <a:t>進行可</a:t>
-                      </a:r>
-                    </a:p>
-                  </a:txBody>
-                  <a:tcPr marL="50800" marR="50800" marT="12700" marB="12700" anchor="ctr">
-                    <a:solidFill>
-                      <a:srgbClr val="FFFFFF"/>
-                    </a:solidFill>
-                  </a:tcPr>
-                </a:tc>
-                <a:tc>
-                  <a:txBody>
-                    <a:bodyPr wrap="square"/>
-                    <a:lstStyle/>
-                    <a:p>
-                      <a:pPr algn="l">
-                        <a:lnSpc>
-                          <a:spcPct val="96000"/>
-                        </a:lnSpc>
-                      </a:pPr>
-                      <a:r>
-                        <a:rPr sz="880" b="0">
-                          <a:solidFill>
-                            <a:srgbClr val="232323"/>
-                          </a:solidFill>
-                        </a:rPr>
-                        <a:t>伴走のみ</a:t>
-                      </a:r>
-                    </a:p>
-                  </a:txBody>
-                  <a:tcPr marL="50800" marR="50800" marT="12700" marB="12700" anchor="ctr">
-                    <a:solidFill>
-                      <a:srgbClr val="FFFFFF"/>
-                    </a:solidFill>
-                  </a:tcPr>
-                </a:tc>
-              </a:tr>
-              <a:tr h="274320">
-                <a:tc>
-                  <a:txBody>
-                    <a:bodyPr wrap="square"/>
-                    <a:lstStyle/>
-                    <a:p>
-                      <a:pPr algn="ctr">
-                        <a:lnSpc>
-                          <a:spcPct val="96000"/>
-                        </a:lnSpc>
-                      </a:pPr>
-                      <a:r>
-                        <a:rPr sz="919" b="1">
-                          <a:solidFill>
-                            <a:srgbClr val="1B5C80"/>
-                          </a:solidFill>
-                        </a:rPr>
-                        <a:t>チーム8</a:t>
-                      </a:r>
-                    </a:p>
-                  </a:txBody>
-                  <a:tcPr marL="50800" marR="50800" marT="12700" marB="12700" anchor="ctr">
-                    <a:solidFill>
-                      <a:srgbClr val="FAE5E3"/>
-                    </a:solidFill>
-                  </a:tcPr>
-                </a:tc>
-                <a:tc>
-                  <a:txBody>
-                    <a:bodyPr wrap="square"/>
-                    <a:lstStyle/>
-                    <a:p>
-                      <a:pPr algn="ctr">
-                        <a:lnSpc>
-                          <a:spcPct val="96000"/>
-                        </a:lnSpc>
-                      </a:pPr>
-                      <a:r>
-                        <a:rPr sz="919" b="1">
-                          <a:solidFill>
-                            <a:srgbClr val="232323"/>
-                          </a:solidFill>
-                        </a:rPr>
-                        <a:t>4</a:t>
-                      </a:r>
-                    </a:p>
-                  </a:txBody>
-                  <a:tcPr marL="50800" marR="50800" marT="12700" marB="12700" anchor="ctr">
-                    <a:solidFill>
-                      <a:srgbClr val="FAE5E3"/>
-                    </a:solidFill>
-                  </a:tcPr>
-                </a:tc>
-                <a:tc>
-                  <a:txBody>
-                    <a:bodyPr wrap="square"/>
-                    <a:lstStyle/>
-                    <a:p>
-                      <a:pPr algn="ctr">
-                        <a:lnSpc>
-                          <a:spcPct val="96000"/>
-                        </a:lnSpc>
-                      </a:pPr>
-                      <a:r>
-                        <a:rPr sz="880" b="1">
-                          <a:solidFill>
-                            <a:srgbClr val="232323"/>
-                          </a:solidFill>
-                        </a:rPr>
-                        <a:t>△確認要</a:t>
-                      </a:r>
-                    </a:p>
-                  </a:txBody>
-                  <a:tcPr marL="50800" marR="50800" marT="12700" marB="12700" anchor="ctr">
-                    <a:solidFill>
-                      <a:srgbClr val="FAE5E3"/>
-                    </a:solidFill>
-                  </a:tcPr>
-                </a:tc>
-                <a:tc>
-                  <a:txBody>
-                    <a:bodyPr wrap="square"/>
-                    <a:lstStyle/>
-                    <a:p>
-                      <a:pPr algn="ctr">
-                        <a:lnSpc>
-                          <a:spcPct val="96000"/>
-                        </a:lnSpc>
-                      </a:pPr>
-                      <a:r>
-                        <a:rPr sz="880" b="1">
-                          <a:solidFill>
-                            <a:srgbClr val="232323"/>
-                          </a:solidFill>
-                        </a:rPr>
-                        <a:t>事務局判断待ち</a:t>
-                      </a:r>
-                    </a:p>
-                  </a:txBody>
-                  <a:tcPr marL="50800" marR="50800" marT="12700" marB="12700" anchor="ctr">
-                    <a:solidFill>
-                      <a:srgbClr val="FAE5E3"/>
-                    </a:solidFill>
-                  </a:tcPr>
-                </a:tc>
-                <a:tc>
-                  <a:txBody>
-                    <a:bodyPr wrap="square"/>
-                    <a:lstStyle/>
-                    <a:p>
-                      <a:pPr algn="l">
-                        <a:lnSpc>
-                          <a:spcPct val="96000"/>
-                        </a:lnSpc>
-                      </a:pPr>
-                      <a:r>
-                        <a:rPr sz="880" b="1">
-                          <a:solidFill>
-                            <a:srgbClr val="232323"/>
-                          </a:solidFill>
-                        </a:rPr>
-                        <a:t>個人情報・権限の判断</a:t>
-                      </a:r>
-                    </a:p>
-                  </a:txBody>
-                  <a:tcPr marL="50800" marR="50800" marT="12700" marB="12700" anchor="ctr">
-                    <a:solidFill>
-                      <a:srgbClr val="FAE5E3"/>
-                    </a:solidFill>
-                  </a:tcPr>
-                </a:tc>
-              </a:tr>
-              <a:tr h="274320">
-                <a:tc>
-                  <a:txBody>
-                    <a:bodyPr wrap="square"/>
-                    <a:lstStyle/>
-                    <a:p>
-                      <a:pPr algn="ctr">
-                        <a:lnSpc>
-                          <a:spcPct val="96000"/>
-                        </a:lnSpc>
-                      </a:pPr>
-                      <a:r>
-                        <a:rPr sz="919" b="1">
-                          <a:solidFill>
-                            <a:srgbClr val="1B5C80"/>
-                          </a:solidFill>
-                        </a:rPr>
-                        <a:t>チーム9</a:t>
-                      </a:r>
-                    </a:p>
-                  </a:txBody>
-                  <a:tcPr marL="50800" marR="50800" marT="12700" marB="12700" anchor="ctr">
-                    <a:solidFill>
-                      <a:srgbClr val="FFFFFF"/>
-                    </a:solidFill>
-                  </a:tcPr>
-                </a:tc>
-                <a:tc>
-                  <a:txBody>
-                    <a:bodyPr wrap="square"/>
-                    <a:lstStyle/>
-                    <a:p>
-                      <a:pPr algn="ctr">
-                        <a:lnSpc>
-                          <a:spcPct val="96000"/>
-                        </a:lnSpc>
-                      </a:pPr>
-                      <a:r>
-                        <a:rPr sz="919" b="1">
-                          <a:solidFill>
-                            <a:srgbClr val="232323"/>
-                          </a:solidFill>
-                        </a:rPr>
-                        <a:t>4</a:t>
-                      </a:r>
-                    </a:p>
-                  </a:txBody>
-                  <a:tcPr marL="50800" marR="50800" marT="12700" marB="12700" anchor="ctr">
-                    <a:solidFill>
-                      <a:srgbClr val="FAE5E3"/>
-                    </a:solidFill>
-                  </a:tcPr>
-                </a:tc>
-                <a:tc>
-                  <a:txBody>
-                    <a:bodyPr wrap="square"/>
-                    <a:lstStyle/>
-                    <a:p>
-                      <a:pPr algn="ctr">
-                        <a:lnSpc>
-                          <a:spcPct val="96000"/>
-                        </a:lnSpc>
-                      </a:pPr>
-                      <a:r>
-                        <a:rPr sz="880" b="1">
-                          <a:solidFill>
-                            <a:srgbClr val="232323"/>
-                          </a:solidFill>
-                        </a:rPr>
-                        <a:t>△回避可</a:t>
-                      </a:r>
-                    </a:p>
-                  </a:txBody>
-                  <a:tcPr marL="50800" marR="50800" marT="12700" marB="12700" anchor="ctr">
-                    <a:solidFill>
-                      <a:srgbClr val="E7E8F8"/>
-                    </a:solidFill>
-                  </a:tcPr>
-                </a:tc>
-                <a:tc>
-                  <a:txBody>
-                    <a:bodyPr wrap="square"/>
-                    <a:lstStyle/>
-                    <a:p>
-                      <a:pPr algn="ctr">
-                        <a:lnSpc>
-                          <a:spcPct val="96000"/>
-                        </a:lnSpc>
-                      </a:pPr>
-                      <a:r>
-                        <a:rPr sz="880" b="0">
-                          <a:solidFill>
-                            <a:srgbClr val="232323"/>
-                          </a:solidFill>
-                        </a:rPr>
-                        <a:t>回避策あり</a:t>
-                      </a:r>
-                    </a:p>
-                  </a:txBody>
-                  <a:tcPr marL="50800" marR="50800" marT="12700" marB="12700" anchor="ctr">
-                    <a:solidFill>
-                      <a:srgbClr val="FFFFFF"/>
-                    </a:solidFill>
-                  </a:tcPr>
-                </a:tc>
-                <a:tc>
-                  <a:txBody>
-                    <a:bodyPr wrap="square"/>
-                    <a:lstStyle/>
-                    <a:p>
-                      <a:pPr algn="l">
-                        <a:lnSpc>
-                          <a:spcPct val="96000"/>
-                        </a:lnSpc>
-                      </a:pPr>
-                      <a:r>
-                        <a:rPr sz="880" b="0">
-                          <a:solidFill>
-                            <a:srgbClr val="232323"/>
-                          </a:solidFill>
-                        </a:rPr>
-                        <a:t>メール送信条件を確認</a:t>
-                      </a:r>
-                    </a:p>
-                  </a:txBody>
-                  <a:tcPr marL="50800" marR="50800" marT="12700" marB="12700" anchor="ctr">
-                    <a:solidFill>
-                      <a:srgbClr val="FFFFFF"/>
-                    </a:solidFill>
-                  </a:tcPr>
-                </a:tc>
-              </a:tr>
-              <a:tr h="274320">
-                <a:tc>
-                  <a:txBody>
-                    <a:bodyPr wrap="square"/>
-                    <a:lstStyle/>
-                    <a:p>
-                      <a:pPr algn="ctr">
-                        <a:lnSpc>
-                          <a:spcPct val="96000"/>
-                        </a:lnSpc>
-                      </a:pPr>
-                      <a:r>
-                        <a:rPr sz="919" b="1">
-                          <a:solidFill>
-                            <a:srgbClr val="1B5C80"/>
-                          </a:solidFill>
-                        </a:rPr>
-                        <a:t>チーム10</a:t>
-                      </a:r>
-                    </a:p>
-                  </a:txBody>
-                  <a:tcPr marL="50800" marR="50800" marT="12700" marB="12700" anchor="ctr">
-                    <a:solidFill>
-                      <a:srgbClr val="F8FDFA"/>
-                    </a:solidFill>
-                  </a:tcPr>
-                </a:tc>
-                <a:tc>
-                  <a:txBody>
-                    <a:bodyPr wrap="square"/>
-                    <a:lstStyle/>
-                    <a:p>
-                      <a:pPr algn="ctr">
-                        <a:lnSpc>
-                          <a:spcPct val="96000"/>
-                        </a:lnSpc>
-                      </a:pPr>
-                      <a:r>
-                        <a:rPr sz="919" b="1">
-                          <a:solidFill>
-                            <a:srgbClr val="232323"/>
-                          </a:solidFill>
-                        </a:rPr>
-                        <a:t>3</a:t>
-                      </a:r>
-                    </a:p>
-                  </a:txBody>
-                  <a:tcPr marL="50800" marR="50800" marT="12700" marB="12700" anchor="ctr">
-                    <a:solidFill>
-                      <a:srgbClr val="E7E8F8"/>
-                    </a:solidFill>
-                  </a:tcPr>
-                </a:tc>
-                <a:tc>
-                  <a:txBody>
-                    <a:bodyPr wrap="square"/>
-                    <a:lstStyle/>
-                    <a:p>
-                      <a:pPr algn="ctr">
-                        <a:lnSpc>
-                          <a:spcPct val="96000"/>
-                        </a:lnSpc>
-                      </a:pPr>
-                      <a:r>
-                        <a:rPr sz="880" b="1">
-                          <a:solidFill>
-                            <a:srgbClr val="232323"/>
-                          </a:solidFill>
-                        </a:rPr>
-                        <a:t>○</a:t>
-                      </a:r>
-                    </a:p>
-                  </a:txBody>
-                  <a:tcPr marL="50800" marR="50800" marT="12700" marB="12700" anchor="ctr">
-                    <a:solidFill>
-                      <a:srgbClr val="DBF1F7"/>
-                    </a:solidFill>
-                  </a:tcPr>
-                </a:tc>
-                <a:tc>
-                  <a:txBody>
-                    <a:bodyPr wrap="square"/>
-                    <a:lstStyle/>
-                    <a:p>
-                      <a:pPr algn="ctr">
-                        <a:lnSpc>
-                          <a:spcPct val="96000"/>
-                        </a:lnSpc>
-                      </a:pPr>
-                      <a:r>
-                        <a:rPr sz="880" b="0">
-                          <a:solidFill>
-                            <a:srgbClr val="232323"/>
-                          </a:solidFill>
-                        </a:rPr>
-                        <a:t>進行可</a:t>
-                      </a:r>
-                    </a:p>
-                  </a:txBody>
-                  <a:tcPr marL="50800" marR="50800" marT="12700" marB="12700" anchor="ctr">
-                    <a:solidFill>
-                      <a:srgbClr val="F8FDFA"/>
-                    </a:solidFill>
-                  </a:tcPr>
-                </a:tc>
-                <a:tc>
-                  <a:txBody>
-                    <a:bodyPr wrap="square"/>
-                    <a:lstStyle/>
-                    <a:p>
-                      <a:pPr algn="l">
-                        <a:lnSpc>
-                          <a:spcPct val="96000"/>
-                        </a:lnSpc>
-                      </a:pPr>
-                      <a:r>
-                        <a:rPr sz="880" b="0">
-                          <a:solidFill>
-                            <a:srgbClr val="232323"/>
-                          </a:solidFill>
-                        </a:rPr>
-                        <a:t>伴走のみ</a:t>
-                      </a:r>
-                    </a:p>
-                  </a:txBody>
-                  <a:tcPr marL="50800" marR="50800" marT="12700" marB="12700" anchor="ctr">
-                    <a:solidFill>
-                      <a:srgbClr val="F8FDFA"/>
-                    </a:solidFill>
-                  </a:tcPr>
-                </a:tc>
-              </a:tr>
-              <a:tr h="274320">
-                <a:tc>
-                  <a:txBody>
-                    <a:bodyPr wrap="square"/>
-                    <a:lstStyle/>
-                    <a:p>
-                      <a:pPr algn="ctr">
-                        <a:lnSpc>
-                          <a:spcPct val="96000"/>
-                        </a:lnSpc>
-                      </a:pPr>
-                      <a:r>
-                        <a:rPr sz="919" b="1">
-                          <a:solidFill>
-                            <a:srgbClr val="1B5C80"/>
-                          </a:solidFill>
-                        </a:rPr>
-                        <a:t>チーム11</a:t>
-                      </a:r>
-                    </a:p>
-                  </a:txBody>
-                  <a:tcPr marL="50800" marR="50800" marT="12700" marB="12700" anchor="ctr">
-                    <a:solidFill>
-                      <a:srgbClr val="FFFFFF"/>
-                    </a:solidFill>
-                  </a:tcPr>
-                </a:tc>
-                <a:tc>
-                  <a:txBody>
-                    <a:bodyPr wrap="square"/>
-                    <a:lstStyle/>
-                    <a:p>
-                      <a:pPr algn="ctr">
-                        <a:lnSpc>
-                          <a:spcPct val="96000"/>
-                        </a:lnSpc>
-                      </a:pPr>
-                      <a:r>
-                        <a:rPr sz="919" b="1">
-                          <a:solidFill>
-                            <a:srgbClr val="232323"/>
-                          </a:solidFill>
-                        </a:rPr>
-                        <a:t>3</a:t>
-                      </a:r>
-                    </a:p>
-                  </a:txBody>
-                  <a:tcPr marL="50800" marR="50800" marT="12700" marB="12700" anchor="ctr">
-                    <a:solidFill>
-                      <a:srgbClr val="E7E8F8"/>
-                    </a:solidFill>
-                  </a:tcPr>
-                </a:tc>
-                <a:tc>
-                  <a:txBody>
-                    <a:bodyPr wrap="square"/>
-                    <a:lstStyle/>
-                    <a:p>
-                      <a:pPr algn="ctr">
-                        <a:lnSpc>
-                          <a:spcPct val="96000"/>
-                        </a:lnSpc>
-                      </a:pPr>
-                      <a:r>
-                        <a:rPr sz="880" b="1">
-                          <a:solidFill>
-                            <a:srgbClr val="232323"/>
-                          </a:solidFill>
-                        </a:rPr>
-                        <a:t>○</a:t>
-                      </a:r>
-                    </a:p>
-                  </a:txBody>
-                  <a:tcPr marL="50800" marR="50800" marT="12700" marB="12700" anchor="ctr">
-                    <a:solidFill>
-                      <a:srgbClr val="DBF1F7"/>
-                    </a:solidFill>
-                  </a:tcPr>
-                </a:tc>
-                <a:tc>
-                  <a:txBody>
-                    <a:bodyPr wrap="square"/>
-                    <a:lstStyle/>
-                    <a:p>
-                      <a:pPr algn="ctr">
-                        <a:lnSpc>
-                          <a:spcPct val="96000"/>
-                        </a:lnSpc>
-                      </a:pPr>
-                      <a:r>
-                        <a:rPr sz="880" b="0">
-                          <a:solidFill>
-                            <a:srgbClr val="232323"/>
-                          </a:solidFill>
-                        </a:rPr>
-                        <a:t>進行可</a:t>
-                      </a:r>
-                    </a:p>
-                  </a:txBody>
-                  <a:tcPr marL="50800" marR="50800" marT="12700" marB="12700" anchor="ctr">
-                    <a:solidFill>
-                      <a:srgbClr val="FFFFFF"/>
-                    </a:solidFill>
-                  </a:tcPr>
-                </a:tc>
-                <a:tc>
-                  <a:txBody>
-                    <a:bodyPr wrap="square"/>
-                    <a:lstStyle/>
-                    <a:p>
-                      <a:pPr algn="l">
-                        <a:lnSpc>
-                          <a:spcPct val="96000"/>
-                        </a:lnSpc>
-                      </a:pPr>
-                      <a:r>
-                        <a:rPr sz="880" b="0">
-                          <a:solidFill>
-                            <a:srgbClr val="232323"/>
-                          </a:solidFill>
-                        </a:rPr>
-                        <a:t>伴走のみ</a:t>
-                      </a:r>
-                    </a:p>
-                  </a:txBody>
-                  <a:tcPr marL="50800" marR="50800" marT="12700" marB="12700" anchor="ctr">
-                    <a:solidFill>
-                      <a:srgbClr val="FFFFFF"/>
-                    </a:solidFill>
-                  </a:tcPr>
-                </a:tc>
-              </a:tr>
-            </a:tbl>
-          </a:graphicData>
-        </a:graphic>
-      </p:graphicFrame>
-      <p:sp>
-        <p:nvSpPr>
-          <p:cNvPr id="14" name="TextBox 13"/>
+              <a:t>難易度 × ガイドライン適合性の分布　－　難しさと制約論点は別の軸。事務局が見るべき位置を示す</a:t>
+            </a:r>
+          </a:p>
+        </p:txBody>
+      </p:sp>
+      <p:sp>
+        <p:nvSpPr>
+          <p:cNvPr id="12" name="TextBox 11"/>
           <p:cNvSpPr txBox="1"/>
           <p:nvPr/>
         </p:nvSpPr>
         <p:spPr>
           <a:xfrm>
-            <a:off x="740664" y="4041648"/>
-            <a:ext cx="4206240" cy="402336"/>
+            <a:off x="740664" y="2048255"/>
+            <a:ext cx="1280160" cy="256032"/>
           </a:xfrm>
           <a:prstGeom prst="rect">
             <a:avLst/>
@@ -51779,18 +49975,100 @@
           </a:bodyPr>
           <a:lstStyle/>
           <a:p>
-            <a:pPr algn="l">
+            <a:pPr algn="ctr">
               <a:lnSpc>
                 <a:spcPct val="100000"/>
               </a:lnSpc>
             </a:pPr>
             <a:r>
-              <a:rPr sz="1270" b="1">
+              <a:rPr sz="860" b="1">
                 <a:solidFill>
                   <a:srgbClr val="1B5C80"/>
                 </a:solidFill>
               </a:rPr>
-              <a:t>重点フォロー対象：論点と回避可否</a:t>
+              <a:t>適合性＼難易度</a:t>
+            </a:r>
+          </a:p>
+        </p:txBody>
+      </p:sp>
+      <p:sp>
+        <p:nvSpPr>
+          <p:cNvPr id="13" name="Rectangle 12"/>
+          <p:cNvSpPr/>
+          <p:nvPr/>
+        </p:nvSpPr>
+        <p:spPr>
+          <a:xfrm>
+            <a:off x="2066544" y="2066543"/>
+            <a:ext cx="2304288" cy="256032"/>
+          </a:xfrm>
+          <a:prstGeom prst="rect">
+            <a:avLst/>
+          </a:prstGeom>
+          <a:solidFill>
+            <a:srgbClr val="1B5C80"/>
+          </a:solidFill>
+          <a:ln>
+            <a:noFill/>
+          </a:ln>
+          <a:effectLst/>
+        </p:spPr>
+        <p:style>
+          <a:lnRef idx="1">
+            <a:schemeClr val="accent1"/>
+          </a:lnRef>
+          <a:fillRef idx="3">
+            <a:schemeClr val="accent1"/>
+          </a:fillRef>
+          <a:effectRef idx="2">
+            <a:schemeClr val="accent1"/>
+          </a:effectRef>
+          <a:fontRef idx="minor">
+            <a:schemeClr val="lt1"/>
+          </a:fontRef>
+        </p:style>
+        <p:txBody>
+          <a:bodyPr rtlCol="0" anchor="ctr"/>
+          <a:lstStyle/>
+          <a:p>
+            <a:pPr algn="ctr"/>
+          </a:p>
+        </p:txBody>
+      </p:sp>
+      <p:sp>
+        <p:nvSpPr>
+          <p:cNvPr id="14" name="TextBox 13"/>
+          <p:cNvSpPr txBox="1"/>
+          <p:nvPr/>
+        </p:nvSpPr>
+        <p:spPr>
+          <a:xfrm>
+            <a:off x="2066544" y="2066543"/>
+            <a:ext cx="2304288" cy="256032"/>
+          </a:xfrm>
+          <a:prstGeom prst="rect">
+            <a:avLst/>
+          </a:prstGeom>
+          <a:noFill/>
+        </p:spPr>
+        <p:txBody>
+          <a:bodyPr wrap="square" anchor="ctr" lIns="25400" rIns="25400" tIns="12700" bIns="12700">
+            <a:spAutoFit/>
+          </a:bodyPr>
+          <a:lstStyle/>
+          <a:p>
+            <a:pPr algn="ctr">
+              <a:lnSpc>
+                <a:spcPct val="100000"/>
+              </a:lnSpc>
+            </a:pPr>
+            <a:r>
+              <a:rPr sz="950" b="1">
+                <a:solidFill>
+                  <a:srgbClr val="FFFFFF"/>
+                </a:solidFill>
+              </a:rPr>
+              <a:t>1〜2</a:t>
             </a:r>
           </a:p>
         </p:txBody>
@@ -51803,8 +50081,254 @@
         </p:nvSpPr>
         <p:spPr>
           <a:xfrm>
-            <a:off x="5038344" y="4023360"/>
-            <a:ext cx="7159752" cy="438912"/>
+            <a:off x="4407408" y="2066543"/>
+            <a:ext cx="2304288" cy="256032"/>
+          </a:xfrm>
+          <a:prstGeom prst="rect">
+            <a:avLst/>
+          </a:prstGeom>
+          <a:solidFill>
+            <a:srgbClr val="1B5C80"/>
+          </a:solidFill>
+          <a:ln>
+            <a:noFill/>
+          </a:ln>
+          <a:effectLst/>
+        </p:spPr>
+        <p:style>
+          <a:lnRef idx="1">
+            <a:schemeClr val="accent1"/>
+          </a:lnRef>
+          <a:fillRef idx="3">
+            <a:schemeClr val="accent1"/>
+          </a:fillRef>
+          <a:effectRef idx="2">
+            <a:schemeClr val="accent1"/>
+          </a:effectRef>
+          <a:fontRef idx="minor">
+            <a:schemeClr val="lt1"/>
+          </a:fontRef>
+        </p:style>
+        <p:txBody>
+          <a:bodyPr rtlCol="0" anchor="ctr"/>
+          <a:lstStyle/>
+          <a:p>
+            <a:pPr algn="ctr"/>
+          </a:p>
+        </p:txBody>
+      </p:sp>
+      <p:sp>
+        <p:nvSpPr>
+          <p:cNvPr id="16" name="TextBox 15"/>
+          <p:cNvSpPr txBox="1"/>
+          <p:nvPr/>
+        </p:nvSpPr>
+        <p:spPr>
+          <a:xfrm>
+            <a:off x="4407408" y="2066543"/>
+            <a:ext cx="2304288" cy="256032"/>
+          </a:xfrm>
+          <a:prstGeom prst="rect">
+            <a:avLst/>
+          </a:prstGeom>
+          <a:noFill/>
+        </p:spPr>
+        <p:txBody>
+          <a:bodyPr wrap="square" anchor="ctr" lIns="25400" rIns="25400" tIns="12700" bIns="12700">
+            <a:spAutoFit/>
+          </a:bodyPr>
+          <a:lstStyle/>
+          <a:p>
+            <a:pPr algn="ctr">
+              <a:lnSpc>
+                <a:spcPct val="100000"/>
+              </a:lnSpc>
+            </a:pPr>
+            <a:r>
+              <a:rPr sz="950" b="1">
+                <a:solidFill>
+                  <a:srgbClr val="FFFFFF"/>
+                </a:solidFill>
+              </a:rPr>
+              <a:t>3</a:t>
+            </a:r>
+          </a:p>
+        </p:txBody>
+      </p:sp>
+      <p:sp>
+        <p:nvSpPr>
+          <p:cNvPr id="17" name="Rectangle 16"/>
+          <p:cNvSpPr/>
+          <p:nvPr/>
+        </p:nvSpPr>
+        <p:spPr>
+          <a:xfrm>
+            <a:off x="6748272" y="2066543"/>
+            <a:ext cx="2304288" cy="256032"/>
+          </a:xfrm>
+          <a:prstGeom prst="rect">
+            <a:avLst/>
+          </a:prstGeom>
+          <a:solidFill>
+            <a:srgbClr val="1B5C80"/>
+          </a:solidFill>
+          <a:ln>
+            <a:noFill/>
+          </a:ln>
+          <a:effectLst/>
+        </p:spPr>
+        <p:style>
+          <a:lnRef idx="1">
+            <a:schemeClr val="accent1"/>
+          </a:lnRef>
+          <a:fillRef idx="3">
+            <a:schemeClr val="accent1"/>
+          </a:fillRef>
+          <a:effectRef idx="2">
+            <a:schemeClr val="accent1"/>
+          </a:effectRef>
+          <a:fontRef idx="minor">
+            <a:schemeClr val="lt1"/>
+          </a:fontRef>
+        </p:style>
+        <p:txBody>
+          <a:bodyPr rtlCol="0" anchor="ctr"/>
+          <a:lstStyle/>
+          <a:p>
+            <a:pPr algn="ctr"/>
+          </a:p>
+        </p:txBody>
+      </p:sp>
+      <p:sp>
+        <p:nvSpPr>
+          <p:cNvPr id="18" name="TextBox 17"/>
+          <p:cNvSpPr txBox="1"/>
+          <p:nvPr/>
+        </p:nvSpPr>
+        <p:spPr>
+          <a:xfrm>
+            <a:off x="6748272" y="2066543"/>
+            <a:ext cx="2304288" cy="256032"/>
+          </a:xfrm>
+          <a:prstGeom prst="rect">
+            <a:avLst/>
+          </a:prstGeom>
+          <a:noFill/>
+        </p:spPr>
+        <p:txBody>
+          <a:bodyPr wrap="square" anchor="ctr" lIns="25400" rIns="25400" tIns="12700" bIns="12700">
+            <a:spAutoFit/>
+          </a:bodyPr>
+          <a:lstStyle/>
+          <a:p>
+            <a:pPr algn="ctr">
+              <a:lnSpc>
+                <a:spcPct val="100000"/>
+              </a:lnSpc>
+            </a:pPr>
+            <a:r>
+              <a:rPr sz="950" b="1">
+                <a:solidFill>
+                  <a:srgbClr val="FFFFFF"/>
+                </a:solidFill>
+              </a:rPr>
+              <a:t>4</a:t>
+            </a:r>
+          </a:p>
+        </p:txBody>
+      </p:sp>
+      <p:sp>
+        <p:nvSpPr>
+          <p:cNvPr id="19" name="Rectangle 18"/>
+          <p:cNvSpPr/>
+          <p:nvPr/>
+        </p:nvSpPr>
+        <p:spPr>
+          <a:xfrm>
+            <a:off x="9089136" y="2066543"/>
+            <a:ext cx="2304288" cy="256032"/>
+          </a:xfrm>
+          <a:prstGeom prst="rect">
+            <a:avLst/>
+          </a:prstGeom>
+          <a:solidFill>
+            <a:srgbClr val="1B5C80"/>
+          </a:solidFill>
+          <a:ln>
+            <a:noFill/>
+          </a:ln>
+          <a:effectLst/>
+        </p:spPr>
+        <p:style>
+          <a:lnRef idx="1">
+            <a:schemeClr val="accent1"/>
+          </a:lnRef>
+          <a:fillRef idx="3">
+            <a:schemeClr val="accent1"/>
+          </a:fillRef>
+          <a:effectRef idx="2">
+            <a:schemeClr val="accent1"/>
+          </a:effectRef>
+          <a:fontRef idx="minor">
+            <a:schemeClr val="lt1"/>
+          </a:fontRef>
+        </p:style>
+        <p:txBody>
+          <a:bodyPr rtlCol="0" anchor="ctr"/>
+          <a:lstStyle/>
+          <a:p>
+            <a:pPr algn="ctr"/>
+          </a:p>
+        </p:txBody>
+      </p:sp>
+      <p:sp>
+        <p:nvSpPr>
+          <p:cNvPr id="20" name="TextBox 19"/>
+          <p:cNvSpPr txBox="1"/>
+          <p:nvPr/>
+        </p:nvSpPr>
+        <p:spPr>
+          <a:xfrm>
+            <a:off x="9089136" y="2066543"/>
+            <a:ext cx="2304288" cy="256032"/>
+          </a:xfrm>
+          <a:prstGeom prst="rect">
+            <a:avLst/>
+          </a:prstGeom>
+          <a:noFill/>
+        </p:spPr>
+        <p:txBody>
+          <a:bodyPr wrap="square" anchor="ctr" lIns="25400" rIns="25400" tIns="12700" bIns="12700">
+            <a:spAutoFit/>
+          </a:bodyPr>
+          <a:lstStyle/>
+          <a:p>
+            <a:pPr algn="ctr">
+              <a:lnSpc>
+                <a:spcPct val="100000"/>
+              </a:lnSpc>
+            </a:pPr>
+            <a:r>
+              <a:rPr sz="950" b="1">
+                <a:solidFill>
+                  <a:srgbClr val="FFFFFF"/>
+                </a:solidFill>
+              </a:rPr>
+              <a:t>－</a:t>
+            </a:r>
+          </a:p>
+        </p:txBody>
+      </p:sp>
+      <p:sp>
+        <p:nvSpPr>
+          <p:cNvPr id="21" name="Rectangle 20"/>
+          <p:cNvSpPr/>
+          <p:nvPr/>
+        </p:nvSpPr>
+        <p:spPr>
+          <a:xfrm>
+            <a:off x="740664" y="2340863"/>
+            <a:ext cx="1280160" cy="347472"/>
           </a:xfrm>
           <a:prstGeom prst="rect">
             <a:avLst/>
@@ -51841,14 +50365,1372 @@
       </p:sp>
       <p:sp>
         <p:nvSpPr>
-          <p:cNvPr id="16" name="TextBox 15"/>
+          <p:cNvPr id="22" name="TextBox 21"/>
           <p:cNvSpPr txBox="1"/>
           <p:nvPr/>
         </p:nvSpPr>
         <p:spPr>
           <a:xfrm>
-            <a:off x="5184648" y="4023360"/>
-            <a:ext cx="6903720" cy="438912"/>
+            <a:off x="740664" y="2340863"/>
+            <a:ext cx="1280160" cy="347472"/>
+          </a:xfrm>
+          <a:prstGeom prst="rect">
+            <a:avLst/>
+          </a:prstGeom>
+          <a:noFill/>
+        </p:spPr>
+        <p:txBody>
+          <a:bodyPr wrap="square" anchor="ctr" lIns="25400" rIns="25400" tIns="12700" bIns="12700">
+            <a:spAutoFit/>
+          </a:bodyPr>
+          <a:lstStyle/>
+          <a:p>
+            <a:pPr algn="ctr">
+              <a:lnSpc>
+                <a:spcPct val="105000"/>
+              </a:lnSpc>
+            </a:pPr>
+            <a:r>
+              <a:rPr sz="860" b="1">
+                <a:solidFill>
+                  <a:srgbClr val="232323"/>
+                </a:solidFill>
+              </a:rPr>
+              <a:t>○</a:t>
+            </a:r>
+          </a:p>
+          <a:p>
+            <a:pPr algn="ctr">
+              <a:lnSpc>
+                <a:spcPct val="105000"/>
+              </a:lnSpc>
+            </a:pPr>
+            <a:r>
+              <a:rPr sz="860" b="1">
+                <a:solidFill>
+                  <a:srgbClr val="232323"/>
+                </a:solidFill>
+              </a:rPr>
+              <a:t>伴走のみ</a:t>
+            </a:r>
+          </a:p>
+        </p:txBody>
+      </p:sp>
+      <p:sp>
+        <p:nvSpPr>
+          <p:cNvPr id="23" name="Rectangle 22"/>
+          <p:cNvSpPr/>
+          <p:nvPr/>
+        </p:nvSpPr>
+        <p:spPr>
+          <a:xfrm>
+            <a:off x="2066544" y="2340863"/>
+            <a:ext cx="2304288" cy="347472"/>
+          </a:xfrm>
+          <a:prstGeom prst="rect">
+            <a:avLst/>
+          </a:prstGeom>
+          <a:solidFill>
+            <a:srgbClr val="F8FDFA"/>
+          </a:solidFill>
+          <a:ln>
+            <a:noFill/>
+          </a:ln>
+          <a:effectLst/>
+        </p:spPr>
+        <p:style>
+          <a:lnRef idx="1">
+            <a:schemeClr val="accent1"/>
+          </a:lnRef>
+          <a:fillRef idx="3">
+            <a:schemeClr val="accent1"/>
+          </a:fillRef>
+          <a:effectRef idx="2">
+            <a:schemeClr val="accent1"/>
+          </a:effectRef>
+          <a:fontRef idx="minor">
+            <a:schemeClr val="lt1"/>
+          </a:fontRef>
+        </p:style>
+        <p:txBody>
+          <a:bodyPr rtlCol="0" anchor="ctr"/>
+          <a:lstStyle/>
+          <a:p>
+            <a:pPr algn="ctr"/>
+          </a:p>
+        </p:txBody>
+      </p:sp>
+      <p:sp>
+        <p:nvSpPr>
+          <p:cNvPr id="24" name="Rectangle 23"/>
+          <p:cNvSpPr/>
+          <p:nvPr/>
+        </p:nvSpPr>
+        <p:spPr>
+          <a:xfrm>
+            <a:off x="4407408" y="2340863"/>
+            <a:ext cx="2304288" cy="347472"/>
+          </a:xfrm>
+          <a:prstGeom prst="rect">
+            <a:avLst/>
+          </a:prstGeom>
+          <a:solidFill>
+            <a:srgbClr val="DBF1F7"/>
+          </a:solidFill>
+          <a:ln>
+            <a:noFill/>
+          </a:ln>
+          <a:effectLst/>
+        </p:spPr>
+        <p:style>
+          <a:lnRef idx="1">
+            <a:schemeClr val="accent1"/>
+          </a:lnRef>
+          <a:fillRef idx="3">
+            <a:schemeClr val="accent1"/>
+          </a:fillRef>
+          <a:effectRef idx="2">
+            <a:schemeClr val="accent1"/>
+          </a:effectRef>
+          <a:fontRef idx="minor">
+            <a:schemeClr val="lt1"/>
+          </a:fontRef>
+        </p:style>
+        <p:txBody>
+          <a:bodyPr rtlCol="0" anchor="ctr"/>
+          <a:lstStyle/>
+          <a:p>
+            <a:pPr algn="ctr"/>
+          </a:p>
+        </p:txBody>
+      </p:sp>
+      <p:sp>
+        <p:nvSpPr>
+          <p:cNvPr id="25" name="TextBox 24"/>
+          <p:cNvSpPr txBox="1"/>
+          <p:nvPr/>
+        </p:nvSpPr>
+        <p:spPr>
+          <a:xfrm>
+            <a:off x="4407408" y="2340863"/>
+            <a:ext cx="2304288" cy="347472"/>
+          </a:xfrm>
+          <a:prstGeom prst="rect">
+            <a:avLst/>
+          </a:prstGeom>
+          <a:noFill/>
+        </p:spPr>
+        <p:txBody>
+          <a:bodyPr wrap="square" anchor="ctr" lIns="25400" rIns="25400" tIns="12700" bIns="12700">
+            <a:spAutoFit/>
+          </a:bodyPr>
+          <a:lstStyle/>
+          <a:p>
+            <a:pPr algn="ctr">
+              <a:lnSpc>
+                <a:spcPct val="100000"/>
+              </a:lnSpc>
+            </a:pPr>
+            <a:r>
+              <a:rPr sz="1089" b="1">
+                <a:solidFill>
+                  <a:srgbClr val="1B5C80"/>
+                </a:solidFill>
+              </a:rPr>
+              <a:t>チーム1・2・7・10・11</a:t>
+            </a:r>
+          </a:p>
+        </p:txBody>
+      </p:sp>
+      <p:sp>
+        <p:nvSpPr>
+          <p:cNvPr id="26" name="Rectangle 25"/>
+          <p:cNvSpPr/>
+          <p:nvPr/>
+        </p:nvSpPr>
+        <p:spPr>
+          <a:xfrm>
+            <a:off x="6748272" y="2340863"/>
+            <a:ext cx="2304288" cy="347472"/>
+          </a:xfrm>
+          <a:prstGeom prst="rect">
+            <a:avLst/>
+          </a:prstGeom>
+          <a:solidFill>
+            <a:srgbClr val="F8FDFA"/>
+          </a:solidFill>
+          <a:ln>
+            <a:noFill/>
+          </a:ln>
+          <a:effectLst/>
+        </p:spPr>
+        <p:style>
+          <a:lnRef idx="1">
+            <a:schemeClr val="accent1"/>
+          </a:lnRef>
+          <a:fillRef idx="3">
+            <a:schemeClr val="accent1"/>
+          </a:fillRef>
+          <a:effectRef idx="2">
+            <a:schemeClr val="accent1"/>
+          </a:effectRef>
+          <a:fontRef idx="minor">
+            <a:schemeClr val="lt1"/>
+          </a:fontRef>
+        </p:style>
+        <p:txBody>
+          <a:bodyPr rtlCol="0" anchor="ctr"/>
+          <a:lstStyle/>
+          <a:p>
+            <a:pPr algn="ctr"/>
+          </a:p>
+        </p:txBody>
+      </p:sp>
+      <p:sp>
+        <p:nvSpPr>
+          <p:cNvPr id="27" name="Rectangle 26"/>
+          <p:cNvSpPr/>
+          <p:nvPr/>
+        </p:nvSpPr>
+        <p:spPr>
+          <a:xfrm>
+            <a:off x="9089136" y="2340863"/>
+            <a:ext cx="2304288" cy="347472"/>
+          </a:xfrm>
+          <a:prstGeom prst="rect">
+            <a:avLst/>
+          </a:prstGeom>
+          <a:solidFill>
+            <a:srgbClr val="F8FDFA"/>
+          </a:solidFill>
+          <a:ln>
+            <a:noFill/>
+          </a:ln>
+          <a:effectLst/>
+        </p:spPr>
+        <p:style>
+          <a:lnRef idx="1">
+            <a:schemeClr val="accent1"/>
+          </a:lnRef>
+          <a:fillRef idx="3">
+            <a:schemeClr val="accent1"/>
+          </a:fillRef>
+          <a:effectRef idx="2">
+            <a:schemeClr val="accent1"/>
+          </a:effectRef>
+          <a:fontRef idx="minor">
+            <a:schemeClr val="lt1"/>
+          </a:fontRef>
+        </p:style>
+        <p:txBody>
+          <a:bodyPr rtlCol="0" anchor="ctr"/>
+          <a:lstStyle/>
+          <a:p>
+            <a:pPr algn="ctr"/>
+          </a:p>
+        </p:txBody>
+      </p:sp>
+      <p:sp>
+        <p:nvSpPr>
+          <p:cNvPr id="28" name="Rectangle 27"/>
+          <p:cNvSpPr/>
+          <p:nvPr/>
+        </p:nvSpPr>
+        <p:spPr>
+          <a:xfrm>
+            <a:off x="740664" y="2706623"/>
+            <a:ext cx="1280160" cy="347472"/>
+          </a:xfrm>
+          <a:prstGeom prst="rect">
+            <a:avLst/>
+          </a:prstGeom>
+          <a:solidFill>
+            <a:srgbClr val="E7E8F8"/>
+          </a:solidFill>
+          <a:ln>
+            <a:noFill/>
+          </a:ln>
+          <a:effectLst/>
+        </p:spPr>
+        <p:style>
+          <a:lnRef idx="1">
+            <a:schemeClr val="accent1"/>
+          </a:lnRef>
+          <a:fillRef idx="3">
+            <a:schemeClr val="accent1"/>
+          </a:fillRef>
+          <a:effectRef idx="2">
+            <a:schemeClr val="accent1"/>
+          </a:effectRef>
+          <a:fontRef idx="minor">
+            <a:schemeClr val="lt1"/>
+          </a:fontRef>
+        </p:style>
+        <p:txBody>
+          <a:bodyPr rtlCol="0" anchor="ctr"/>
+          <a:lstStyle/>
+          <a:p>
+            <a:pPr algn="ctr"/>
+          </a:p>
+        </p:txBody>
+      </p:sp>
+      <p:sp>
+        <p:nvSpPr>
+          <p:cNvPr id="29" name="TextBox 28"/>
+          <p:cNvSpPr txBox="1"/>
+          <p:nvPr/>
+        </p:nvSpPr>
+        <p:spPr>
+          <a:xfrm>
+            <a:off x="740664" y="2706623"/>
+            <a:ext cx="1280160" cy="347472"/>
+          </a:xfrm>
+          <a:prstGeom prst="rect">
+            <a:avLst/>
+          </a:prstGeom>
+          <a:noFill/>
+        </p:spPr>
+        <p:txBody>
+          <a:bodyPr wrap="square" anchor="ctr" lIns="25400" rIns="25400" tIns="12700" bIns="12700">
+            <a:spAutoFit/>
+          </a:bodyPr>
+          <a:lstStyle/>
+          <a:p>
+            <a:pPr algn="ctr">
+              <a:lnSpc>
+                <a:spcPct val="105000"/>
+              </a:lnSpc>
+            </a:pPr>
+            <a:r>
+              <a:rPr sz="860" b="1">
+                <a:solidFill>
+                  <a:srgbClr val="232323"/>
+                </a:solidFill>
+              </a:rPr>
+              <a:t>△回避可</a:t>
+            </a:r>
+          </a:p>
+          <a:p>
+            <a:pPr algn="ctr">
+              <a:lnSpc>
+                <a:spcPct val="105000"/>
+              </a:lnSpc>
+            </a:pPr>
+            <a:r>
+              <a:rPr sz="860" b="1">
+                <a:solidFill>
+                  <a:srgbClr val="232323"/>
+                </a:solidFill>
+              </a:rPr>
+              <a:t>チーム側で進行</a:t>
+            </a:r>
+          </a:p>
+        </p:txBody>
+      </p:sp>
+      <p:sp>
+        <p:nvSpPr>
+          <p:cNvPr id="30" name="Rectangle 29"/>
+          <p:cNvSpPr/>
+          <p:nvPr/>
+        </p:nvSpPr>
+        <p:spPr>
+          <a:xfrm>
+            <a:off x="2066544" y="2706623"/>
+            <a:ext cx="2304288" cy="347472"/>
+          </a:xfrm>
+          <a:prstGeom prst="rect">
+            <a:avLst/>
+          </a:prstGeom>
+          <a:solidFill>
+            <a:srgbClr val="F8FDFA"/>
+          </a:solidFill>
+          <a:ln>
+            <a:noFill/>
+          </a:ln>
+          <a:effectLst/>
+        </p:spPr>
+        <p:style>
+          <a:lnRef idx="1">
+            <a:schemeClr val="accent1"/>
+          </a:lnRef>
+          <a:fillRef idx="3">
+            <a:schemeClr val="accent1"/>
+          </a:fillRef>
+          <a:effectRef idx="2">
+            <a:schemeClr val="accent1"/>
+          </a:effectRef>
+          <a:fontRef idx="minor">
+            <a:schemeClr val="lt1"/>
+          </a:fontRef>
+        </p:style>
+        <p:txBody>
+          <a:bodyPr rtlCol="0" anchor="ctr"/>
+          <a:lstStyle/>
+          <a:p>
+            <a:pPr algn="ctr"/>
+          </a:p>
+        </p:txBody>
+      </p:sp>
+      <p:sp>
+        <p:nvSpPr>
+          <p:cNvPr id="31" name="Rectangle 30"/>
+          <p:cNvSpPr/>
+          <p:nvPr/>
+        </p:nvSpPr>
+        <p:spPr>
+          <a:xfrm>
+            <a:off x="4407408" y="2706623"/>
+            <a:ext cx="2304288" cy="347472"/>
+          </a:xfrm>
+          <a:prstGeom prst="rect">
+            <a:avLst/>
+          </a:prstGeom>
+          <a:solidFill>
+            <a:srgbClr val="E7E8F8"/>
+          </a:solidFill>
+          <a:ln>
+            <a:noFill/>
+          </a:ln>
+          <a:effectLst/>
+        </p:spPr>
+        <p:style>
+          <a:lnRef idx="1">
+            <a:schemeClr val="accent1"/>
+          </a:lnRef>
+          <a:fillRef idx="3">
+            <a:schemeClr val="accent1"/>
+          </a:fillRef>
+          <a:effectRef idx="2">
+            <a:schemeClr val="accent1"/>
+          </a:effectRef>
+          <a:fontRef idx="minor">
+            <a:schemeClr val="lt1"/>
+          </a:fontRef>
+        </p:style>
+        <p:txBody>
+          <a:bodyPr rtlCol="0" anchor="ctr"/>
+          <a:lstStyle/>
+          <a:p>
+            <a:pPr algn="ctr"/>
+          </a:p>
+        </p:txBody>
+      </p:sp>
+      <p:sp>
+        <p:nvSpPr>
+          <p:cNvPr id="32" name="TextBox 31"/>
+          <p:cNvSpPr txBox="1"/>
+          <p:nvPr/>
+        </p:nvSpPr>
+        <p:spPr>
+          <a:xfrm>
+            <a:off x="4407408" y="2706623"/>
+            <a:ext cx="2304288" cy="347472"/>
+          </a:xfrm>
+          <a:prstGeom prst="rect">
+            <a:avLst/>
+          </a:prstGeom>
+          <a:noFill/>
+        </p:spPr>
+        <p:txBody>
+          <a:bodyPr wrap="square" anchor="ctr" lIns="25400" rIns="25400" tIns="12700" bIns="12700">
+            <a:spAutoFit/>
+          </a:bodyPr>
+          <a:lstStyle/>
+          <a:p>
+            <a:pPr algn="ctr">
+              <a:lnSpc>
+                <a:spcPct val="100000"/>
+              </a:lnSpc>
+            </a:pPr>
+            <a:r>
+              <a:rPr sz="1089" b="1">
+                <a:solidFill>
+                  <a:srgbClr val="1B5C80"/>
+                </a:solidFill>
+              </a:rPr>
+              <a:t>チーム5</a:t>
+            </a:r>
+          </a:p>
+        </p:txBody>
+      </p:sp>
+      <p:sp>
+        <p:nvSpPr>
+          <p:cNvPr id="33" name="Rectangle 32"/>
+          <p:cNvSpPr/>
+          <p:nvPr/>
+        </p:nvSpPr>
+        <p:spPr>
+          <a:xfrm>
+            <a:off x="6748272" y="2706623"/>
+            <a:ext cx="2304288" cy="347472"/>
+          </a:xfrm>
+          <a:prstGeom prst="rect">
+            <a:avLst/>
+          </a:prstGeom>
+          <a:solidFill>
+            <a:srgbClr val="E7E8F8"/>
+          </a:solidFill>
+          <a:ln>
+            <a:noFill/>
+          </a:ln>
+          <a:effectLst/>
+        </p:spPr>
+        <p:style>
+          <a:lnRef idx="1">
+            <a:schemeClr val="accent1"/>
+          </a:lnRef>
+          <a:fillRef idx="3">
+            <a:schemeClr val="accent1"/>
+          </a:fillRef>
+          <a:effectRef idx="2">
+            <a:schemeClr val="accent1"/>
+          </a:effectRef>
+          <a:fontRef idx="minor">
+            <a:schemeClr val="lt1"/>
+          </a:fontRef>
+        </p:style>
+        <p:txBody>
+          <a:bodyPr rtlCol="0" anchor="ctr"/>
+          <a:lstStyle/>
+          <a:p>
+            <a:pPr algn="ctr"/>
+          </a:p>
+        </p:txBody>
+      </p:sp>
+      <p:sp>
+        <p:nvSpPr>
+          <p:cNvPr id="34" name="TextBox 33"/>
+          <p:cNvSpPr txBox="1"/>
+          <p:nvPr/>
+        </p:nvSpPr>
+        <p:spPr>
+          <a:xfrm>
+            <a:off x="6748272" y="2706623"/>
+            <a:ext cx="2304288" cy="347472"/>
+          </a:xfrm>
+          <a:prstGeom prst="rect">
+            <a:avLst/>
+          </a:prstGeom>
+          <a:noFill/>
+        </p:spPr>
+        <p:txBody>
+          <a:bodyPr wrap="square" anchor="ctr" lIns="25400" rIns="25400" tIns="12700" bIns="12700">
+            <a:spAutoFit/>
+          </a:bodyPr>
+          <a:lstStyle/>
+          <a:p>
+            <a:pPr algn="ctr">
+              <a:lnSpc>
+                <a:spcPct val="100000"/>
+              </a:lnSpc>
+            </a:pPr>
+            <a:r>
+              <a:rPr sz="1089" b="1">
+                <a:solidFill>
+                  <a:srgbClr val="1B5C80"/>
+                </a:solidFill>
+              </a:rPr>
+              <a:t>チーム3・6・9</a:t>
+            </a:r>
+          </a:p>
+        </p:txBody>
+      </p:sp>
+      <p:sp>
+        <p:nvSpPr>
+          <p:cNvPr id="35" name="Rectangle 34"/>
+          <p:cNvSpPr/>
+          <p:nvPr/>
+        </p:nvSpPr>
+        <p:spPr>
+          <a:xfrm>
+            <a:off x="9089136" y="2706623"/>
+            <a:ext cx="2304288" cy="347472"/>
+          </a:xfrm>
+          <a:prstGeom prst="rect">
+            <a:avLst/>
+          </a:prstGeom>
+          <a:solidFill>
+            <a:srgbClr val="F8FDFA"/>
+          </a:solidFill>
+          <a:ln>
+            <a:noFill/>
+          </a:ln>
+          <a:effectLst/>
+        </p:spPr>
+        <p:style>
+          <a:lnRef idx="1">
+            <a:schemeClr val="accent1"/>
+          </a:lnRef>
+          <a:fillRef idx="3">
+            <a:schemeClr val="accent1"/>
+          </a:fillRef>
+          <a:effectRef idx="2">
+            <a:schemeClr val="accent1"/>
+          </a:effectRef>
+          <a:fontRef idx="minor">
+            <a:schemeClr val="lt1"/>
+          </a:fontRef>
+        </p:style>
+        <p:txBody>
+          <a:bodyPr rtlCol="0" anchor="ctr"/>
+          <a:lstStyle/>
+          <a:p>
+            <a:pPr algn="ctr"/>
+          </a:p>
+        </p:txBody>
+      </p:sp>
+      <p:sp>
+        <p:nvSpPr>
+          <p:cNvPr id="36" name="Rectangle 35"/>
+          <p:cNvSpPr/>
+          <p:nvPr/>
+        </p:nvSpPr>
+        <p:spPr>
+          <a:xfrm>
+            <a:off x="740664" y="3072383"/>
+            <a:ext cx="1280160" cy="347472"/>
+          </a:xfrm>
+          <a:prstGeom prst="rect">
+            <a:avLst/>
+          </a:prstGeom>
+          <a:solidFill>
+            <a:srgbClr val="FAE5E3"/>
+          </a:solidFill>
+          <a:ln>
+            <a:noFill/>
+          </a:ln>
+          <a:effectLst/>
+        </p:spPr>
+        <p:style>
+          <a:lnRef idx="1">
+            <a:schemeClr val="accent1"/>
+          </a:lnRef>
+          <a:fillRef idx="3">
+            <a:schemeClr val="accent1"/>
+          </a:fillRef>
+          <a:effectRef idx="2">
+            <a:schemeClr val="accent1"/>
+          </a:effectRef>
+          <a:fontRef idx="minor">
+            <a:schemeClr val="lt1"/>
+          </a:fontRef>
+        </p:style>
+        <p:txBody>
+          <a:bodyPr rtlCol="0" anchor="ctr"/>
+          <a:lstStyle/>
+          <a:p>
+            <a:pPr algn="ctr"/>
+          </a:p>
+        </p:txBody>
+      </p:sp>
+      <p:sp>
+        <p:nvSpPr>
+          <p:cNvPr id="37" name="TextBox 36"/>
+          <p:cNvSpPr txBox="1"/>
+          <p:nvPr/>
+        </p:nvSpPr>
+        <p:spPr>
+          <a:xfrm>
+            <a:off x="740664" y="3072383"/>
+            <a:ext cx="1280160" cy="347472"/>
+          </a:xfrm>
+          <a:prstGeom prst="rect">
+            <a:avLst/>
+          </a:prstGeom>
+          <a:noFill/>
+        </p:spPr>
+        <p:txBody>
+          <a:bodyPr wrap="square" anchor="ctr" lIns="25400" rIns="25400" tIns="12700" bIns="12700">
+            <a:spAutoFit/>
+          </a:bodyPr>
+          <a:lstStyle/>
+          <a:p>
+            <a:pPr algn="ctr">
+              <a:lnSpc>
+                <a:spcPct val="105000"/>
+              </a:lnSpc>
+            </a:pPr>
+            <a:r>
+              <a:rPr sz="860" b="1">
+                <a:solidFill>
+                  <a:srgbClr val="232323"/>
+                </a:solidFill>
+              </a:rPr>
+              <a:t>△確認要</a:t>
+            </a:r>
+          </a:p>
+          <a:p>
+            <a:pPr algn="ctr">
+              <a:lnSpc>
+                <a:spcPct val="105000"/>
+              </a:lnSpc>
+            </a:pPr>
+            <a:r>
+              <a:rPr sz="860" b="1">
+                <a:solidFill>
+                  <a:srgbClr val="232323"/>
+                </a:solidFill>
+              </a:rPr>
+              <a:t>事務局判断が必要</a:t>
+            </a:r>
+          </a:p>
+        </p:txBody>
+      </p:sp>
+      <p:sp>
+        <p:nvSpPr>
+          <p:cNvPr id="38" name="Rectangle 37"/>
+          <p:cNvSpPr/>
+          <p:nvPr/>
+        </p:nvSpPr>
+        <p:spPr>
+          <a:xfrm>
+            <a:off x="2066544" y="3072383"/>
+            <a:ext cx="2304288" cy="347472"/>
+          </a:xfrm>
+          <a:prstGeom prst="rect">
+            <a:avLst/>
+          </a:prstGeom>
+          <a:solidFill>
+            <a:srgbClr val="F8FDFA"/>
+          </a:solidFill>
+          <a:ln>
+            <a:noFill/>
+          </a:ln>
+          <a:effectLst/>
+        </p:spPr>
+        <p:style>
+          <a:lnRef idx="1">
+            <a:schemeClr val="accent1"/>
+          </a:lnRef>
+          <a:fillRef idx="3">
+            <a:schemeClr val="accent1"/>
+          </a:fillRef>
+          <a:effectRef idx="2">
+            <a:schemeClr val="accent1"/>
+          </a:effectRef>
+          <a:fontRef idx="minor">
+            <a:schemeClr val="lt1"/>
+          </a:fontRef>
+        </p:style>
+        <p:txBody>
+          <a:bodyPr rtlCol="0" anchor="ctr"/>
+          <a:lstStyle/>
+          <a:p>
+            <a:pPr algn="ctr"/>
+          </a:p>
+        </p:txBody>
+      </p:sp>
+      <p:sp>
+        <p:nvSpPr>
+          <p:cNvPr id="39" name="Rectangle 38"/>
+          <p:cNvSpPr/>
+          <p:nvPr/>
+        </p:nvSpPr>
+        <p:spPr>
+          <a:xfrm>
+            <a:off x="4407408" y="3072383"/>
+            <a:ext cx="2304288" cy="347472"/>
+          </a:xfrm>
+          <a:prstGeom prst="rect">
+            <a:avLst/>
+          </a:prstGeom>
+          <a:solidFill>
+            <a:srgbClr val="F8FDFA"/>
+          </a:solidFill>
+          <a:ln>
+            <a:noFill/>
+          </a:ln>
+          <a:effectLst/>
+        </p:spPr>
+        <p:style>
+          <a:lnRef idx="1">
+            <a:schemeClr val="accent1"/>
+          </a:lnRef>
+          <a:fillRef idx="3">
+            <a:schemeClr val="accent1"/>
+          </a:fillRef>
+          <a:effectRef idx="2">
+            <a:schemeClr val="accent1"/>
+          </a:effectRef>
+          <a:fontRef idx="minor">
+            <a:schemeClr val="lt1"/>
+          </a:fontRef>
+        </p:style>
+        <p:txBody>
+          <a:bodyPr rtlCol="0" anchor="ctr"/>
+          <a:lstStyle/>
+          <a:p>
+            <a:pPr algn="ctr"/>
+          </a:p>
+        </p:txBody>
+      </p:sp>
+      <p:sp>
+        <p:nvSpPr>
+          <p:cNvPr id="40" name="Rectangle 39"/>
+          <p:cNvSpPr/>
+          <p:nvPr/>
+        </p:nvSpPr>
+        <p:spPr>
+          <a:xfrm>
+            <a:off x="6748272" y="3072383"/>
+            <a:ext cx="2304288" cy="347472"/>
+          </a:xfrm>
+          <a:prstGeom prst="rect">
+            <a:avLst/>
+          </a:prstGeom>
+          <a:solidFill>
+            <a:srgbClr val="FAE5E3"/>
+          </a:solidFill>
+          <a:ln>
+            <a:noFill/>
+          </a:ln>
+          <a:effectLst/>
+        </p:spPr>
+        <p:style>
+          <a:lnRef idx="1">
+            <a:schemeClr val="accent1"/>
+          </a:lnRef>
+          <a:fillRef idx="3">
+            <a:schemeClr val="accent1"/>
+          </a:fillRef>
+          <a:effectRef idx="2">
+            <a:schemeClr val="accent1"/>
+          </a:effectRef>
+          <a:fontRef idx="minor">
+            <a:schemeClr val="lt1"/>
+          </a:fontRef>
+        </p:style>
+        <p:txBody>
+          <a:bodyPr rtlCol="0" anchor="ctr"/>
+          <a:lstStyle/>
+          <a:p>
+            <a:pPr algn="ctr"/>
+          </a:p>
+        </p:txBody>
+      </p:sp>
+      <p:sp>
+        <p:nvSpPr>
+          <p:cNvPr id="41" name="TextBox 40"/>
+          <p:cNvSpPr txBox="1"/>
+          <p:nvPr/>
+        </p:nvSpPr>
+        <p:spPr>
+          <a:xfrm>
+            <a:off x="6748272" y="3072383"/>
+            <a:ext cx="2304288" cy="347472"/>
+          </a:xfrm>
+          <a:prstGeom prst="rect">
+            <a:avLst/>
+          </a:prstGeom>
+          <a:noFill/>
+        </p:spPr>
+        <p:txBody>
+          <a:bodyPr wrap="square" anchor="ctr" lIns="25400" rIns="25400" tIns="12700" bIns="12700">
+            <a:spAutoFit/>
+          </a:bodyPr>
+          <a:lstStyle/>
+          <a:p>
+            <a:pPr algn="ctr">
+              <a:lnSpc>
+                <a:spcPct val="100000"/>
+              </a:lnSpc>
+            </a:pPr>
+            <a:r>
+              <a:rPr sz="1089" b="1">
+                <a:solidFill>
+                  <a:srgbClr val="1B5C80"/>
+                </a:solidFill>
+              </a:rPr>
+              <a:t>チーム8</a:t>
+            </a:r>
+          </a:p>
+        </p:txBody>
+      </p:sp>
+      <p:sp>
+        <p:nvSpPr>
+          <p:cNvPr id="42" name="Rectangle 41"/>
+          <p:cNvSpPr/>
+          <p:nvPr/>
+        </p:nvSpPr>
+        <p:spPr>
+          <a:xfrm>
+            <a:off x="9089136" y="3072383"/>
+            <a:ext cx="2304288" cy="347472"/>
+          </a:xfrm>
+          <a:prstGeom prst="rect">
+            <a:avLst/>
+          </a:prstGeom>
+          <a:solidFill>
+            <a:srgbClr val="F8FDFA"/>
+          </a:solidFill>
+          <a:ln>
+            <a:noFill/>
+          </a:ln>
+          <a:effectLst/>
+        </p:spPr>
+        <p:style>
+          <a:lnRef idx="1">
+            <a:schemeClr val="accent1"/>
+          </a:lnRef>
+          <a:fillRef idx="3">
+            <a:schemeClr val="accent1"/>
+          </a:fillRef>
+          <a:effectRef idx="2">
+            <a:schemeClr val="accent1"/>
+          </a:effectRef>
+          <a:fontRef idx="minor">
+            <a:schemeClr val="lt1"/>
+          </a:fontRef>
+        </p:style>
+        <p:txBody>
+          <a:bodyPr rtlCol="0" anchor="ctr"/>
+          <a:lstStyle/>
+          <a:p>
+            <a:pPr algn="ctr"/>
+          </a:p>
+        </p:txBody>
+      </p:sp>
+      <p:sp>
+        <p:nvSpPr>
+          <p:cNvPr id="43" name="Rectangle 42"/>
+          <p:cNvSpPr/>
+          <p:nvPr/>
+        </p:nvSpPr>
+        <p:spPr>
+          <a:xfrm>
+            <a:off x="740664" y="3438143"/>
+            <a:ext cx="1280160" cy="347472"/>
+          </a:xfrm>
+          <a:prstGeom prst="rect">
+            <a:avLst/>
+          </a:prstGeom>
+          <a:solidFill>
+            <a:srgbClr val="FAE5E3"/>
+          </a:solidFill>
+          <a:ln>
+            <a:noFill/>
+          </a:ln>
+          <a:effectLst/>
+        </p:spPr>
+        <p:style>
+          <a:lnRef idx="1">
+            <a:schemeClr val="accent1"/>
+          </a:lnRef>
+          <a:fillRef idx="3">
+            <a:schemeClr val="accent1"/>
+          </a:fillRef>
+          <a:effectRef idx="2">
+            <a:schemeClr val="accent1"/>
+          </a:effectRef>
+          <a:fontRef idx="minor">
+            <a:schemeClr val="lt1"/>
+          </a:fontRef>
+        </p:style>
+        <p:txBody>
+          <a:bodyPr rtlCol="0" anchor="ctr"/>
+          <a:lstStyle/>
+          <a:p>
+            <a:pPr algn="ctr"/>
+          </a:p>
+        </p:txBody>
+      </p:sp>
+      <p:sp>
+        <p:nvSpPr>
+          <p:cNvPr id="44" name="TextBox 43"/>
+          <p:cNvSpPr txBox="1"/>
+          <p:nvPr/>
+        </p:nvSpPr>
+        <p:spPr>
+          <a:xfrm>
+            <a:off x="740664" y="3438143"/>
+            <a:ext cx="1280160" cy="347472"/>
+          </a:xfrm>
+          <a:prstGeom prst="rect">
+            <a:avLst/>
+          </a:prstGeom>
+          <a:noFill/>
+        </p:spPr>
+        <p:txBody>
+          <a:bodyPr wrap="square" anchor="ctr" lIns="25400" rIns="25400" tIns="12700" bIns="12700">
+            <a:spAutoFit/>
+          </a:bodyPr>
+          <a:lstStyle/>
+          <a:p>
+            <a:pPr algn="ctr">
+              <a:lnSpc>
+                <a:spcPct val="105000"/>
+              </a:lnSpc>
+            </a:pPr>
+            <a:r>
+              <a:rPr sz="860" b="1">
+                <a:solidFill>
+                  <a:srgbClr val="232323"/>
+                </a:solidFill>
+              </a:rPr>
+              <a:t>×</a:t>
+            </a:r>
+          </a:p>
+          <a:p>
+            <a:pPr algn="ctr">
+              <a:lnSpc>
+                <a:spcPct val="105000"/>
+              </a:lnSpc>
+            </a:pPr>
+            <a:r>
+              <a:rPr sz="860" b="1">
+                <a:solidFill>
+                  <a:srgbClr val="232323"/>
+                </a:solidFill>
+              </a:rPr>
+              <a:t>再設計</a:t>
+            </a:r>
+          </a:p>
+        </p:txBody>
+      </p:sp>
+      <p:sp>
+        <p:nvSpPr>
+          <p:cNvPr id="45" name="Rectangle 44"/>
+          <p:cNvSpPr/>
+          <p:nvPr/>
+        </p:nvSpPr>
+        <p:spPr>
+          <a:xfrm>
+            <a:off x="2066544" y="3438143"/>
+            <a:ext cx="2304288" cy="347472"/>
+          </a:xfrm>
+          <a:prstGeom prst="rect">
+            <a:avLst/>
+          </a:prstGeom>
+          <a:solidFill>
+            <a:srgbClr val="F8FDFA"/>
+          </a:solidFill>
+          <a:ln>
+            <a:noFill/>
+          </a:ln>
+          <a:effectLst/>
+        </p:spPr>
+        <p:style>
+          <a:lnRef idx="1">
+            <a:schemeClr val="accent1"/>
+          </a:lnRef>
+          <a:fillRef idx="3">
+            <a:schemeClr val="accent1"/>
+          </a:fillRef>
+          <a:effectRef idx="2">
+            <a:schemeClr val="accent1"/>
+          </a:effectRef>
+          <a:fontRef idx="minor">
+            <a:schemeClr val="lt1"/>
+          </a:fontRef>
+        </p:style>
+        <p:txBody>
+          <a:bodyPr rtlCol="0" anchor="ctr"/>
+          <a:lstStyle/>
+          <a:p>
+            <a:pPr algn="ctr"/>
+          </a:p>
+        </p:txBody>
+      </p:sp>
+      <p:sp>
+        <p:nvSpPr>
+          <p:cNvPr id="46" name="Rectangle 45"/>
+          <p:cNvSpPr/>
+          <p:nvPr/>
+        </p:nvSpPr>
+        <p:spPr>
+          <a:xfrm>
+            <a:off x="4407408" y="3438143"/>
+            <a:ext cx="2304288" cy="347472"/>
+          </a:xfrm>
+          <a:prstGeom prst="rect">
+            <a:avLst/>
+          </a:prstGeom>
+          <a:solidFill>
+            <a:srgbClr val="F8FDFA"/>
+          </a:solidFill>
+          <a:ln>
+            <a:noFill/>
+          </a:ln>
+          <a:effectLst/>
+        </p:spPr>
+        <p:style>
+          <a:lnRef idx="1">
+            <a:schemeClr val="accent1"/>
+          </a:lnRef>
+          <a:fillRef idx="3">
+            <a:schemeClr val="accent1"/>
+          </a:fillRef>
+          <a:effectRef idx="2">
+            <a:schemeClr val="accent1"/>
+          </a:effectRef>
+          <a:fontRef idx="minor">
+            <a:schemeClr val="lt1"/>
+          </a:fontRef>
+        </p:style>
+        <p:txBody>
+          <a:bodyPr rtlCol="0" anchor="ctr"/>
+          <a:lstStyle/>
+          <a:p>
+            <a:pPr algn="ctr"/>
+          </a:p>
+        </p:txBody>
+      </p:sp>
+      <p:sp>
+        <p:nvSpPr>
+          <p:cNvPr id="47" name="Rectangle 46"/>
+          <p:cNvSpPr/>
+          <p:nvPr/>
+        </p:nvSpPr>
+        <p:spPr>
+          <a:xfrm>
+            <a:off x="6748272" y="3438143"/>
+            <a:ext cx="2304288" cy="347472"/>
+          </a:xfrm>
+          <a:prstGeom prst="rect">
+            <a:avLst/>
+          </a:prstGeom>
+          <a:solidFill>
+            <a:srgbClr val="F8FDFA"/>
+          </a:solidFill>
+          <a:ln>
+            <a:noFill/>
+          </a:ln>
+          <a:effectLst/>
+        </p:spPr>
+        <p:style>
+          <a:lnRef idx="1">
+            <a:schemeClr val="accent1"/>
+          </a:lnRef>
+          <a:fillRef idx="3">
+            <a:schemeClr val="accent1"/>
+          </a:fillRef>
+          <a:effectRef idx="2">
+            <a:schemeClr val="accent1"/>
+          </a:effectRef>
+          <a:fontRef idx="minor">
+            <a:schemeClr val="lt1"/>
+          </a:fontRef>
+        </p:style>
+        <p:txBody>
+          <a:bodyPr rtlCol="0" anchor="ctr"/>
+          <a:lstStyle/>
+          <a:p>
+            <a:pPr algn="ctr"/>
+          </a:p>
+        </p:txBody>
+      </p:sp>
+      <p:sp>
+        <p:nvSpPr>
+          <p:cNvPr id="48" name="Rectangle 47"/>
+          <p:cNvSpPr/>
+          <p:nvPr/>
+        </p:nvSpPr>
+        <p:spPr>
+          <a:xfrm>
+            <a:off x="9089136" y="3438143"/>
+            <a:ext cx="2304288" cy="347472"/>
+          </a:xfrm>
+          <a:prstGeom prst="rect">
+            <a:avLst/>
+          </a:prstGeom>
+          <a:solidFill>
+            <a:srgbClr val="FAE5E3"/>
+          </a:solidFill>
+          <a:ln>
+            <a:noFill/>
+          </a:ln>
+          <a:effectLst/>
+        </p:spPr>
+        <p:style>
+          <a:lnRef idx="1">
+            <a:schemeClr val="accent1"/>
+          </a:lnRef>
+          <a:fillRef idx="3">
+            <a:schemeClr val="accent1"/>
+          </a:fillRef>
+          <a:effectRef idx="2">
+            <a:schemeClr val="accent1"/>
+          </a:effectRef>
+          <a:fontRef idx="minor">
+            <a:schemeClr val="lt1"/>
+          </a:fontRef>
+        </p:style>
+        <p:txBody>
+          <a:bodyPr rtlCol="0" anchor="ctr"/>
+          <a:lstStyle/>
+          <a:p>
+            <a:pPr algn="ctr"/>
+          </a:p>
+        </p:txBody>
+      </p:sp>
+      <p:sp>
+        <p:nvSpPr>
+          <p:cNvPr id="49" name="TextBox 48"/>
+          <p:cNvSpPr txBox="1"/>
+          <p:nvPr/>
+        </p:nvSpPr>
+        <p:spPr>
+          <a:xfrm>
+            <a:off x="9089136" y="3438143"/>
+            <a:ext cx="2304288" cy="347472"/>
+          </a:xfrm>
+          <a:prstGeom prst="rect">
+            <a:avLst/>
+          </a:prstGeom>
+          <a:noFill/>
+        </p:spPr>
+        <p:txBody>
+          <a:bodyPr wrap="square" anchor="ctr" lIns="25400" rIns="25400" tIns="12700" bIns="12700">
+            <a:spAutoFit/>
+          </a:bodyPr>
+          <a:lstStyle/>
+          <a:p>
+            <a:pPr algn="ctr">
+              <a:lnSpc>
+                <a:spcPct val="100000"/>
+              </a:lnSpc>
+            </a:pPr>
+            <a:r>
+              <a:rPr sz="1089" b="1">
+                <a:solidFill>
+                  <a:srgbClr val="1B5C80"/>
+                </a:solidFill>
+              </a:rPr>
+              <a:t>チーム4</a:t>
+            </a:r>
+          </a:p>
+        </p:txBody>
+      </p:sp>
+      <p:sp>
+        <p:nvSpPr>
+          <p:cNvPr id="50" name="TextBox 49"/>
+          <p:cNvSpPr txBox="1"/>
+          <p:nvPr/>
+        </p:nvSpPr>
+        <p:spPr>
+          <a:xfrm>
+            <a:off x="740664" y="3840480"/>
+            <a:ext cx="10716768" cy="201168"/>
+          </a:xfrm>
+          <a:prstGeom prst="rect">
+            <a:avLst/>
+          </a:prstGeom>
+          <a:noFill/>
+        </p:spPr>
+        <p:txBody>
+          <a:bodyPr wrap="square" anchor="t" lIns="25400" rIns="25400" tIns="12700" bIns="12700">
+            <a:spAutoFit/>
+          </a:bodyPr>
+          <a:lstStyle/>
+          <a:p>
+            <a:pPr algn="l">
+              <a:lnSpc>
+                <a:spcPct val="100000"/>
+              </a:lnSpc>
+            </a:pPr>
+            <a:r>
+              <a:rPr sz="900" b="0">
+                <a:solidFill>
+                  <a:srgbClr val="232323"/>
+                </a:solidFill>
+              </a:rPr>
+              <a:t>※ 5チームは制約論点なしで進行可。4チームは回避策があり、チーム側で進めながら整理できる。事務局判断が必要なのはチーム8、再設計はチーム4のみ（各チームの詳細はスライド5を参照）。</a:t>
+            </a:r>
+          </a:p>
+        </p:txBody>
+      </p:sp>
+      <p:sp>
+        <p:nvSpPr>
+          <p:cNvPr id="51" name="TextBox 50"/>
+          <p:cNvSpPr txBox="1"/>
+          <p:nvPr/>
+        </p:nvSpPr>
+        <p:spPr>
+          <a:xfrm>
+            <a:off x="740664" y="4114800"/>
+            <a:ext cx="4206240" cy="402336"/>
+          </a:xfrm>
+          <a:prstGeom prst="rect">
+            <a:avLst/>
+          </a:prstGeom>
+          <a:noFill/>
+        </p:spPr>
+        <p:txBody>
+          <a:bodyPr wrap="square" anchor="ctr" lIns="25400" rIns="25400" tIns="12700" bIns="12700">
+            <a:spAutoFit/>
+          </a:bodyPr>
+          <a:lstStyle/>
+          <a:p>
+            <a:pPr algn="l">
+              <a:lnSpc>
+                <a:spcPct val="100000"/>
+              </a:lnSpc>
+            </a:pPr>
+            <a:r>
+              <a:rPr sz="1270" b="1">
+                <a:solidFill>
+                  <a:srgbClr val="1B5C80"/>
+                </a:solidFill>
+              </a:rPr>
+              <a:t>重点フォロー対象：論点と回避可否</a:t>
+            </a:r>
+          </a:p>
+        </p:txBody>
+      </p:sp>
+      <p:sp>
+        <p:nvSpPr>
+          <p:cNvPr id="52" name="Rectangle 51"/>
+          <p:cNvSpPr/>
+          <p:nvPr/>
+        </p:nvSpPr>
+        <p:spPr>
+          <a:xfrm>
+            <a:off x="5038344" y="4096512"/>
+            <a:ext cx="7159752" cy="420624"/>
+          </a:xfrm>
+          <a:prstGeom prst="rect">
+            <a:avLst/>
+          </a:prstGeom>
+          <a:solidFill>
+            <a:srgbClr val="DBF1F7"/>
+          </a:solidFill>
+          <a:ln>
+            <a:noFill/>
+          </a:ln>
+          <a:effectLst/>
+        </p:spPr>
+        <p:style>
+          <a:lnRef idx="1">
+            <a:schemeClr val="accent1"/>
+          </a:lnRef>
+          <a:fillRef idx="3">
+            <a:schemeClr val="accent1"/>
+          </a:fillRef>
+          <a:effectRef idx="2">
+            <a:schemeClr val="accent1"/>
+          </a:effectRef>
+          <a:fontRef idx="minor">
+            <a:schemeClr val="lt1"/>
+          </a:fontRef>
+        </p:style>
+        <p:txBody>
+          <a:bodyPr rtlCol="0" anchor="ctr"/>
+          <a:lstStyle/>
+          <a:p>
+            <a:pPr algn="ctr"/>
+          </a:p>
+        </p:txBody>
+      </p:sp>
+      <p:sp>
+        <p:nvSpPr>
+          <p:cNvPr id="53" name="TextBox 52"/>
+          <p:cNvSpPr txBox="1"/>
+          <p:nvPr/>
+        </p:nvSpPr>
+        <p:spPr>
+          <a:xfrm>
+            <a:off x="5184648" y="4096512"/>
+            <a:ext cx="6903720" cy="420624"/>
           </a:xfrm>
           <a:prstGeom prst="rect">
             <a:avLst/>
@@ -51879,14 +51761,14 @@
       </p:sp>
       <p:graphicFrame>
         <p:nvGraphicFramePr>
-          <p:cNvPr id="17" name="Table 16"/>
+          <p:cNvPr id="54" name="Table 53"/>
           <p:cNvGraphicFramePr>
             <a:graphicFrameLocks noGrp="1"/>
           </p:cNvGraphicFramePr>
           <p:nvPr/>
         </p:nvGraphicFramePr>
         <p:xfrm>
-          <a:off x="740664" y="4535424"/>
+          <a:off x="740664" y="4572000"/>
           <a:ext cx="10716768" cy="1792224"/>
         </p:xfrm>
         <a:graphic>

--- a/reports/CopilotStudio_ハッカソン_事前相談会②_状況報告_20260729.pptx
+++ b/reports/CopilotStudio_ハッカソン_事前相談会②_状況報告_20260729.pptx
@@ -38302,15 +38302,23 @@
                     <a:bodyPr/>
                     <a:lstStyle/>
                     <a:p>
-                      <a:pPr algn="l">
+                      <a:pPr algn="ctr">
                         <a:lnSpc>
                           <a:spcPct val="96000"/>
                         </a:lnSpc>
                       </a:pPr>
+                      <a:r>
+                        <a:rPr sz="700" b="0">
+                          <a:solidFill>
+                            <a:srgbClr val="595959"/>
+                          </a:solidFill>
+                        </a:rPr>
+                        <a:t>MVP・入出力OK</a:t>
+                      </a:r>
                       <a:endParaRPr/>
                     </a:p>
                   </a:txBody>
-                  <a:tcPr marL="50800" marR="50800" marT="12700" marB="12700" anchor="ctr">
+                  <a:tcPr marL="50800" marR="50800" marT="12700" marB="12700" anchor="b">
                     <a:solidFill>
                       <a:srgbClr val="FFFFFF"/>
                     </a:solidFill>
@@ -38333,6 +38341,27 @@
                           </a:solidFill>
                         </a:rPr>
                         <a:t>A</a:t>
+                      </a:r>
+                    </a:p>
+                    <a:p>
+                      <a:pPr algn="ctr">
+                        <a:lnSpc>
+                          <a:spcPct val="96000"/>
+                        </a:lnSpc>
+                        <a:spcBef>
+                          <a:spcPts val="100"/>
+                        </a:spcBef>
+                        <a:spcAft>
+                          <a:spcPts val="0"/>
+                        </a:spcAft>
+                      </a:pPr>
+                      <a:r>
+                        <a:rPr sz="700" b="0">
+                          <a:solidFill>
+                            <a:srgbClr val="595959"/>
+                          </a:solidFill>
+                        </a:rPr>
+                        <a:t>見込み高い</a:t>
                       </a:r>
                     </a:p>
                   </a:txBody>
@@ -38359,6 +38388,27 @@
                           </a:solidFill>
                         </a:rPr>
                         <a:t>3</a:t>
+                      </a:r>
+                    </a:p>
+                    <a:p>
+                      <a:pPr algn="ctr">
+                        <a:lnSpc>
+                          <a:spcPct val="96000"/>
+                        </a:lnSpc>
+                        <a:spcBef>
+                          <a:spcPts val="100"/>
+                        </a:spcBef>
+                        <a:spcAft>
+                          <a:spcPts val="0"/>
+                        </a:spcAft>
+                      </a:pPr>
+                      <a:r>
+                        <a:rPr sz="700" b="0">
+                          <a:solidFill>
+                            <a:srgbClr val="595959"/>
+                          </a:solidFill>
+                        </a:rPr>
+                        <a:t>標準</a:t>
                       </a:r>
                     </a:p>
                   </a:txBody>
@@ -38484,15 +38534,23 @@
                     <a:bodyPr/>
                     <a:lstStyle/>
                     <a:p>
-                      <a:pPr algn="l">
+                      <a:pPr algn="ctr">
                         <a:lnSpc>
                           <a:spcPct val="96000"/>
                         </a:lnSpc>
                       </a:pPr>
+                      <a:r>
+                        <a:rPr sz="700" b="0">
+                          <a:solidFill>
+                            <a:srgbClr val="595959"/>
+                          </a:solidFill>
+                        </a:rPr>
+                        <a:t>MVP・入出力OK</a:t>
+                      </a:r>
                       <a:endParaRPr/>
                     </a:p>
                   </a:txBody>
-                  <a:tcPr marL="50800" marR="50800" marT="12700" marB="12700" anchor="ctr">
+                  <a:tcPr marL="50800" marR="50800" marT="12700" marB="12700" anchor="b">
                     <a:solidFill>
                       <a:srgbClr val="F8FDFA"/>
                     </a:solidFill>
@@ -38515,6 +38573,27 @@
                           </a:solidFill>
                         </a:rPr>
                         <a:t>A</a:t>
+                      </a:r>
+                    </a:p>
+                    <a:p>
+                      <a:pPr algn="ctr">
+                        <a:lnSpc>
+                          <a:spcPct val="96000"/>
+                        </a:lnSpc>
+                        <a:spcBef>
+                          <a:spcPts val="100"/>
+                        </a:spcBef>
+                        <a:spcAft>
+                          <a:spcPts val="0"/>
+                        </a:spcAft>
+                      </a:pPr>
+                      <a:r>
+                        <a:rPr sz="700" b="0">
+                          <a:solidFill>
+                            <a:srgbClr val="595959"/>
+                          </a:solidFill>
+                        </a:rPr>
+                        <a:t>見込み高い</a:t>
                       </a:r>
                     </a:p>
                   </a:txBody>
@@ -38541,6 +38620,27 @@
                           </a:solidFill>
                         </a:rPr>
                         <a:t>3</a:t>
+                      </a:r>
+                    </a:p>
+                    <a:p>
+                      <a:pPr algn="ctr">
+                        <a:lnSpc>
+                          <a:spcPct val="96000"/>
+                        </a:lnSpc>
+                        <a:spcBef>
+                          <a:spcPts val="100"/>
+                        </a:spcBef>
+                        <a:spcAft>
+                          <a:spcPts val="0"/>
+                        </a:spcAft>
+                      </a:pPr>
+                      <a:r>
+                        <a:rPr sz="700" b="0">
+                          <a:solidFill>
+                            <a:srgbClr val="595959"/>
+                          </a:solidFill>
+                        </a:rPr>
+                        <a:t>標準</a:t>
                       </a:r>
                     </a:p>
                   </a:txBody>
@@ -38666,15 +38766,23 @@
                     <a:bodyPr/>
                     <a:lstStyle/>
                     <a:p>
-                      <a:pPr algn="l">
+                      <a:pPr algn="ctr">
                         <a:lnSpc>
                           <a:spcPct val="96000"/>
                         </a:lnSpc>
                       </a:pPr>
+                      <a:r>
+                        <a:rPr sz="700" b="0">
+                          <a:solidFill>
+                            <a:srgbClr val="595959"/>
+                          </a:solidFill>
+                        </a:rPr>
+                        <a:t>MVP・入出力OK</a:t>
+                      </a:r>
                       <a:endParaRPr/>
                     </a:p>
                   </a:txBody>
-                  <a:tcPr marL="50800" marR="50800" marT="12700" marB="12700" anchor="ctr">
+                  <a:tcPr marL="50800" marR="50800" marT="12700" marB="12700" anchor="b">
                     <a:solidFill>
                       <a:srgbClr val="FFFFFF"/>
                     </a:solidFill>
@@ -38697,6 +38805,27 @@
                           </a:solidFill>
                         </a:rPr>
                         <a:t>B</a:t>
+                      </a:r>
+                    </a:p>
+                    <a:p>
+                      <a:pPr algn="ctr">
+                        <a:lnSpc>
+                          <a:spcPct val="96000"/>
+                        </a:lnSpc>
+                        <a:spcBef>
+                          <a:spcPts val="100"/>
+                        </a:spcBef>
+                        <a:spcAft>
+                          <a:spcPts val="0"/>
+                        </a:spcAft>
+                      </a:pPr>
+                      <a:r>
+                        <a:rPr sz="700" b="0">
+                          <a:solidFill>
+                            <a:srgbClr val="595959"/>
+                          </a:solidFill>
+                        </a:rPr>
+                        <a:t>重点フォロー</a:t>
                       </a:r>
                     </a:p>
                   </a:txBody>
@@ -38723,6 +38852,27 @@
                           </a:solidFill>
                         </a:rPr>
                         <a:t>4</a:t>
+                      </a:r>
+                    </a:p>
+                    <a:p>
+                      <a:pPr algn="ctr">
+                        <a:lnSpc>
+                          <a:spcPct val="96000"/>
+                        </a:lnSpc>
+                        <a:spcBef>
+                          <a:spcPts val="100"/>
+                        </a:spcBef>
+                        <a:spcAft>
+                          <a:spcPts val="0"/>
+                        </a:spcAft>
+                      </a:pPr>
+                      <a:r>
+                        <a:rPr sz="700" b="0">
+                          <a:solidFill>
+                            <a:srgbClr val="595959"/>
+                          </a:solidFill>
+                        </a:rPr>
+                        <a:t>高い</a:t>
                       </a:r>
                     </a:p>
                   </a:txBody>
@@ -38848,15 +38998,23 @@
                     <a:bodyPr/>
                     <a:lstStyle/>
                     <a:p>
-                      <a:pPr algn="l">
+                      <a:pPr algn="ctr">
                         <a:lnSpc>
                           <a:spcPct val="96000"/>
                         </a:lnSpc>
                       </a:pPr>
+                      <a:r>
+                        <a:rPr sz="700" b="0">
+                          <a:solidFill>
+                            <a:srgbClr val="595959"/>
+                          </a:solidFill>
+                        </a:rPr>
+                        <a:t>再設計中</a:t>
+                      </a:r>
                       <a:endParaRPr/>
                     </a:p>
                   </a:txBody>
-                  <a:tcPr marL="50800" marR="50800" marT="12700" marB="12700" anchor="ctr">
+                  <a:tcPr marL="50800" marR="50800" marT="12700" marB="12700" anchor="b">
                     <a:solidFill>
                       <a:srgbClr val="F8FDFA"/>
                     </a:solidFill>
@@ -38879,6 +39037,27 @@
                           </a:solidFill>
                         </a:rPr>
                         <a:t>C</a:t>
+                      </a:r>
+                    </a:p>
+                    <a:p>
+                      <a:pPr algn="ctr">
+                        <a:lnSpc>
+                          <a:spcPct val="96000"/>
+                        </a:lnSpc>
+                        <a:spcBef>
+                          <a:spcPts val="100"/>
+                        </a:spcBef>
+                        <a:spcAft>
+                          <a:spcPts val="0"/>
+                        </a:spcAft>
+                      </a:pPr>
+                      <a:r>
+                        <a:rPr sz="700" b="0">
+                          <a:solidFill>
+                            <a:srgbClr val="595959"/>
+                          </a:solidFill>
+                        </a:rPr>
+                        <a:t>現行案では難</a:t>
                       </a:r>
                     </a:p>
                   </a:txBody>
@@ -38905,6 +39084,27 @@
                           </a:solidFill>
                         </a:rPr>
                         <a:t>-</a:t>
+                      </a:r>
+                    </a:p>
+                    <a:p>
+                      <a:pPr algn="ctr">
+                        <a:lnSpc>
+                          <a:spcPct val="96000"/>
+                        </a:lnSpc>
+                        <a:spcBef>
+                          <a:spcPts val="100"/>
+                        </a:spcBef>
+                        <a:spcAft>
+                          <a:spcPts val="0"/>
+                        </a:spcAft>
+                      </a:pPr>
+                      <a:r>
+                        <a:rPr sz="700" b="0">
+                          <a:solidFill>
+                            <a:srgbClr val="595959"/>
+                          </a:solidFill>
+                        </a:rPr>
+                        <a:t>評価不可</a:t>
                       </a:r>
                     </a:p>
                   </a:txBody>
@@ -39043,15 +39243,23 @@
                     <a:bodyPr/>
                     <a:lstStyle/>
                     <a:p>
-                      <a:pPr algn="l">
+                      <a:pPr algn="ctr">
                         <a:lnSpc>
                           <a:spcPct val="96000"/>
                         </a:lnSpc>
                       </a:pPr>
+                      <a:r>
+                        <a:rPr sz="700" b="0">
+                          <a:solidFill>
+                            <a:srgbClr val="595959"/>
+                          </a:solidFill>
+                        </a:rPr>
+                        <a:t>効果・筋書きまで</a:t>
+                      </a:r>
                       <a:endParaRPr/>
                     </a:p>
                   </a:txBody>
-                  <a:tcPr marL="50800" marR="50800" marT="12700" marB="12700" anchor="ctr">
+                  <a:tcPr marL="50800" marR="50800" marT="12700" marB="12700" anchor="b">
                     <a:solidFill>
                       <a:srgbClr val="FFFFFF"/>
                     </a:solidFill>
@@ -39074,6 +39282,27 @@
                           </a:solidFill>
                         </a:rPr>
                         <a:t>A</a:t>
+                      </a:r>
+                    </a:p>
+                    <a:p>
+                      <a:pPr algn="ctr">
+                        <a:lnSpc>
+                          <a:spcPct val="96000"/>
+                        </a:lnSpc>
+                        <a:spcBef>
+                          <a:spcPts val="100"/>
+                        </a:spcBef>
+                        <a:spcAft>
+                          <a:spcPts val="0"/>
+                        </a:spcAft>
+                      </a:pPr>
+                      <a:r>
+                        <a:rPr sz="700" b="0">
+                          <a:solidFill>
+                            <a:srgbClr val="595959"/>
+                          </a:solidFill>
+                        </a:rPr>
+                        <a:t>見込み高い</a:t>
                       </a:r>
                     </a:p>
                   </a:txBody>
@@ -39100,6 +39329,27 @@
                           </a:solidFill>
                         </a:rPr>
                         <a:t>3</a:t>
+                      </a:r>
+                    </a:p>
+                    <a:p>
+                      <a:pPr algn="ctr">
+                        <a:lnSpc>
+                          <a:spcPct val="96000"/>
+                        </a:lnSpc>
+                        <a:spcBef>
+                          <a:spcPts val="100"/>
+                        </a:spcBef>
+                        <a:spcAft>
+                          <a:spcPts val="0"/>
+                        </a:spcAft>
+                      </a:pPr>
+                      <a:r>
+                        <a:rPr sz="700" b="0">
+                          <a:solidFill>
+                            <a:srgbClr val="595959"/>
+                          </a:solidFill>
+                        </a:rPr>
+                        <a:t>標準</a:t>
                       </a:r>
                     </a:p>
                   </a:txBody>
@@ -39225,15 +39475,23 @@
                     <a:bodyPr/>
                     <a:lstStyle/>
                     <a:p>
-                      <a:pPr algn="l">
+                      <a:pPr algn="ctr">
                         <a:lnSpc>
                           <a:spcPct val="96000"/>
                         </a:lnSpc>
                       </a:pPr>
+                      <a:r>
+                        <a:rPr sz="700" b="0">
+                          <a:solidFill>
+                            <a:srgbClr val="595959"/>
+                          </a:solidFill>
+                        </a:rPr>
+                        <a:t>MVP・入出力OK</a:t>
+                      </a:r>
                       <a:endParaRPr/>
                     </a:p>
                   </a:txBody>
-                  <a:tcPr marL="50800" marR="50800" marT="12700" marB="12700" anchor="ctr">
+                  <a:tcPr marL="50800" marR="50800" marT="12700" marB="12700" anchor="b">
                     <a:solidFill>
                       <a:srgbClr val="F8FDFA"/>
                     </a:solidFill>
@@ -39256,6 +39514,27 @@
                           </a:solidFill>
                         </a:rPr>
                         <a:t>B</a:t>
+                      </a:r>
+                    </a:p>
+                    <a:p>
+                      <a:pPr algn="ctr">
+                        <a:lnSpc>
+                          <a:spcPct val="96000"/>
+                        </a:lnSpc>
+                        <a:spcBef>
+                          <a:spcPts val="100"/>
+                        </a:spcBef>
+                        <a:spcAft>
+                          <a:spcPts val="0"/>
+                        </a:spcAft>
+                      </a:pPr>
+                      <a:r>
+                        <a:rPr sz="700" b="0">
+                          <a:solidFill>
+                            <a:srgbClr val="595959"/>
+                          </a:solidFill>
+                        </a:rPr>
+                        <a:t>重点フォロー</a:t>
                       </a:r>
                     </a:p>
                   </a:txBody>
@@ -39282,6 +39561,27 @@
                           </a:solidFill>
                         </a:rPr>
                         <a:t>4</a:t>
+                      </a:r>
+                    </a:p>
+                    <a:p>
+                      <a:pPr algn="ctr">
+                        <a:lnSpc>
+                          <a:spcPct val="96000"/>
+                        </a:lnSpc>
+                        <a:spcBef>
+                          <a:spcPts val="100"/>
+                        </a:spcBef>
+                        <a:spcAft>
+                          <a:spcPts val="0"/>
+                        </a:spcAft>
+                      </a:pPr>
+                      <a:r>
+                        <a:rPr sz="700" b="0">
+                          <a:solidFill>
+                            <a:srgbClr val="595959"/>
+                          </a:solidFill>
+                        </a:rPr>
+                        <a:t>高い</a:t>
                       </a:r>
                     </a:p>
                   </a:txBody>
@@ -39407,15 +39707,23 @@
                     <a:bodyPr/>
                     <a:lstStyle/>
                     <a:p>
-                      <a:pPr algn="l">
+                      <a:pPr algn="ctr">
                         <a:lnSpc>
                           <a:spcPct val="96000"/>
                         </a:lnSpc>
                       </a:pPr>
+                      <a:r>
+                        <a:rPr sz="700" b="0">
+                          <a:solidFill>
+                            <a:srgbClr val="595959"/>
+                          </a:solidFill>
+                        </a:rPr>
+                        <a:t>効果・筋書きまで</a:t>
+                      </a:r>
                       <a:endParaRPr/>
                     </a:p>
                   </a:txBody>
-                  <a:tcPr marL="50800" marR="50800" marT="12700" marB="12700" anchor="ctr">
+                  <a:tcPr marL="50800" marR="50800" marT="12700" marB="12700" anchor="b">
                     <a:solidFill>
                       <a:srgbClr val="FFFFFF"/>
                     </a:solidFill>
@@ -39438,6 +39746,27 @@
                           </a:solidFill>
                         </a:rPr>
                         <a:t>S</a:t>
+                      </a:r>
+                    </a:p>
+                    <a:p>
+                      <a:pPr algn="ctr">
+                        <a:lnSpc>
+                          <a:spcPct val="96000"/>
+                        </a:lnSpc>
+                        <a:spcBef>
+                          <a:spcPts val="100"/>
+                        </a:spcBef>
+                        <a:spcAft>
+                          <a:spcPts val="0"/>
+                        </a:spcAft>
+                      </a:pPr>
+                      <a:r>
+                        <a:rPr sz="700" b="0">
+                          <a:solidFill>
+                            <a:srgbClr val="595959"/>
+                          </a:solidFill>
+                        </a:rPr>
+                        <a:t>可能性大</a:t>
                       </a:r>
                     </a:p>
                   </a:txBody>
@@ -39464,6 +39793,27 @@
                           </a:solidFill>
                         </a:rPr>
                         <a:t>3</a:t>
+                      </a:r>
+                    </a:p>
+                    <a:p>
+                      <a:pPr algn="ctr">
+                        <a:lnSpc>
+                          <a:spcPct val="96000"/>
+                        </a:lnSpc>
+                        <a:spcBef>
+                          <a:spcPts val="100"/>
+                        </a:spcBef>
+                        <a:spcAft>
+                          <a:spcPts val="0"/>
+                        </a:spcAft>
+                      </a:pPr>
+                      <a:r>
+                        <a:rPr sz="700" b="0">
+                          <a:solidFill>
+                            <a:srgbClr val="595959"/>
+                          </a:solidFill>
+                        </a:rPr>
+                        <a:t>標準</a:t>
                       </a:r>
                     </a:p>
                   </a:txBody>
@@ -39589,15 +39939,23 @@
                     <a:bodyPr/>
                     <a:lstStyle/>
                     <a:p>
-                      <a:pPr algn="l">
+                      <a:pPr algn="ctr">
                         <a:lnSpc>
                           <a:spcPct val="96000"/>
                         </a:lnSpc>
                       </a:pPr>
+                      <a:r>
+                        <a:rPr sz="700" b="0">
+                          <a:solidFill>
+                            <a:srgbClr val="595959"/>
+                          </a:solidFill>
+                        </a:rPr>
+                        <a:t>概念設計まで</a:t>
+                      </a:r>
                       <a:endParaRPr/>
                     </a:p>
                   </a:txBody>
-                  <a:tcPr marL="50800" marR="50800" marT="12700" marB="12700" anchor="ctr">
+                  <a:tcPr marL="50800" marR="50800" marT="12700" marB="12700" anchor="b">
                     <a:solidFill>
                       <a:srgbClr val="F8FDFA"/>
                     </a:solidFill>
@@ -39620,6 +39978,27 @@
                           </a:solidFill>
                         </a:rPr>
                         <a:t>B</a:t>
+                      </a:r>
+                    </a:p>
+                    <a:p>
+                      <a:pPr algn="ctr">
+                        <a:lnSpc>
+                          <a:spcPct val="96000"/>
+                        </a:lnSpc>
+                        <a:spcBef>
+                          <a:spcPts val="100"/>
+                        </a:spcBef>
+                        <a:spcAft>
+                          <a:spcPts val="0"/>
+                        </a:spcAft>
+                      </a:pPr>
+                      <a:r>
+                        <a:rPr sz="700" b="0">
+                          <a:solidFill>
+                            <a:srgbClr val="595959"/>
+                          </a:solidFill>
+                        </a:rPr>
+                        <a:t>重点フォロー</a:t>
                       </a:r>
                     </a:p>
                   </a:txBody>
@@ -39646,6 +40025,27 @@
                           </a:solidFill>
                         </a:rPr>
                         <a:t>4</a:t>
+                      </a:r>
+                    </a:p>
+                    <a:p>
+                      <a:pPr algn="ctr">
+                        <a:lnSpc>
+                          <a:spcPct val="96000"/>
+                        </a:lnSpc>
+                        <a:spcBef>
+                          <a:spcPts val="100"/>
+                        </a:spcBef>
+                        <a:spcAft>
+                          <a:spcPts val="0"/>
+                        </a:spcAft>
+                      </a:pPr>
+                      <a:r>
+                        <a:rPr sz="700" b="0">
+                          <a:solidFill>
+                            <a:srgbClr val="595959"/>
+                          </a:solidFill>
+                        </a:rPr>
+                        <a:t>高い</a:t>
                       </a:r>
                     </a:p>
                   </a:txBody>
@@ -39771,15 +40171,23 @@
                     <a:bodyPr/>
                     <a:lstStyle/>
                     <a:p>
-                      <a:pPr algn="l">
+                      <a:pPr algn="ctr">
                         <a:lnSpc>
                           <a:spcPct val="96000"/>
                         </a:lnSpc>
                       </a:pPr>
+                      <a:r>
+                        <a:rPr sz="700" b="0">
+                          <a:solidFill>
+                            <a:srgbClr val="595959"/>
+                          </a:solidFill>
+                        </a:rPr>
+                        <a:t>概念設計まで</a:t>
+                      </a:r>
                       <a:endParaRPr/>
                     </a:p>
                   </a:txBody>
-                  <a:tcPr marL="50800" marR="50800" marT="12700" marB="12700" anchor="ctr">
+                  <a:tcPr marL="50800" marR="50800" marT="12700" marB="12700" anchor="b">
                     <a:solidFill>
                       <a:srgbClr val="FFFFFF"/>
                     </a:solidFill>
@@ -39802,6 +40210,27 @@
                           </a:solidFill>
                         </a:rPr>
                         <a:t>B</a:t>
+                      </a:r>
+                    </a:p>
+                    <a:p>
+                      <a:pPr algn="ctr">
+                        <a:lnSpc>
+                          <a:spcPct val="96000"/>
+                        </a:lnSpc>
+                        <a:spcBef>
+                          <a:spcPts val="100"/>
+                        </a:spcBef>
+                        <a:spcAft>
+                          <a:spcPts val="0"/>
+                        </a:spcAft>
+                      </a:pPr>
+                      <a:r>
+                        <a:rPr sz="700" b="0">
+                          <a:solidFill>
+                            <a:srgbClr val="595959"/>
+                          </a:solidFill>
+                        </a:rPr>
+                        <a:t>重点フォロー</a:t>
                       </a:r>
                     </a:p>
                   </a:txBody>
@@ -39828,6 +40257,27 @@
                           </a:solidFill>
                         </a:rPr>
                         <a:t>4</a:t>
+                      </a:r>
+                    </a:p>
+                    <a:p>
+                      <a:pPr algn="ctr">
+                        <a:lnSpc>
+                          <a:spcPct val="96000"/>
+                        </a:lnSpc>
+                        <a:spcBef>
+                          <a:spcPts val="100"/>
+                        </a:spcBef>
+                        <a:spcAft>
+                          <a:spcPts val="0"/>
+                        </a:spcAft>
+                      </a:pPr>
+                      <a:r>
+                        <a:rPr sz="700" b="0">
+                          <a:solidFill>
+                            <a:srgbClr val="595959"/>
+                          </a:solidFill>
+                        </a:rPr>
+                        <a:t>高い</a:t>
                       </a:r>
                     </a:p>
                   </a:txBody>
@@ -39953,15 +40403,23 @@
                     <a:bodyPr/>
                     <a:lstStyle/>
                     <a:p>
-                      <a:pPr algn="l">
+                      <a:pPr algn="ctr">
                         <a:lnSpc>
                           <a:spcPct val="96000"/>
                         </a:lnSpc>
                       </a:pPr>
+                      <a:r>
+                        <a:rPr sz="700" b="0">
+                          <a:solidFill>
+                            <a:srgbClr val="595959"/>
+                          </a:solidFill>
+                        </a:rPr>
+                        <a:t>概念設計まで</a:t>
+                      </a:r>
                       <a:endParaRPr/>
                     </a:p>
                   </a:txBody>
-                  <a:tcPr marL="50800" marR="50800" marT="12700" marB="12700" anchor="ctr">
+                  <a:tcPr marL="50800" marR="50800" marT="12700" marB="12700" anchor="b">
                     <a:solidFill>
                       <a:srgbClr val="F8FDFA"/>
                     </a:solidFill>
@@ -39984,6 +40442,27 @@
                           </a:solidFill>
                         </a:rPr>
                         <a:t>A</a:t>
+                      </a:r>
+                    </a:p>
+                    <a:p>
+                      <a:pPr algn="ctr">
+                        <a:lnSpc>
+                          <a:spcPct val="96000"/>
+                        </a:lnSpc>
+                        <a:spcBef>
+                          <a:spcPts val="100"/>
+                        </a:spcBef>
+                        <a:spcAft>
+                          <a:spcPts val="0"/>
+                        </a:spcAft>
+                      </a:pPr>
+                      <a:r>
+                        <a:rPr sz="700" b="0">
+                          <a:solidFill>
+                            <a:srgbClr val="595959"/>
+                          </a:solidFill>
+                        </a:rPr>
+                        <a:t>見込み高い</a:t>
                       </a:r>
                     </a:p>
                   </a:txBody>
@@ -40010,6 +40489,27 @@
                           </a:solidFill>
                         </a:rPr>
                         <a:t>3</a:t>
+                      </a:r>
+                    </a:p>
+                    <a:p>
+                      <a:pPr algn="ctr">
+                        <a:lnSpc>
+                          <a:spcPct val="96000"/>
+                        </a:lnSpc>
+                        <a:spcBef>
+                          <a:spcPts val="100"/>
+                        </a:spcBef>
+                        <a:spcAft>
+                          <a:spcPts val="0"/>
+                        </a:spcAft>
+                      </a:pPr>
+                      <a:r>
+                        <a:rPr sz="700" b="0">
+                          <a:solidFill>
+                            <a:srgbClr val="595959"/>
+                          </a:solidFill>
+                        </a:rPr>
+                        <a:t>標準</a:t>
                       </a:r>
                     </a:p>
                   </a:txBody>
@@ -40135,15 +40635,23 @@
                     <a:bodyPr/>
                     <a:lstStyle/>
                     <a:p>
-                      <a:pPr algn="l">
+                      <a:pPr algn="ctr">
                         <a:lnSpc>
                           <a:spcPct val="96000"/>
                         </a:lnSpc>
                       </a:pPr>
+                      <a:r>
+                        <a:rPr sz="700" b="0">
+                          <a:solidFill>
+                            <a:srgbClr val="595959"/>
+                          </a:solidFill>
+                        </a:rPr>
+                        <a:t>概念設計まで</a:t>
+                      </a:r>
                       <a:endParaRPr/>
                     </a:p>
                   </a:txBody>
-                  <a:tcPr marL="50800" marR="50800" marT="12700" marB="12700" anchor="ctr">
+                  <a:tcPr marL="50800" marR="50800" marT="12700" marB="12700" anchor="b">
                     <a:solidFill>
                       <a:srgbClr val="FFFFFF"/>
                     </a:solidFill>
@@ -40166,6 +40674,27 @@
                           </a:solidFill>
                         </a:rPr>
                         <a:t>A</a:t>
+                      </a:r>
+                    </a:p>
+                    <a:p>
+                      <a:pPr algn="ctr">
+                        <a:lnSpc>
+                          <a:spcPct val="96000"/>
+                        </a:lnSpc>
+                        <a:spcBef>
+                          <a:spcPts val="100"/>
+                        </a:spcBef>
+                        <a:spcAft>
+                          <a:spcPts val="0"/>
+                        </a:spcAft>
+                      </a:pPr>
+                      <a:r>
+                        <a:rPr sz="700" b="0">
+                          <a:solidFill>
+                            <a:srgbClr val="595959"/>
+                          </a:solidFill>
+                        </a:rPr>
+                        <a:t>見込み高い</a:t>
                       </a:r>
                     </a:p>
                   </a:txBody>
@@ -40192,6 +40721,27 @@
                           </a:solidFill>
                         </a:rPr>
                         <a:t>3</a:t>
+                      </a:r>
+                    </a:p>
+                    <a:p>
+                      <a:pPr algn="ctr">
+                        <a:lnSpc>
+                          <a:spcPct val="96000"/>
+                        </a:lnSpc>
+                        <a:spcBef>
+                          <a:spcPts val="100"/>
+                        </a:spcBef>
+                        <a:spcAft>
+                          <a:spcPts val="0"/>
+                        </a:spcAft>
+                      </a:pPr>
+                      <a:r>
+                        <a:rPr sz="700" b="0">
+                          <a:solidFill>
+                            <a:srgbClr val="595959"/>
+                          </a:solidFill>
+                        </a:rPr>
+                        <a:t>標準</a:t>
                       </a:r>
                     </a:p>
                   </a:txBody>
@@ -40276,7 +40826,7 @@
         </p:nvSpPr>
         <p:spPr>
           <a:xfrm>
-            <a:off x="3849624" y="2260854"/>
+            <a:off x="3849624" y="2205990"/>
             <a:ext cx="219456" cy="141732"/>
           </a:xfrm>
           <a:prstGeom prst="chevron">
@@ -40321,7 +40871,7 @@
         </p:nvSpPr>
         <p:spPr>
           <a:xfrm>
-            <a:off x="4050792" y="2260854"/>
+            <a:off x="4050792" y="2205990"/>
             <a:ext cx="219456" cy="141732"/>
           </a:xfrm>
           <a:prstGeom prst="chevron">
@@ -40366,7 +40916,7 @@
         </p:nvSpPr>
         <p:spPr>
           <a:xfrm>
-            <a:off x="4251960" y="2260854"/>
+            <a:off x="4251960" y="2205990"/>
             <a:ext cx="219456" cy="141732"/>
           </a:xfrm>
           <a:prstGeom prst="chevron">
@@ -40411,7 +40961,7 @@
         </p:nvSpPr>
         <p:spPr>
           <a:xfrm>
-            <a:off x="4453128" y="2260854"/>
+            <a:off x="4453128" y="2205990"/>
             <a:ext cx="219456" cy="141732"/>
           </a:xfrm>
           <a:prstGeom prst="chevron">
@@ -40456,7 +41006,7 @@
         </p:nvSpPr>
         <p:spPr>
           <a:xfrm>
-            <a:off x="4654296" y="2260854"/>
+            <a:off x="4654296" y="2205990"/>
             <a:ext cx="219456" cy="141732"/>
           </a:xfrm>
           <a:prstGeom prst="chevron">
@@ -40501,7 +41051,7 @@
         </p:nvSpPr>
         <p:spPr>
           <a:xfrm>
-            <a:off x="4892040" y="2221992"/>
+            <a:off x="4892040" y="2167128"/>
             <a:ext cx="475488" cy="219456"/>
           </a:xfrm>
           <a:prstGeom prst="rect">
@@ -40539,7 +41089,7 @@
         </p:nvSpPr>
         <p:spPr>
           <a:xfrm>
-            <a:off x="3849624" y="2644902"/>
+            <a:off x="3849624" y="2590038"/>
             <a:ext cx="219456" cy="141732"/>
           </a:xfrm>
           <a:prstGeom prst="chevron">
@@ -40584,7 +41134,7 @@
         </p:nvSpPr>
         <p:spPr>
           <a:xfrm>
-            <a:off x="4050792" y="2644902"/>
+            <a:off x="4050792" y="2590038"/>
             <a:ext cx="219456" cy="141732"/>
           </a:xfrm>
           <a:prstGeom prst="chevron">
@@ -40629,7 +41179,7 @@
         </p:nvSpPr>
         <p:spPr>
           <a:xfrm>
-            <a:off x="4251960" y="2644902"/>
+            <a:off x="4251960" y="2590038"/>
             <a:ext cx="219456" cy="141732"/>
           </a:xfrm>
           <a:prstGeom prst="chevron">
@@ -40674,7 +41224,7 @@
         </p:nvSpPr>
         <p:spPr>
           <a:xfrm>
-            <a:off x="4453128" y="2644902"/>
+            <a:off x="4453128" y="2590038"/>
             <a:ext cx="219456" cy="141732"/>
           </a:xfrm>
           <a:prstGeom prst="chevron">
@@ -40719,7 +41269,7 @@
         </p:nvSpPr>
         <p:spPr>
           <a:xfrm>
-            <a:off x="4654296" y="2644902"/>
+            <a:off x="4654296" y="2590038"/>
             <a:ext cx="219456" cy="141732"/>
           </a:xfrm>
           <a:prstGeom prst="chevron">
@@ -40764,7 +41314,7 @@
         </p:nvSpPr>
         <p:spPr>
           <a:xfrm>
-            <a:off x="4892040" y="2606040"/>
+            <a:off x="4892040" y="2551176"/>
             <a:ext cx="475488" cy="219456"/>
           </a:xfrm>
           <a:prstGeom prst="rect">
@@ -40802,7 +41352,7 @@
         </p:nvSpPr>
         <p:spPr>
           <a:xfrm>
-            <a:off x="3849624" y="3028950"/>
+            <a:off x="3849624" y="2974086"/>
             <a:ext cx="219456" cy="141732"/>
           </a:xfrm>
           <a:prstGeom prst="chevron">
@@ -40847,7 +41397,7 @@
         </p:nvSpPr>
         <p:spPr>
           <a:xfrm>
-            <a:off x="4050792" y="3028950"/>
+            <a:off x="4050792" y="2974086"/>
             <a:ext cx="219456" cy="141732"/>
           </a:xfrm>
           <a:prstGeom prst="chevron">
@@ -40892,7 +41442,7 @@
         </p:nvSpPr>
         <p:spPr>
           <a:xfrm>
-            <a:off x="4251960" y="3028950"/>
+            <a:off x="4251960" y="2974086"/>
             <a:ext cx="219456" cy="141732"/>
           </a:xfrm>
           <a:prstGeom prst="chevron">
@@ -40937,7 +41487,7 @@
         </p:nvSpPr>
         <p:spPr>
           <a:xfrm>
-            <a:off x="4453128" y="3028950"/>
+            <a:off x="4453128" y="2974086"/>
             <a:ext cx="219456" cy="141732"/>
           </a:xfrm>
           <a:prstGeom prst="chevron">
@@ -40982,7 +41532,7 @@
         </p:nvSpPr>
         <p:spPr>
           <a:xfrm>
-            <a:off x="4654296" y="3028950"/>
+            <a:off x="4654296" y="2974086"/>
             <a:ext cx="219456" cy="141732"/>
           </a:xfrm>
           <a:prstGeom prst="chevron">
@@ -41027,7 +41577,7 @@
         </p:nvSpPr>
         <p:spPr>
           <a:xfrm>
-            <a:off x="4892040" y="2990088"/>
+            <a:off x="4892040" y="2935224"/>
             <a:ext cx="475488" cy="219456"/>
           </a:xfrm>
           <a:prstGeom prst="rect">
@@ -41065,7 +41615,7 @@
         </p:nvSpPr>
         <p:spPr>
           <a:xfrm>
-            <a:off x="3849624" y="3412998"/>
+            <a:off x="3849624" y="3358134"/>
             <a:ext cx="219456" cy="141732"/>
           </a:xfrm>
           <a:prstGeom prst="chevron">
@@ -41110,7 +41660,7 @@
         </p:nvSpPr>
         <p:spPr>
           <a:xfrm>
-            <a:off x="4050792" y="3412998"/>
+            <a:off x="4050792" y="3358134"/>
             <a:ext cx="219456" cy="141732"/>
           </a:xfrm>
           <a:prstGeom prst="chevron">
@@ -41155,7 +41705,7 @@
         </p:nvSpPr>
         <p:spPr>
           <a:xfrm>
-            <a:off x="4251960" y="3412998"/>
+            <a:off x="4251960" y="3358134"/>
             <a:ext cx="219456" cy="141732"/>
           </a:xfrm>
           <a:prstGeom prst="chevron">
@@ -41200,7 +41750,7 @@
         </p:nvSpPr>
         <p:spPr>
           <a:xfrm>
-            <a:off x="4453128" y="3412998"/>
+            <a:off x="4453128" y="3358134"/>
             <a:ext cx="219456" cy="141732"/>
           </a:xfrm>
           <a:prstGeom prst="chevron">
@@ -41245,7 +41795,7 @@
         </p:nvSpPr>
         <p:spPr>
           <a:xfrm>
-            <a:off x="4654296" y="3412998"/>
+            <a:off x="4654296" y="3358134"/>
             <a:ext cx="219456" cy="141732"/>
           </a:xfrm>
           <a:prstGeom prst="chevron">
@@ -41290,7 +41840,7 @@
         </p:nvSpPr>
         <p:spPr>
           <a:xfrm>
-            <a:off x="4892040" y="3374136"/>
+            <a:off x="4892040" y="3319272"/>
             <a:ext cx="475488" cy="219456"/>
           </a:xfrm>
           <a:prstGeom prst="rect">
@@ -41328,7 +41878,7 @@
         </p:nvSpPr>
         <p:spPr>
           <a:xfrm>
-            <a:off x="3849624" y="3797046"/>
+            <a:off x="3849624" y="3742182"/>
             <a:ext cx="219456" cy="141732"/>
           </a:xfrm>
           <a:prstGeom prst="chevron">
@@ -41373,7 +41923,7 @@
         </p:nvSpPr>
         <p:spPr>
           <a:xfrm>
-            <a:off x="4050792" y="3797046"/>
+            <a:off x="4050792" y="3742182"/>
             <a:ext cx="219456" cy="141732"/>
           </a:xfrm>
           <a:prstGeom prst="chevron">
@@ -41418,7 +41968,7 @@
         </p:nvSpPr>
         <p:spPr>
           <a:xfrm>
-            <a:off x="4251960" y="3797046"/>
+            <a:off x="4251960" y="3742182"/>
             <a:ext cx="219456" cy="141732"/>
           </a:xfrm>
           <a:prstGeom prst="chevron">
@@ -41463,7 +42013,7 @@
         </p:nvSpPr>
         <p:spPr>
           <a:xfrm>
-            <a:off x="4453128" y="3797046"/>
+            <a:off x="4453128" y="3742182"/>
             <a:ext cx="219456" cy="141732"/>
           </a:xfrm>
           <a:prstGeom prst="chevron">
@@ -41508,7 +42058,7 @@
         </p:nvSpPr>
         <p:spPr>
           <a:xfrm>
-            <a:off x="4654296" y="3797046"/>
+            <a:off x="4654296" y="3742182"/>
             <a:ext cx="219456" cy="141732"/>
           </a:xfrm>
           <a:prstGeom prst="chevron">
@@ -41553,7 +42103,7 @@
         </p:nvSpPr>
         <p:spPr>
           <a:xfrm>
-            <a:off x="4892040" y="3758184"/>
+            <a:off x="4892040" y="3703320"/>
             <a:ext cx="475488" cy="219456"/>
           </a:xfrm>
           <a:prstGeom prst="rect">
@@ -41591,7 +42141,7 @@
         </p:nvSpPr>
         <p:spPr>
           <a:xfrm>
-            <a:off x="3849624" y="4181094"/>
+            <a:off x="3849624" y="4126230"/>
             <a:ext cx="219456" cy="141732"/>
           </a:xfrm>
           <a:prstGeom prst="chevron">
@@ -41636,7 +42186,7 @@
         </p:nvSpPr>
         <p:spPr>
           <a:xfrm>
-            <a:off x="4050792" y="4181094"/>
+            <a:off x="4050792" y="4126230"/>
             <a:ext cx="219456" cy="141732"/>
           </a:xfrm>
           <a:prstGeom prst="chevron">
@@ -41681,7 +42231,7 @@
         </p:nvSpPr>
         <p:spPr>
           <a:xfrm>
-            <a:off x="4251960" y="4181094"/>
+            <a:off x="4251960" y="4126230"/>
             <a:ext cx="219456" cy="141732"/>
           </a:xfrm>
           <a:prstGeom prst="chevron">
@@ -41726,7 +42276,7 @@
         </p:nvSpPr>
         <p:spPr>
           <a:xfrm>
-            <a:off x="4453128" y="4181094"/>
+            <a:off x="4453128" y="4126230"/>
             <a:ext cx="219456" cy="141732"/>
           </a:xfrm>
           <a:prstGeom prst="chevron">
@@ -41771,7 +42321,7 @@
         </p:nvSpPr>
         <p:spPr>
           <a:xfrm>
-            <a:off x="4654296" y="4181094"/>
+            <a:off x="4654296" y="4126230"/>
             <a:ext cx="219456" cy="141732"/>
           </a:xfrm>
           <a:prstGeom prst="chevron">
@@ -41816,7 +42366,7 @@
         </p:nvSpPr>
         <p:spPr>
           <a:xfrm>
-            <a:off x="4892040" y="4142232"/>
+            <a:off x="4892040" y="4087368"/>
             <a:ext cx="475488" cy="219456"/>
           </a:xfrm>
           <a:prstGeom prst="rect">
@@ -41854,7 +42404,7 @@
         </p:nvSpPr>
         <p:spPr>
           <a:xfrm>
-            <a:off x="3849624" y="4565142"/>
+            <a:off x="3849624" y="4510278"/>
             <a:ext cx="219456" cy="141732"/>
           </a:xfrm>
           <a:prstGeom prst="chevron">
@@ -41899,7 +42449,7 @@
         </p:nvSpPr>
         <p:spPr>
           <a:xfrm>
-            <a:off x="4050792" y="4565142"/>
+            <a:off x="4050792" y="4510278"/>
             <a:ext cx="219456" cy="141732"/>
           </a:xfrm>
           <a:prstGeom prst="chevron">
@@ -41944,7 +42494,7 @@
         </p:nvSpPr>
         <p:spPr>
           <a:xfrm>
-            <a:off x="4251960" y="4565142"/>
+            <a:off x="4251960" y="4510278"/>
             <a:ext cx="219456" cy="141732"/>
           </a:xfrm>
           <a:prstGeom prst="chevron">
@@ -41989,7 +42539,7 @@
         </p:nvSpPr>
         <p:spPr>
           <a:xfrm>
-            <a:off x="4453128" y="4565142"/>
+            <a:off x="4453128" y="4510278"/>
             <a:ext cx="219456" cy="141732"/>
           </a:xfrm>
           <a:prstGeom prst="chevron">
@@ -42034,7 +42584,7 @@
         </p:nvSpPr>
         <p:spPr>
           <a:xfrm>
-            <a:off x="4654296" y="4565142"/>
+            <a:off x="4654296" y="4510278"/>
             <a:ext cx="219456" cy="141732"/>
           </a:xfrm>
           <a:prstGeom prst="chevron">
@@ -42079,7 +42629,7 @@
         </p:nvSpPr>
         <p:spPr>
           <a:xfrm>
-            <a:off x="4892040" y="4526280"/>
+            <a:off x="4892040" y="4471416"/>
             <a:ext cx="475488" cy="219456"/>
           </a:xfrm>
           <a:prstGeom prst="rect">
@@ -42117,7 +42667,7 @@
         </p:nvSpPr>
         <p:spPr>
           <a:xfrm>
-            <a:off x="3849624" y="4949190"/>
+            <a:off x="3849624" y="4894326"/>
             <a:ext cx="219456" cy="141732"/>
           </a:xfrm>
           <a:prstGeom prst="chevron">
@@ -42162,7 +42712,7 @@
         </p:nvSpPr>
         <p:spPr>
           <a:xfrm>
-            <a:off x="4050792" y="4949190"/>
+            <a:off x="4050792" y="4894326"/>
             <a:ext cx="219456" cy="141732"/>
           </a:xfrm>
           <a:prstGeom prst="chevron">
@@ -42207,7 +42757,7 @@
         </p:nvSpPr>
         <p:spPr>
           <a:xfrm>
-            <a:off x="4251960" y="4949190"/>
+            <a:off x="4251960" y="4894326"/>
             <a:ext cx="219456" cy="141732"/>
           </a:xfrm>
           <a:prstGeom prst="chevron">
@@ -42252,7 +42802,7 @@
         </p:nvSpPr>
         <p:spPr>
           <a:xfrm>
-            <a:off x="4453128" y="4949190"/>
+            <a:off x="4453128" y="4894326"/>
             <a:ext cx="219456" cy="141732"/>
           </a:xfrm>
           <a:prstGeom prst="chevron">
@@ -42297,7 +42847,7 @@
         </p:nvSpPr>
         <p:spPr>
           <a:xfrm>
-            <a:off x="4654296" y="4949190"/>
+            <a:off x="4654296" y="4894326"/>
             <a:ext cx="219456" cy="141732"/>
           </a:xfrm>
           <a:prstGeom prst="chevron">
@@ -42342,7 +42892,7 @@
         </p:nvSpPr>
         <p:spPr>
           <a:xfrm>
-            <a:off x="4892040" y="4910328"/>
+            <a:off x="4892040" y="4855464"/>
             <a:ext cx="475488" cy="219456"/>
           </a:xfrm>
           <a:prstGeom prst="rect">
@@ -42380,7 +42930,7 @@
         </p:nvSpPr>
         <p:spPr>
           <a:xfrm>
-            <a:off x="3849624" y="5333238"/>
+            <a:off x="3849624" y="5278374"/>
             <a:ext cx="219456" cy="141732"/>
           </a:xfrm>
           <a:prstGeom prst="chevron">
@@ -42425,7 +42975,7 @@
         </p:nvSpPr>
         <p:spPr>
           <a:xfrm>
-            <a:off x="4050792" y="5333238"/>
+            <a:off x="4050792" y="5278374"/>
             <a:ext cx="219456" cy="141732"/>
           </a:xfrm>
           <a:prstGeom prst="chevron">
@@ -42470,7 +43020,7 @@
         </p:nvSpPr>
         <p:spPr>
           <a:xfrm>
-            <a:off x="4251960" y="5333238"/>
+            <a:off x="4251960" y="5278374"/>
             <a:ext cx="219456" cy="141732"/>
           </a:xfrm>
           <a:prstGeom prst="chevron">
@@ -42515,7 +43065,7 @@
         </p:nvSpPr>
         <p:spPr>
           <a:xfrm>
-            <a:off x="4453128" y="5333238"/>
+            <a:off x="4453128" y="5278374"/>
             <a:ext cx="219456" cy="141732"/>
           </a:xfrm>
           <a:prstGeom prst="chevron">
@@ -42560,7 +43110,7 @@
         </p:nvSpPr>
         <p:spPr>
           <a:xfrm>
-            <a:off x="4654296" y="5333238"/>
+            <a:off x="4654296" y="5278374"/>
             <a:ext cx="219456" cy="141732"/>
           </a:xfrm>
           <a:prstGeom prst="chevron">
@@ -42605,7 +43155,7 @@
         </p:nvSpPr>
         <p:spPr>
           <a:xfrm>
-            <a:off x="4892040" y="5294376"/>
+            <a:off x="4892040" y="5239512"/>
             <a:ext cx="475488" cy="219456"/>
           </a:xfrm>
           <a:prstGeom prst="rect">
@@ -42643,7 +43193,7 @@
         </p:nvSpPr>
         <p:spPr>
           <a:xfrm>
-            <a:off x="3849624" y="5717286"/>
+            <a:off x="3849624" y="5662422"/>
             <a:ext cx="219456" cy="141732"/>
           </a:xfrm>
           <a:prstGeom prst="chevron">
@@ -42688,7 +43238,7 @@
         </p:nvSpPr>
         <p:spPr>
           <a:xfrm>
-            <a:off x="4050792" y="5717286"/>
+            <a:off x="4050792" y="5662422"/>
             <a:ext cx="219456" cy="141732"/>
           </a:xfrm>
           <a:prstGeom prst="chevron">
@@ -42733,7 +43283,7 @@
         </p:nvSpPr>
         <p:spPr>
           <a:xfrm>
-            <a:off x="4251960" y="5717286"/>
+            <a:off x="4251960" y="5662422"/>
             <a:ext cx="219456" cy="141732"/>
           </a:xfrm>
           <a:prstGeom prst="chevron">
@@ -42778,7 +43328,7 @@
         </p:nvSpPr>
         <p:spPr>
           <a:xfrm>
-            <a:off x="4453128" y="5717286"/>
+            <a:off x="4453128" y="5662422"/>
             <a:ext cx="219456" cy="141732"/>
           </a:xfrm>
           <a:prstGeom prst="chevron">
@@ -42823,7 +43373,7 @@
         </p:nvSpPr>
         <p:spPr>
           <a:xfrm>
-            <a:off x="4654296" y="5717286"/>
+            <a:off x="4654296" y="5662422"/>
             <a:ext cx="219456" cy="141732"/>
           </a:xfrm>
           <a:prstGeom prst="chevron">
@@ -42868,7 +43418,7 @@
         </p:nvSpPr>
         <p:spPr>
           <a:xfrm>
-            <a:off x="4892040" y="5678424"/>
+            <a:off x="4892040" y="5623560"/>
             <a:ext cx="475488" cy="219456"/>
           </a:xfrm>
           <a:prstGeom prst="rect">
@@ -42906,7 +43456,7 @@
         </p:nvSpPr>
         <p:spPr>
           <a:xfrm>
-            <a:off x="3849624" y="6101334"/>
+            <a:off x="3849624" y="6046470"/>
             <a:ext cx="219456" cy="141732"/>
           </a:xfrm>
           <a:prstGeom prst="chevron">
@@ -42951,7 +43501,7 @@
         </p:nvSpPr>
         <p:spPr>
           <a:xfrm>
-            <a:off x="4050792" y="6101334"/>
+            <a:off x="4050792" y="6046470"/>
             <a:ext cx="219456" cy="141732"/>
           </a:xfrm>
           <a:prstGeom prst="chevron">
@@ -42996,7 +43546,7 @@
         </p:nvSpPr>
         <p:spPr>
           <a:xfrm>
-            <a:off x="4251960" y="6101334"/>
+            <a:off x="4251960" y="6046470"/>
             <a:ext cx="219456" cy="141732"/>
           </a:xfrm>
           <a:prstGeom prst="chevron">
@@ -43041,7 +43591,7 @@
         </p:nvSpPr>
         <p:spPr>
           <a:xfrm>
-            <a:off x="4453128" y="6101334"/>
+            <a:off x="4453128" y="6046470"/>
             <a:ext cx="219456" cy="141732"/>
           </a:xfrm>
           <a:prstGeom prst="chevron">
@@ -43086,7 +43636,7 @@
         </p:nvSpPr>
         <p:spPr>
           <a:xfrm>
-            <a:off x="4654296" y="6101334"/>
+            <a:off x="4654296" y="6046470"/>
             <a:ext cx="219456" cy="141732"/>
           </a:xfrm>
           <a:prstGeom prst="chevron">
@@ -43131,7 +43681,7 @@
         </p:nvSpPr>
         <p:spPr>
           <a:xfrm>
-            <a:off x="4892040" y="6062472"/>
+            <a:off x="4892040" y="6007608"/>
             <a:ext cx="475488" cy="219456"/>
           </a:xfrm>
           <a:prstGeom prst="rect">
